--- a/presentation/split/1-Raihan.pptx
+++ b/presentation/split/1-Raihan.pptx
@@ -4,21 +4,22 @@
   <p:sldMasterIdLst>
     <p:sldMasterId id="2147483648" r:id="rId1"/>
   </p:sldMasterIdLst>
+  <p:notesMasterIdLst>
+    <p:notesMasterId r:id="rId39"/>
+  </p:notesMasterIdLst>
   <p:sldIdLst>
     <p:sldId id="256" r:id="rId2"/>
     <p:sldId id="257" r:id="rId3"/>
     <p:sldId id="258" r:id="rId4"/>
     <p:sldId id="259" r:id="rId5"/>
     <p:sldId id="260" r:id="rId6"/>
+    <p:sldId id="266" r:id="rId44"/>
     <p:sldId id="261" r:id="rId7"/>
     <p:sldId id="262" r:id="rId8"/>
     <p:sldId id="263" r:id="rId9"/>
     <p:sldId id="264" r:id="rId10"/>
     <p:sldId id="265" r:id="rId11"/>
   </p:sldIdLst>
-  <p:notesMasterIdLst>
-    <p:notesMasterId r:id="rId39"/>
-  </p:notesMasterIdLst>
   <p:sldSz cx="12192000" cy="6858000"/>
   <p:notesSz cx="6858000" cy="12192000"/>
   <p:defaultTextStyle>
@@ -113,6 +114,11 @@
       </a:defRPr>
     </a:lvl9pPr>
   </p:defaultTextStyle>
+  <p:extLst>
+    <p:ext uri="{EFAFB233-063F-42B5-8137-9DF3F51BA10A}">
+      <p15:sldGuideLst xmlns:p15="http://schemas.microsoft.com/office/powerpoint/2012/main"/>
+    </p:ext>
+  </p:extLst>
 </p:presentation>
 </file>
 
@@ -138,234 +144,10 @@
           <a:chExt cx="0" cy="0"/>
         </a:xfrm>
       </p:grpSpPr>
-      <p:sp>
-        <p:nvSpPr>
-          <p:cNvPr id="2" name="Header Placeholder 1"/>
-          <p:cNvSpPr>
-            <a:spLocks noGrp="1"/>
-          </p:cNvSpPr>
-          <p:nvPr>
-            <p:ph type="hdr" sz="quarter"/>
-          </p:nvPr>
-        </p:nvSpPr>
-        <p:spPr>
-          <a:xfrm>
-            <a:off x="0" y="0"/>
-            <a:ext cx="2971800" cy="458788"/>
-          </a:xfrm>
-          <a:prstGeom prst="rect">
-            <a:avLst/>
-          </a:prstGeom>
-        </p:spPr>
-        <p:txBody>
-          <a:bodyPr vert="horz" lIns="91440" tIns="45720" rIns="91440" bIns="45720" rtlCol="0"/>
-          <a:lstStyle>
-            <a:lvl1pPr algn="l">
-              <a:defRPr sz="1200"/>
-            </a:lvl1pPr>
-          </a:lstStyle>
-          <a:p>
-            <a:endParaRPr lang="en-US"/>
-          </a:p>
-        </p:txBody>
-      </p:sp>
-      <p:sp>
-        <p:nvSpPr>
-          <p:cNvPr id="3" name="Date Placeholder 2"/>
-          <p:cNvSpPr>
-            <a:spLocks noGrp="1"/>
-          </p:cNvSpPr>
-          <p:nvPr>
-            <p:ph type="dt" idx="1"/>
-          </p:nvPr>
-        </p:nvSpPr>
-        <p:spPr>
-          <a:xfrm>
-            <a:off x="3884613" y="0"/>
-            <a:ext cx="2971800" cy="458788"/>
-          </a:xfrm>
-          <a:prstGeom prst="rect">
-            <a:avLst/>
-          </a:prstGeom>
-        </p:spPr>
-        <p:txBody>
-          <a:bodyPr vert="horz" lIns="91440" tIns="45720" rIns="91440" bIns="45720" rtlCol="0"/>
-          <a:lstStyle>
-            <a:lvl1pPr algn="r">
-              <a:defRPr sz="1200"/>
-            </a:lvl1pPr>
-          </a:lstStyle>
-          <a:p>
-            <a:fld id="{5282F153-3F37-0F45-9E97-73ACFA13230C}" type="datetimeFigureOut">
-              <a:rPr lang="en-US"/>
-              <a:t>7/23/19</a:t>
-            </a:fld>
-            <a:endParaRPr lang="en-US"/>
-          </a:p>
-        </p:txBody>
-      </p:sp>
-      <p:sp>
-        <p:nvSpPr>
-          <p:cNvPr id="4" name="Slide Image Placeholder 3"/>
-          <p:cNvSpPr>
-            <a:spLocks noGrp="1" noRot="1" noChangeAspect="1"/>
-          </p:cNvSpPr>
-          <p:nvPr>
-            <p:ph type="sldImg" idx="2"/>
-          </p:nvPr>
-        </p:nvSpPr>
-        <p:spPr>
-          <a:xfrm>
-            <a:off x="685800" y="1143000"/>
-            <a:ext cx="5486400" cy="3086100"/>
-          </a:xfrm>
-          <a:prstGeom prst="rect">
-            <a:avLst/>
-          </a:prstGeom>
-          <a:noFill/>
-          <a:ln w="12700">
-            <a:solidFill>
-              <a:prstClr val="black"/>
-            </a:solidFill>
-          </a:ln>
-        </p:spPr>
-        <p:txBody>
-          <a:bodyPr vert="horz" lIns="91440" tIns="45720" rIns="91440" bIns="45720" rtlCol="0" anchor="ctr"/>
-          <a:lstStyle/>
-          <a:p>
-            <a:endParaRPr lang="en-US"/>
-          </a:p>
-        </p:txBody>
-      </p:sp>
-      <p:sp>
-        <p:nvSpPr>
-          <p:cNvPr id="5" name="Notes Placeholder 4"/>
-          <p:cNvSpPr>
-            <a:spLocks noGrp="1"/>
-          </p:cNvSpPr>
-          <p:nvPr>
-            <p:ph type="body" sz="quarter" idx="3"/>
-          </p:nvPr>
-        </p:nvSpPr>
-        <p:spPr>
-          <a:xfrm>
-            <a:off x="685800" y="4400550"/>
-            <a:ext cx="5486400" cy="3600450"/>
-          </a:xfrm>
-          <a:prstGeom prst="rect">
-            <a:avLst/>
-          </a:prstGeom>
-        </p:spPr>
-        <p:txBody>
-          <a:bodyPr vert="horz" lIns="91440" tIns="45720" rIns="91440" bIns="45720" rtlCol="0"/>
-          <a:lstStyle/>
-          <a:p>
-            <a:pPr lvl="0"/>
-            <a:r>
-              <a:rPr lang="en-US"/>
-              <a:t>Click to edit Master text styles</a:t>
-            </a:r>
-          </a:p>
-          <a:p>
-            <a:pPr lvl="1"/>
-            <a:r>
-              <a:rPr lang="en-US"/>
-              <a:t>Second level</a:t>
-            </a:r>
-          </a:p>
-          <a:p>
-            <a:pPr lvl="2"/>
-            <a:r>
-              <a:rPr lang="en-US"/>
-              <a:t>Third level</a:t>
-            </a:r>
-          </a:p>
-          <a:p>
-            <a:pPr lvl="3"/>
-            <a:r>
-              <a:rPr lang="en-US"/>
-              <a:t>Fourth level</a:t>
-            </a:r>
-          </a:p>
-          <a:p>
-            <a:pPr lvl="4"/>
-            <a:r>
-              <a:rPr lang="en-US"/>
-              <a:t>Fifth level</a:t>
-            </a:r>
-          </a:p>
-        </p:txBody>
-      </p:sp>
-      <p:sp>
-        <p:nvSpPr>
-          <p:cNvPr id="6" name="Footer Placeholder 5"/>
-          <p:cNvSpPr>
-            <a:spLocks noGrp="1"/>
-          </p:cNvSpPr>
-          <p:nvPr>
-            <p:ph type="ftr" sz="quarter" idx="4"/>
-          </p:nvPr>
-        </p:nvSpPr>
-        <p:spPr>
-          <a:xfrm>
-            <a:off x="0" y="8685213"/>
-            <a:ext cx="2971800" cy="458787"/>
-          </a:xfrm>
-          <a:prstGeom prst="rect">
-            <a:avLst/>
-          </a:prstGeom>
-        </p:spPr>
-        <p:txBody>
-          <a:bodyPr vert="horz" lIns="91440" tIns="45720" rIns="91440" bIns="45720" rtlCol="0" anchor="b"/>
-          <a:lstStyle>
-            <a:lvl1pPr algn="l">
-              <a:defRPr sz="1200"/>
-            </a:lvl1pPr>
-          </a:lstStyle>
-          <a:p>
-            <a:endParaRPr lang="en-US"/>
-          </a:p>
-        </p:txBody>
-      </p:sp>
-      <p:sp>
-        <p:nvSpPr>
-          <p:cNvPr id="7" name="Slide Number Placeholder 6"/>
-          <p:cNvSpPr>
-            <a:spLocks noGrp="1"/>
-          </p:cNvSpPr>
-          <p:nvPr>
-            <p:ph type="sldNum" sz="quarter" idx="5"/>
-          </p:nvPr>
-        </p:nvSpPr>
-        <p:spPr>
-          <a:xfrm>
-            <a:off x="3884613" y="8685213"/>
-            <a:ext cx="2971800" cy="458787"/>
-          </a:xfrm>
-          <a:prstGeom prst="rect">
-            <a:avLst/>
-          </a:prstGeom>
-        </p:spPr>
-        <p:txBody>
-          <a:bodyPr vert="horz" lIns="91440" tIns="45720" rIns="91440" bIns="45720" rtlCol="0" anchor="b"/>
-          <a:lstStyle>
-            <a:lvl1pPr algn="r">
-              <a:defRPr sz="1200"/>
-            </a:lvl1pPr>
-          </a:lstStyle>
-          <a:p>
-            <a:fld id="{CE5E9CC1-C706-0F49-92D6-E571CC5EEA8F}" type="slidenum">
-              <a:rPr lang="en-US"/>
-              <a:t>‹#›</a:t>
-            </a:fld>
-            <a:endParaRPr lang="en-US"/>
-          </a:p>
-        </p:txBody>
-      </p:sp>
     </p:spTree>
     <p:extLst>
       <p:ext uri="{BB962C8B-B14F-4D97-AF65-F5344CB8AC3E}">
-        <p14:creationId xmlns:p14="http://schemas.microsoft.com/office/powerpoint/2010/main" val="1024086991"/>
+        <p14:creationId xmlns:p14="http://schemas.microsoft.com/office/powerpoint/2010/main" val="3440605157"/>
       </p:ext>
     </p:extLst>
   </p:cSld>
@@ -513,7 +295,6 @@
               <a:rPr lang="en-US" dirty="0"/>
               <a:t>About 20 seconds. Introduce the project and the team. One sentence on what it is: an agent that plans its own tests, runs them on a real Android device and learns from every run. Mention the industry partner, because slide 4 quotes their brief.</a:t>
             </a:r>
-            <a:endParaRPr lang="en-US" dirty="0"/>
           </a:p>
         </p:txBody>
       </p:sp>
@@ -601,7 +382,6 @@
               <a:rPr lang="en-US" dirty="0"/>
               <a:t>About 45 seconds. Each role has its own model, chosen for what that role needs. The planner needs long context and output that parses reliably, not deep reasoning, so a fast tier is right, and it is only about 8 percent of the cost. The executor has to see: it reads the accessibility tree and a screenshot on every step, which makes it about 92 percent of the cost. The investigator is deliberately a different model family, so no model is grading its own work, and setting its reasoning effort to low cut an evaluation from almost two minutes to 23 seconds. Specification extraction runs once per document but everything depends on it, so that is the one place we pay for a large model. Embeddings run locally for free. The history, briefly: we started on a free tier to prove the loop worked, tried self-hosting through a tunnel and dropped it, then moved each role down a tier once we had measured that quality held.</a:t>
             </a:r>
-            <a:endParaRPr lang="en-US" dirty="0"/>
           </a:p>
         </p:txBody>
       </p:sp>
@@ -689,7 +469,6 @@
               <a:rPr lang="en-US" dirty="0"/>
               <a:t>About 45 seconds. Three ways to test an app, and why none is enough. Manual exploratory testing finds real bugs but does not scale. Scripts only check what someone already expected. Random testing scales but has no notion of correct behaviour, so the only bug it can report is a crash. The quote at the bottom is the whole problem: without knowing what the app should do, a tool cannot tell a wrong result from a right one.</a:t>
             </a:r>
-            <a:endParaRPr lang="en-US" dirty="0"/>
           </a:p>
         </p:txBody>
       </p:sp>
@@ -777,7 +556,6 @@
               <a:rPr lang="en-US" dirty="0"/>
               <a:t>About 45 seconds. Recent research uses language models to drive Android apps. We read seven of these systems closely. None of them reads a specification, so a crash is the only thing they can call a bug. Their memory does not survive the session. None separates the agent failing from the app failing, which inflates their defect counts. And five of the seven are handed their task rather than choosing it. Our system is built on exactly these four gaps.</a:t>
             </a:r>
-            <a:endParaRPr lang="en-US" dirty="0"/>
           </a:p>
         </p:txBody>
       </p:sp>
@@ -865,7 +643,6 @@
               <a:rPr lang="en-US" dirty="0"/>
               <a:t>About 20 seconds. This is the requirement that shaped the whole design. The partner asked for an agent that improves with every run. Our answer has two parts. First, three separate agents, each with one job. Second, none of them keeps any memory of its own: every call starts fresh. So the only way the system can improve is that the shared knowledge graph grows. That makes the learning inspectable, because you can look at exactly what was learned.</a:t>
             </a:r>
-            <a:endParaRPr lang="en-US" dirty="0"/>
           </a:p>
         </p:txBody>
       </p:sp>
@@ -953,7 +730,6 @@
               <a:rPr lang="en-US" dirty="0"/>
               <a:t>About 50 seconds. The architecture is three agents around one knowledge graph. The planner reads the graph and writes one test case. The executor runs it on a real Android device through mobilerun, and records every screen it sees. The investigator reads the step-by-step trajectory and writes findings back. They hand each other a test case and a trajectory, but none of them remembers anything between calls. Everything durable lives in the graph: the requirements from the specification, the screens observed, every test and its result, and the findings. The next slide shows the same architecture with every component named.</a:t>
             </a:r>
-            <a:endParaRPr lang="en-US" dirty="0"/>
           </a:p>
         </p:txBody>
       </p:sp>
@@ -1041,7 +817,6 @@
               <a:rPr lang="en-US" dirty="0"/>
               <a:t>About 30 seconds. The same architecture with every component named. Walk it by colour. Amber is what a person supplies: the specification, an optional design export and defect history. Green is the knowledge: the Neo4j graph and the vector index. Blue is the two services: the RAG API on port 9010, which owns the graph, and the agent gateway on 9100, which hosts the planner and the investigator. Purple is the three agents. Red is the model provider, which every agent calls. Grey is the device, reached over adb through the on-device portal.</a:t>
             </a:r>
-            <a:endParaRPr lang="en-US" dirty="0"/>
           </a:p>
         </p:txBody>
       </p:sp>
@@ -1129,7 +904,6 @@
               <a:rPr lang="en-US" dirty="0"/>
               <a:t>About 40 seconds. One test is one round of four steps. The planner takes about a minute to decide and write the test. The executor then drives the real app, and this is the long part: every step is a vision model call of about 20 seconds, with a budget of 50 steps. The investigator reads the result in about 20 seconds. Everything it learned is written to the graph, and the next round is planned from that larger graph. A campaign is simply this loop repeated. The timings are measured from our own campaigns.</a:t>
             </a:r>
-            <a:endParaRPr lang="en-US" dirty="0"/>
           </a:p>
         </p:txBody>
       </p:sp>
@@ -1217,7 +991,6 @@
               <a:rPr lang="en-US" dirty="0"/>
               <a:t>About 30 seconds; skip if short on time. The full sequence of one round, message by message. Steps 1 to 5 are the planner: it asks the graph what is known, proposes a test, and stores it before the executor sees it. Steps 6 to 9 are the executor looping on the device, and on every step it posts the screen back to the graph. Steps 10 to 14 are the investigator: note step 11, where it first fetches what is already known about those screens, which is what lets a repeat observation reinforce an existing finding instead of creating a duplicate.</a:t>
             </a:r>
-            <a:endParaRPr lang="en-US" dirty="0"/>
           </a:p>
         </p:txBody>
       </p:sp>
@@ -1305,7 +1078,6 @@
               <a:rPr lang="en-US" dirty="0"/>
               <a:t>About 40 seconds. This is how the shared memory is organised, taken from the live Neo4j database. Orange is the specification: the document is split into passages, each requirement is traced to the passage it came from, with its validation rules and the entities it involves. Purple is testing: a test case covers requirements and a feature area, and every execution leaves a log with its verdict, its error type and the ordered path of screens it went through. Blue is the app model the executor builds: one node per distinct screen, with the transitions between them and learned navigation routes. Red is findings, written by the investigator: each one points to the run that found it, the screen it is about and the requirement it concerns, and related findings are grouped under a more general one. The point to make: every agent reads and writes this one structure, and nothing else survives between calls. Every node is scoped to a project, so two apps never mix.</a:t>
             </a:r>
-            <a:endParaRPr lang="en-US" dirty="0"/>
           </a:p>
         </p:txBody>
       </p:sp>
@@ -1378,6 +1150,11 @@
 <file path=ppt/slideMasters/slideMaster1.xml><?xml version="1.0" encoding="utf-8"?>
 <p:sldMaster xmlns:a="http://schemas.openxmlformats.org/drawingml/2006/main" xmlns:r="http://schemas.openxmlformats.org/officeDocument/2006/relationships" xmlns:p="http://schemas.openxmlformats.org/presentationml/2006/main">
   <p:cSld>
+    <p:bg>
+      <p:bgRef idx="1001">
+        <a:schemeClr val="bg1"/>
+      </p:bgRef>
+    </p:bg>
     <p:spTree>
       <p:nvGrpSpPr>
         <p:cNvPr id="1" name=""/>
@@ -1660,6 +1437,7 @@
         <a:solidFill>
           <a:srgbClr val="14303D"/>
         </a:solidFill>
+        <a:effectLst/>
       </p:bgPr>
     </p:bg>
     <p:spTree>
@@ -1697,18 +1475,25 @@
           </a:solidFill>
           <a:ln/>
         </p:spPr>
+        <p:txBody>
+          <a:bodyPr/>
+          <a:lstStyle/>
+          <a:p>
+            <a:endParaRPr lang="en-US"/>
+          </a:p>
+        </p:txBody>
       </p:sp>
       <p:pic>
         <p:nvPicPr>
-          <p:cNvPr id="3" name="Image 0" descr="BUET logo">    </p:cNvPr>
+          <p:cNvPr id="3" name="Image 0" descr="BUET logo"/>
           <p:cNvPicPr>
             <a:picLocks noChangeAspect="1"/>
           </p:cNvPicPr>
           <p:nvPr/>
         </p:nvPicPr>
         <p:blipFill>
-          <a:blip r:embed="rId1"/>
-          <a:srcRect l="0" r="0" t="0" b="0"/>
+          <a:blip r:embed="rId3"/>
+          <a:srcRect/>
           <a:stretch/>
         </p:blipFill>
         <p:spPr>
@@ -1744,14 +1529,14 @@
           </a:bodyPr>
           <a:lstStyle/>
           <a:p>
-            <a:pPr algn="l" indent="0" marL="0">
+            <a:pPr marL="0" indent="0" algn="l">
               <a:lnSpc>
                 <a:spcPts val="1680"/>
               </a:lnSpc>
               <a:buNone/>
             </a:pPr>
             <a:r>
-              <a:rPr lang="en-US" sz="1200" b="1" spc="100" kern="0" dirty="0">
+              <a:rPr lang="en-US" sz="1200" b="1" kern="0" spc="100" dirty="0">
                 <a:solidFill>
                   <a:srgbClr val="6FC3E3"/>
                 </a:solidFill>
@@ -1788,7 +1573,7 @@
           </a:bodyPr>
           <a:lstStyle/>
           <a:p>
-            <a:pPr algn="l" indent="0" marL="0">
+            <a:pPr marL="0" indent="0" algn="l">
               <a:lnSpc>
                 <a:spcPts val="5880"/>
               </a:lnSpc>
@@ -1832,7 +1617,7 @@
           </a:bodyPr>
           <a:lstStyle/>
           <a:p>
-            <a:pPr algn="l" indent="0" marL="0">
+            <a:pPr marL="0" indent="0" algn="l">
               <a:lnSpc>
                 <a:spcPts val="2430"/>
               </a:lnSpc>
@@ -1876,14 +1661,14 @@
           </a:bodyPr>
           <a:lstStyle/>
           <a:p>
-            <a:pPr algn="l" indent="0" marL="0">
+            <a:pPr marL="0" indent="0" algn="l">
               <a:lnSpc>
                 <a:spcPts val="1680"/>
               </a:lnSpc>
               <a:buNone/>
             </a:pPr>
             <a:r>
-              <a:rPr lang="en-US" sz="1200" b="1" spc="100" kern="0" dirty="0">
+              <a:rPr lang="en-US" sz="1200" b="1" kern="0" spc="100" dirty="0">
                 <a:solidFill>
                   <a:srgbClr val="6FC3E3"/>
                 </a:solidFill>
@@ -1920,7 +1705,7 @@
           </a:bodyPr>
           <a:lstStyle/>
           <a:p>
-            <a:pPr algn="l" indent="0" marL="0">
+            <a:pPr marL="0" indent="0" algn="l">
               <a:lnSpc>
                 <a:spcPts val="1740"/>
               </a:lnSpc>
@@ -1940,7 +1725,7 @@
             <a:endParaRPr lang="en-US" sz="1200" dirty="0"/>
           </a:p>
           <a:p>
-            <a:pPr algn="l" indent="0" marL="0">
+            <a:pPr marL="0" indent="0" algn="l">
               <a:lnSpc>
                 <a:spcPts val="1740"/>
               </a:lnSpc>
@@ -1960,7 +1745,7 @@
             <a:endParaRPr lang="en-US" sz="1200" dirty="0"/>
           </a:p>
           <a:p>
-            <a:pPr algn="l" indent="0" marL="0">
+            <a:pPr marL="0" indent="0" algn="l">
               <a:lnSpc>
                 <a:spcPts val="1740"/>
               </a:lnSpc>
@@ -1980,7 +1765,7 @@
             <a:endParaRPr lang="en-US" sz="1200" dirty="0"/>
           </a:p>
           <a:p>
-            <a:pPr algn="l" indent="0" marL="0">
+            <a:pPr marL="0" indent="0" algn="l">
               <a:lnSpc>
                 <a:spcPts val="1740"/>
               </a:lnSpc>
@@ -2000,7 +1785,7 @@
             <a:endParaRPr lang="en-US" sz="1200" dirty="0"/>
           </a:p>
           <a:p>
-            <a:pPr algn="l" indent="0" marL="0">
+            <a:pPr marL="0" indent="0" algn="l">
               <a:lnSpc>
                 <a:spcPts val="1740"/>
               </a:lnSpc>
@@ -2044,14 +1829,14 @@
           </a:bodyPr>
           <a:lstStyle/>
           <a:p>
-            <a:pPr algn="l" indent="0" marL="0">
+            <a:pPr marL="0" indent="0" algn="l">
               <a:lnSpc>
                 <a:spcPts val="1680"/>
               </a:lnSpc>
               <a:buNone/>
             </a:pPr>
             <a:r>
-              <a:rPr lang="en-US" sz="1200" b="1" spc="100" kern="0" dirty="0">
+              <a:rPr lang="en-US" sz="1200" b="1" kern="0" spc="100" dirty="0">
                 <a:solidFill>
                   <a:srgbClr val="6FC3E3"/>
                 </a:solidFill>
@@ -2088,7 +1873,7 @@
           </a:bodyPr>
           <a:lstStyle/>
           <a:p>
-            <a:pPr algn="l" indent="0" marL="0">
+            <a:pPr marL="0" indent="0" algn="l">
               <a:lnSpc>
                 <a:spcPts val="1740"/>
               </a:lnSpc>
@@ -2108,7 +1893,7 @@
             <a:endParaRPr lang="en-US" sz="1200" dirty="0"/>
           </a:p>
           <a:p>
-            <a:pPr algn="l" indent="0" marL="0">
+            <a:pPr marL="0" indent="0" algn="l">
               <a:lnSpc>
                 <a:spcPts val="1740"/>
               </a:lnSpc>
@@ -2152,14 +1937,14 @@
           </a:bodyPr>
           <a:lstStyle/>
           <a:p>
-            <a:pPr algn="l" indent="0" marL="0">
+            <a:pPr marL="0" indent="0" algn="l">
               <a:lnSpc>
                 <a:spcPts val="1680"/>
               </a:lnSpc>
               <a:buNone/>
             </a:pPr>
             <a:r>
-              <a:rPr lang="en-US" sz="1200" b="1" spc="100" kern="0" dirty="0">
+              <a:rPr lang="en-US" sz="1200" b="1" kern="0" spc="100" dirty="0">
                 <a:solidFill>
                   <a:srgbClr val="6FC3E3"/>
                 </a:solidFill>
@@ -2196,7 +1981,7 @@
           </a:bodyPr>
           <a:lstStyle/>
           <a:p>
-            <a:pPr algn="l" indent="0" marL="0">
+            <a:pPr marL="0" indent="0" algn="l">
               <a:lnSpc>
                 <a:spcPts val="1740"/>
               </a:lnSpc>
@@ -2227,12 +2012,13 @@
 
 <file path=ppt/slides/slide10.xml><?xml version="1.0" encoding="utf-8"?>
 <p:sld xmlns:a="http://schemas.openxmlformats.org/drawingml/2006/main" xmlns:r="http://schemas.openxmlformats.org/officeDocument/2006/relationships" xmlns:p="http://schemas.openxmlformats.org/presentationml/2006/main">
-  <p:cSld name="Slide 10">
+  <p:cSld name="Slide 9">
     <p:bg>
       <p:bgPr>
         <a:solidFill>
-          <a:srgbClr val="F6F8F7"/>
+          <a:srgbClr val="EDF2F4"/>
         </a:solidFill>
+        <a:effectLst/>
       </p:bgPr>
     </p:bg>
     <p:spTree>
@@ -2257,8 +2043,8 @@
         </p:nvSpPr>
         <p:spPr>
           <a:xfrm>
-            <a:off x="812800" y="812800"/>
-            <a:ext cx="10883392" cy="238720"/>
+            <a:off x="812800" y="508000"/>
+            <a:ext cx="10883392" cy="231279"/>
           </a:xfrm>
           <a:prstGeom prst="rect">
             <a:avLst/>
@@ -2272,14 +2058,14 @@
           </a:bodyPr>
           <a:lstStyle/>
           <a:p>
-            <a:pPr algn="l" indent="0" marL="0">
-              <a:lnSpc>
-                <a:spcPts val="1680"/>
-              </a:lnSpc>
-              <a:buNone/>
-            </a:pPr>
-            <a:r>
-              <a:rPr lang="en-US" sz="1200" b="1" spc="100" kern="0" dirty="0">
+            <a:pPr marL="0" indent="0" algn="l">
+              <a:lnSpc>
+                <a:spcPts val="1622"/>
+              </a:lnSpc>
+              <a:buNone/>
+            </a:pPr>
+            <a:r>
+              <a:rPr lang="en-US" sz="1159" b="1" kern="0" spc="100" dirty="0">
                 <a:solidFill>
                   <a:srgbClr val="0B6A8F"/>
                 </a:solidFill>
@@ -2287,9 +2073,9 @@
                 <a:ea typeface="IBM Plex Sans" pitchFamily="34" charset="-122"/>
                 <a:cs typeface="IBM Plex Sans" pitchFamily="34" charset="-120"/>
               </a:rPr>
-              <a:t>MODELS</a:t>
-            </a:r>
-            <a:endParaRPr lang="en-US" sz="1200" dirty="0"/>
+              <a:t>ARCHITECTURE · THE SHARED MEMORY</a:t>
+            </a:r>
+            <a:endParaRPr lang="en-US" sz="1159" dirty="0"/>
           </a:p>
         </p:txBody>
       </p:sp>
@@ -2301,8 +2087,8 @@
         </p:nvSpPr>
         <p:spPr>
           <a:xfrm>
-            <a:off x="812800" y="1102320"/>
-            <a:ext cx="10883392" cy="444500"/>
+            <a:off x="812800" y="790079"/>
+            <a:ext cx="10883392" cy="429816"/>
           </a:xfrm>
           <a:prstGeom prst="rect">
             <a:avLst/>
@@ -2316,7 +2102,345 @@
           </a:bodyPr>
           <a:lstStyle/>
           <a:p>
-            <a:pPr algn="l" indent="0" marL="0">
+            <a:pPr marL="0" indent="0" algn="l">
+              <a:lnSpc>
+                <a:spcPts val="3218"/>
+              </a:lnSpc>
+              <a:buNone/>
+            </a:pPr>
+            <a:r>
+              <a:rPr lang="en-US" sz="2925" b="1" dirty="0">
+                <a:solidFill>
+                  <a:srgbClr val="14303D"/>
+                </a:solidFill>
+                <a:latin typeface="Source Serif 4" pitchFamily="34" charset="0"/>
+                <a:ea typeface="Source Serif 4" pitchFamily="34" charset="-122"/>
+                <a:cs typeface="Source Serif 4" pitchFamily="34" charset="-120"/>
+              </a:rPr>
+              <a:t>What the knowledge graph stores</a:t>
+            </a:r>
+            <a:endParaRPr lang="en-US" sz="2925" dirty="0"/>
+          </a:p>
+        </p:txBody>
+      </p:sp>
+      <p:sp>
+        <p:nvSpPr>
+          <p:cNvPr id="4" name="Shape 2"/>
+          <p:cNvSpPr/>
+          <p:nvPr/>
+        </p:nvSpPr>
+        <p:spPr>
+          <a:xfrm>
+            <a:off x="812800" y="1346895"/>
+            <a:ext cx="10566400" cy="4183410"/>
+          </a:xfrm>
+          <a:prstGeom prst="roundRect">
+            <a:avLst>
+              <a:gd name="adj" fmla="val 2429"/>
+            </a:avLst>
+          </a:prstGeom>
+          <a:solidFill>
+            <a:srgbClr val="FDFEFE"/>
+          </a:solidFill>
+          <a:ln/>
+        </p:spPr>
+        <p:txBody>
+          <a:bodyPr/>
+          <a:lstStyle/>
+          <a:p>
+            <a:endParaRPr lang="en-US"/>
+          </a:p>
+        </p:txBody>
+      </p:sp>
+      <p:pic>
+        <p:nvPicPr>
+          <p:cNvPr id="5" name="Image 0" descr="Neo4j schema. Specification side: SRS has chunks; each Requirement is derived from a chunk, has validation rules and involves entities. Tests: a TestCase covers requirements and a feature area and has runs; an ExecutionLog points to its test case and stores the ordered path of screens. App model: UIState transitions to UIState, and navigation-tree nodes lead to screens. A Finding is found by an execution log, is about a screen, concerns a requirement, and can be generalised by another finding."/>
+          <p:cNvPicPr>
+            <a:picLocks noChangeAspect="1"/>
+          </p:cNvPicPr>
+          <p:nvPr/>
+        </p:nvPicPr>
+        <p:blipFill>
+          <a:blip r:embed="rId3"/>
+          <a:stretch>
+            <a:fillRect/>
+          </a:stretch>
+        </p:blipFill>
+        <p:spPr>
+          <a:xfrm>
+            <a:off x="1330082" y="1353245"/>
+            <a:ext cx="9531836" cy="4170710"/>
+          </a:xfrm>
+          <a:prstGeom prst="rect">
+            <a:avLst/>
+          </a:prstGeom>
+        </p:spPr>
+      </p:pic>
+      <p:sp>
+        <p:nvSpPr>
+          <p:cNvPr id="6" name="Shape 3"/>
+          <p:cNvSpPr/>
+          <p:nvPr/>
+        </p:nvSpPr>
+        <p:spPr>
+          <a:xfrm>
+            <a:off x="815975" y="1350070"/>
+            <a:ext cx="10560050" cy="4177060"/>
+          </a:xfrm>
+          <a:prstGeom prst="roundRect">
+            <a:avLst>
+              <a:gd name="adj" fmla="val 2356"/>
+            </a:avLst>
+          </a:prstGeom>
+          <a:noFill/>
+          <a:ln w="6350">
+            <a:solidFill>
+              <a:srgbClr val="D6E1E6"/>
+            </a:solidFill>
+            <a:prstDash val="solid"/>
+          </a:ln>
+        </p:spPr>
+        <p:txBody>
+          <a:bodyPr/>
+          <a:lstStyle/>
+          <a:p>
+            <a:endParaRPr lang="en-US"/>
+          </a:p>
+        </p:txBody>
+      </p:sp>
+      <p:sp>
+        <p:nvSpPr>
+          <p:cNvPr id="7" name="Text 4"/>
+          <p:cNvSpPr/>
+          <p:nvPr/>
+        </p:nvSpPr>
+        <p:spPr>
+          <a:xfrm>
+            <a:off x="812800" y="5682704"/>
+            <a:ext cx="10883392" cy="438696"/>
+          </a:xfrm>
+          <a:prstGeom prst="rect">
+            <a:avLst/>
+          </a:prstGeom>
+          <a:noFill/>
+          <a:ln/>
+        </p:spPr>
+        <p:txBody>
+          <a:bodyPr wrap="square" lIns="0" tIns="0" rIns="0" bIns="0" rtlCol="0" anchor="t">
+            <a:normAutofit/>
+          </a:bodyPr>
+          <a:lstStyle/>
+          <a:p>
+            <a:pPr marL="0" indent="0" algn="l">
+              <a:lnSpc>
+                <a:spcPts val="1633"/>
+              </a:lnSpc>
+              <a:buNone/>
+            </a:pPr>
+            <a:r>
+              <a:rPr lang="en-US" sz="1166" dirty="0">
+                <a:solidFill>
+                  <a:srgbClr val="46596A"/>
+                </a:solidFill>
+                <a:latin typeface="IBM Plex Sans" pitchFamily="34" charset="0"/>
+                <a:ea typeface="IBM Plex Sans" pitchFamily="34" charset="-122"/>
+                <a:cs typeface="IBM Plex Sans" pitchFamily="34" charset="-120"/>
+              </a:rPr>
+              <a:t>Orange: from the specification · Purple: tests and runs · Blue: the app model · Red: findings · Dashed: stored as a property, not a relationship. Every node belongs to one project.</a:t>
+            </a:r>
+            <a:endParaRPr lang="en-US" sz="1166" dirty="0"/>
+          </a:p>
+        </p:txBody>
+      </p:sp>
+      <p:sp>
+        <p:nvSpPr>
+          <p:cNvPr id="8" name="Text 5"/>
+          <p:cNvSpPr/>
+          <p:nvPr/>
+        </p:nvSpPr>
+        <p:spPr>
+          <a:xfrm>
+            <a:off x="812800" y="6238280"/>
+            <a:ext cx="3459976" cy="238720"/>
+          </a:xfrm>
+          <a:prstGeom prst="rect">
+            <a:avLst/>
+          </a:prstGeom>
+          <a:noFill/>
+          <a:ln/>
+        </p:spPr>
+        <p:txBody>
+          <a:bodyPr wrap="square" lIns="0" tIns="0" rIns="0" bIns="0" rtlCol="0" anchor="t">
+            <a:normAutofit/>
+          </a:bodyPr>
+          <a:lstStyle/>
+          <a:p>
+            <a:pPr marL="0" indent="0" algn="l">
+              <a:lnSpc>
+                <a:spcPts val="1680"/>
+              </a:lnSpc>
+              <a:buNone/>
+            </a:pPr>
+            <a:r>
+              <a:rPr lang="en-US" sz="1200" dirty="0">
+                <a:solidFill>
+                  <a:srgbClr val="55697A"/>
+                </a:solidFill>
+                <a:latin typeface="IBM Plex Sans" pitchFamily="34" charset="0"/>
+                <a:ea typeface="IBM Plex Sans" pitchFamily="34" charset="-122"/>
+                <a:cs typeface="IBM Plex Sans" pitchFamily="34" charset="-120"/>
+              </a:rPr>
+              <a:t>Exploratory Testing Automation · CSE 450 · BUET</a:t>
+            </a:r>
+            <a:endParaRPr lang="en-US" sz="1200" dirty="0"/>
+          </a:p>
+        </p:txBody>
+      </p:sp>
+      <p:sp>
+        <p:nvSpPr>
+          <p:cNvPr id="9" name="Text 6"/>
+          <p:cNvSpPr/>
+          <p:nvPr/>
+        </p:nvSpPr>
+        <p:spPr>
+          <a:xfrm>
+            <a:off x="11287720" y="6238280"/>
+            <a:ext cx="142280" cy="238720"/>
+          </a:xfrm>
+          <a:prstGeom prst="rect">
+            <a:avLst/>
+          </a:prstGeom>
+          <a:noFill/>
+          <a:ln/>
+        </p:spPr>
+        <p:txBody>
+          <a:bodyPr wrap="square" lIns="0" tIns="0" rIns="0" bIns="0" rtlCol="0" anchor="t">
+            <a:normAutofit/>
+          </a:bodyPr>
+          <a:lstStyle/>
+          <a:p>
+            <a:pPr marL="0" indent="0" algn="l">
+              <a:lnSpc>
+                <a:spcPts val="1680"/>
+              </a:lnSpc>
+              <a:buNone/>
+            </a:pPr>
+            <a:r>
+              <a:rPr lang="en-US" sz="1200" dirty="0">
+                <a:solidFill>
+                  <a:srgbClr val="55697A"/>
+                </a:solidFill>
+                <a:latin typeface="IBM Plex Sans" pitchFamily="34" charset="0"/>
+                <a:ea typeface="IBM Plex Sans" pitchFamily="34" charset="-122"/>
+                <a:cs typeface="IBM Plex Sans" pitchFamily="34" charset="-120"/>
+              </a:rPr>
+              <a:t>10</a:t>
+            </a:r>
+            <a:endParaRPr lang="en-US" sz="1200" dirty="0"/>
+          </a:p>
+        </p:txBody>
+      </p:sp>
+    </p:spTree>
+  </p:cSld>
+  <p:clrMapOvr>
+    <a:masterClrMapping/>
+  </p:clrMapOvr>
+</p:sld>
+</file>
+
+<file path=ppt/slides/slide11.xml><?xml version="1.0" encoding="utf-8"?>
+<p:sld xmlns:a="http://schemas.openxmlformats.org/drawingml/2006/main" xmlns:r="http://schemas.openxmlformats.org/officeDocument/2006/relationships" xmlns:p="http://schemas.openxmlformats.org/presentationml/2006/main">
+  <p:cSld name="Slide 10">
+    <p:bg>
+      <p:bgPr>
+        <a:solidFill>
+          <a:srgbClr val="F6F8F7"/>
+        </a:solidFill>
+        <a:effectLst/>
+      </p:bgPr>
+    </p:bg>
+    <p:spTree>
+      <p:nvGrpSpPr>
+        <p:cNvPr id="1" name=""/>
+        <p:cNvGrpSpPr/>
+        <p:nvPr/>
+      </p:nvGrpSpPr>
+      <p:grpSpPr>
+        <a:xfrm>
+          <a:off x="0" y="0"/>
+          <a:ext cx="0" cy="0"/>
+          <a:chOff x="0" y="0"/>
+          <a:chExt cx="0" cy="0"/>
+        </a:xfrm>
+      </p:grpSpPr>
+      <p:sp>
+        <p:nvSpPr>
+          <p:cNvPr id="2" name="Text 0"/>
+          <p:cNvSpPr/>
+          <p:nvPr/>
+        </p:nvSpPr>
+        <p:spPr>
+          <a:xfrm>
+            <a:off x="812800" y="812800"/>
+            <a:ext cx="10883392" cy="238720"/>
+          </a:xfrm>
+          <a:prstGeom prst="rect">
+            <a:avLst/>
+          </a:prstGeom>
+          <a:noFill/>
+          <a:ln/>
+        </p:spPr>
+        <p:txBody>
+          <a:bodyPr wrap="square" lIns="0" tIns="0" rIns="0" bIns="0" rtlCol="0" anchor="t">
+            <a:normAutofit/>
+          </a:bodyPr>
+          <a:lstStyle/>
+          <a:p>
+            <a:pPr marL="0" indent="0" algn="l">
+              <a:lnSpc>
+                <a:spcPts val="1680"/>
+              </a:lnSpc>
+              <a:buNone/>
+            </a:pPr>
+            <a:r>
+              <a:rPr lang="en-US" sz="1200" b="1" kern="0" spc="100" dirty="0">
+                <a:solidFill>
+                  <a:srgbClr val="0B6A8F"/>
+                </a:solidFill>
+                <a:latin typeface="IBM Plex Sans" pitchFamily="34" charset="0"/>
+                <a:ea typeface="IBM Plex Sans" pitchFamily="34" charset="-122"/>
+                <a:cs typeface="IBM Plex Sans" pitchFamily="34" charset="-120"/>
+              </a:rPr>
+              <a:t>MODELS</a:t>
+            </a:r>
+            <a:endParaRPr lang="en-US" sz="1200" dirty="0"/>
+          </a:p>
+        </p:txBody>
+      </p:sp>
+      <p:sp>
+        <p:nvSpPr>
+          <p:cNvPr id="3" name="Text 1"/>
+          <p:cNvSpPr/>
+          <p:nvPr/>
+        </p:nvSpPr>
+        <p:spPr>
+          <a:xfrm>
+            <a:off x="812800" y="1102320"/>
+            <a:ext cx="10883392" cy="444500"/>
+          </a:xfrm>
+          <a:prstGeom prst="rect">
+            <a:avLst/>
+          </a:prstGeom>
+          <a:noFill/>
+          <a:ln/>
+        </p:spPr>
+        <p:txBody>
+          <a:bodyPr wrap="square" lIns="0" tIns="0" rIns="0" bIns="0" rtlCol="0" anchor="t">
+            <a:normAutofit/>
+          </a:bodyPr>
+          <a:lstStyle/>
+          <a:p>
+            <a:pPr marL="0" indent="0" algn="l">
               <a:lnSpc>
                 <a:spcPts val="3300"/>
               </a:lnSpc>
@@ -2360,9 +2484,27 @@
             <a:tbl>
               <a:tblPr/>
               <a:tblGrid>
-                <a:gridCol w="2321814"/>
-                <a:gridCol w="2955036"/>
-                <a:gridCol w="5276850"/>
+                <a:gridCol w="2321814">
+                  <a:extLst>
+                    <a:ext uri="{9D8B030D-6E8A-4147-A177-3AD203B41FA5}">
+                      <a16:colId xmlns:a16="http://schemas.microsoft.com/office/drawing/2014/main" val="20000"/>
+                    </a:ext>
+                  </a:extLst>
+                </a:gridCol>
+                <a:gridCol w="2955036">
+                  <a:extLst>
+                    <a:ext uri="{9D8B030D-6E8A-4147-A177-3AD203B41FA5}">
+                      <a16:colId xmlns:a16="http://schemas.microsoft.com/office/drawing/2014/main" val="20001"/>
+                    </a:ext>
+                  </a:extLst>
+                </a:gridCol>
+                <a:gridCol w="5276850">
+                  <a:extLst>
+                    <a:ext uri="{9D8B030D-6E8A-4147-A177-3AD203B41FA5}">
+                      <a16:colId xmlns:a16="http://schemas.microsoft.com/office/drawing/2014/main" val="20002"/>
+                    </a:ext>
+                  </a:extLst>
+                </a:gridCol>
               </a:tblGrid>
               <a:tr h="332680">
                 <a:tc>
@@ -2370,7 +2512,7 @@
                     <a:bodyPr/>
                     <a:lstStyle/>
                     <a:p>
-                      <a:pPr indent="0" marL="0">
+                      <a:pPr marL="0" indent="0">
                         <a:lnSpc>
                           <a:spcPts val="1680"/>
                         </a:lnSpc>
@@ -2394,7 +2536,7 @@
                       </a:endParaRPr>
                     </a:p>
                   </a:txBody>
-                  <a:tcPr marL="53340" marR="53340" marT="53340" marB="53340" anchor="t">
+                  <a:tcPr marL="53340" marR="53340" marT="53340" marB="53340">
                     <a:lnL w="12700" cap="flat" cmpd="sng" algn="ctr">
                       <a:solidFill>
                         <a:srgbClr val="C4C6C5"/>
@@ -2441,7 +2583,7 @@
                     <a:bodyPr/>
                     <a:lstStyle/>
                     <a:p>
-                      <a:pPr indent="0" marL="0">
+                      <a:pPr marL="0" indent="0">
                         <a:lnSpc>
                           <a:spcPts val="1680"/>
                         </a:lnSpc>
@@ -2465,7 +2607,7 @@
                       </a:endParaRPr>
                     </a:p>
                   </a:txBody>
-                  <a:tcPr marL="53340" marR="53340" marT="53340" marB="53340" anchor="t">
+                  <a:tcPr marL="53340" marR="53340" marT="53340" marB="53340">
                     <a:lnL w="12700" cap="flat" cmpd="sng" algn="ctr">
                       <a:solidFill>
                         <a:srgbClr val="BDC1C3"/>
@@ -2512,7 +2654,7 @@
                     <a:bodyPr/>
                     <a:lstStyle/>
                     <a:p>
-                      <a:pPr indent="0" marL="0">
+                      <a:pPr marL="0" indent="0">
                         <a:lnSpc>
                           <a:spcPts val="1680"/>
                         </a:lnSpc>
@@ -2536,7 +2678,7 @@
                       </a:endParaRPr>
                     </a:p>
                   </a:txBody>
-                  <a:tcPr marL="53340" marR="53340" marT="53340" marB="53340" anchor="t">
+                  <a:tcPr marL="53340" marR="53340" marT="53340" marB="53340">
                     <a:lnL w="12700" cap="flat" cmpd="sng" algn="ctr">
                       <a:solidFill>
                         <a:srgbClr val="BDC1C3"/>
@@ -2578,6 +2720,11 @@
                     </a:solidFill>
                   </a:tcPr>
                 </a:tc>
+                <a:extLst>
+                  <a:ext uri="{0D108BD9-81ED-4DB2-BD59-A6C34878D82A}">
+                    <a16:rowId xmlns:a16="http://schemas.microsoft.com/office/drawing/2014/main" val="10000"/>
+                  </a:ext>
+                </a:extLst>
               </a:tr>
               <a:tr h="546001">
                 <a:tc>
@@ -2585,7 +2732,7 @@
                     <a:bodyPr/>
                     <a:lstStyle/>
                     <a:p>
-                      <a:pPr indent="0" marL="0">
+                      <a:pPr marL="0" indent="0">
                         <a:lnSpc>
                           <a:spcPts val="1680"/>
                         </a:lnSpc>
@@ -2609,7 +2756,7 @@
                       </a:endParaRPr>
                     </a:p>
                   </a:txBody>
-                  <a:tcPr marL="53340" marR="53340" marT="53340" marB="53340" anchor="t">
+                  <a:tcPr marL="53340" marR="53340" marT="53340" marB="53340">
                     <a:lnL w="12700" cap="flat" cmpd="sng" algn="ctr">
                       <a:solidFill>
                         <a:srgbClr val="C4C6C5"/>
@@ -2653,7 +2800,7 @@
                     <a:bodyPr/>
                     <a:lstStyle/>
                     <a:p>
-                      <a:pPr indent="0" marL="0">
+                      <a:pPr marL="0" indent="0">
                         <a:lnSpc>
                           <a:spcPts val="1680"/>
                         </a:lnSpc>
@@ -2677,7 +2824,7 @@
                       </a:endParaRPr>
                     </a:p>
                   </a:txBody>
-                  <a:tcPr marL="53340" marR="53340" marT="53340" marB="53340" anchor="t">
+                  <a:tcPr marL="53340" marR="53340" marT="53340" marB="53340">
                     <a:lnL w="12700" cap="flat" cmpd="sng" algn="ctr">
                       <a:solidFill>
                         <a:srgbClr val="C4C6C5"/>
@@ -2721,7 +2868,7 @@
                     <a:bodyPr/>
                     <a:lstStyle/>
                     <a:p>
-                      <a:pPr indent="0" marL="0">
+                      <a:pPr marL="0" indent="0">
                         <a:lnSpc>
                           <a:spcPts val="1680"/>
                         </a:lnSpc>
@@ -2745,7 +2892,7 @@
                       </a:endParaRPr>
                     </a:p>
                   </a:txBody>
-                  <a:tcPr marL="53340" marR="53340" marT="53340" marB="53340" anchor="t">
+                  <a:tcPr marL="53340" marR="53340" marT="53340" marB="53340">
                     <a:lnL w="12700" cap="flat" cmpd="sng" algn="ctr">
                       <a:solidFill>
                         <a:srgbClr val="C4C6C5"/>
@@ -2784,6 +2931,11 @@
                     </a:lnB>
                   </a:tcPr>
                 </a:tc>
+                <a:extLst>
+                  <a:ext uri="{0D108BD9-81ED-4DB2-BD59-A6C34878D82A}">
+                    <a16:rowId xmlns:a16="http://schemas.microsoft.com/office/drawing/2014/main" val="10001"/>
+                  </a:ext>
+                </a:extLst>
               </a:tr>
               <a:tr h="546001">
                 <a:tc>
@@ -2791,7 +2943,7 @@
                     <a:bodyPr/>
                     <a:lstStyle/>
                     <a:p>
-                      <a:pPr indent="0" marL="0">
+                      <a:pPr marL="0" indent="0">
                         <a:lnSpc>
                           <a:spcPts val="1680"/>
                         </a:lnSpc>
@@ -2815,7 +2967,7 @@
                       </a:endParaRPr>
                     </a:p>
                   </a:txBody>
-                  <a:tcPr marL="53340" marR="53340" marT="53340" marB="53340" anchor="t">
+                  <a:tcPr marL="53340" marR="53340" marT="53340" marB="53340">
                     <a:lnL w="12700" cap="flat" cmpd="sng" algn="ctr">
                       <a:solidFill>
                         <a:srgbClr val="C4C6C5"/>
@@ -2859,7 +3011,7 @@
                     <a:bodyPr/>
                     <a:lstStyle/>
                     <a:p>
-                      <a:pPr indent="0" marL="0">
+                      <a:pPr marL="0" indent="0">
                         <a:lnSpc>
                           <a:spcPts val="1680"/>
                         </a:lnSpc>
@@ -2883,7 +3035,7 @@
                       </a:endParaRPr>
                     </a:p>
                   </a:txBody>
-                  <a:tcPr marL="53340" marR="53340" marT="53340" marB="53340" anchor="t">
+                  <a:tcPr marL="53340" marR="53340" marT="53340" marB="53340">
                     <a:lnL w="12700" cap="flat" cmpd="sng" algn="ctr">
                       <a:solidFill>
                         <a:srgbClr val="C4C6C5"/>
@@ -2927,7 +3079,7 @@
                     <a:bodyPr/>
                     <a:lstStyle/>
                     <a:p>
-                      <a:pPr indent="0" marL="0">
+                      <a:pPr marL="0" indent="0">
                         <a:lnSpc>
                           <a:spcPts val="1680"/>
                         </a:lnSpc>
@@ -2951,7 +3103,7 @@
                       </a:endParaRPr>
                     </a:p>
                   </a:txBody>
-                  <a:tcPr marL="53340" marR="53340" marT="53340" marB="53340" anchor="t">
+                  <a:tcPr marL="53340" marR="53340" marT="53340" marB="53340">
                     <a:lnL w="12700" cap="flat" cmpd="sng" algn="ctr">
                       <a:solidFill>
                         <a:srgbClr val="C4C6C5"/>
@@ -2990,6 +3142,11 @@
                     </a:lnB>
                   </a:tcPr>
                 </a:tc>
+                <a:extLst>
+                  <a:ext uri="{0D108BD9-81ED-4DB2-BD59-A6C34878D82A}">
+                    <a16:rowId xmlns:a16="http://schemas.microsoft.com/office/drawing/2014/main" val="10002"/>
+                  </a:ext>
+                </a:extLst>
               </a:tr>
               <a:tr h="546001">
                 <a:tc>
@@ -2997,7 +3154,7 @@
                     <a:bodyPr/>
                     <a:lstStyle/>
                     <a:p>
-                      <a:pPr indent="0" marL="0">
+                      <a:pPr marL="0" indent="0">
                         <a:lnSpc>
                           <a:spcPts val="1680"/>
                         </a:lnSpc>
@@ -3021,7 +3178,7 @@
                       </a:endParaRPr>
                     </a:p>
                   </a:txBody>
-                  <a:tcPr marL="53340" marR="53340" marT="53340" marB="53340" anchor="t">
+                  <a:tcPr marL="53340" marR="53340" marT="53340" marB="53340">
                     <a:lnL w="12700" cap="flat" cmpd="sng" algn="ctr">
                       <a:solidFill>
                         <a:srgbClr val="C4C6C5"/>
@@ -3065,7 +3222,7 @@
                     <a:bodyPr/>
                     <a:lstStyle/>
                     <a:p>
-                      <a:pPr indent="0" marL="0">
+                      <a:pPr marL="0" indent="0">
                         <a:lnSpc>
                           <a:spcPts val="1680"/>
                         </a:lnSpc>
@@ -3089,7 +3246,7 @@
                       </a:endParaRPr>
                     </a:p>
                   </a:txBody>
-                  <a:tcPr marL="53340" marR="53340" marT="53340" marB="53340" anchor="t">
+                  <a:tcPr marL="53340" marR="53340" marT="53340" marB="53340">
                     <a:lnL w="12700" cap="flat" cmpd="sng" algn="ctr">
                       <a:solidFill>
                         <a:srgbClr val="C4C6C5"/>
@@ -3133,7 +3290,7 @@
                     <a:bodyPr/>
                     <a:lstStyle/>
                     <a:p>
-                      <a:pPr indent="0" marL="0">
+                      <a:pPr marL="0" indent="0">
                         <a:lnSpc>
                           <a:spcPts val="1680"/>
                         </a:lnSpc>
@@ -3157,7 +3314,7 @@
                       </a:endParaRPr>
                     </a:p>
                   </a:txBody>
-                  <a:tcPr marL="53340" marR="53340" marT="53340" marB="53340" anchor="t">
+                  <a:tcPr marL="53340" marR="53340" marT="53340" marB="53340">
                     <a:lnL w="12700" cap="flat" cmpd="sng" algn="ctr">
                       <a:solidFill>
                         <a:srgbClr val="C4C6C5"/>
@@ -3196,6 +3353,11 @@
                     </a:lnB>
                   </a:tcPr>
                 </a:tc>
+                <a:extLst>
+                  <a:ext uri="{0D108BD9-81ED-4DB2-BD59-A6C34878D82A}">
+                    <a16:rowId xmlns:a16="http://schemas.microsoft.com/office/drawing/2014/main" val="10003"/>
+                  </a:ext>
+                </a:extLst>
               </a:tr>
               <a:tr h="546001">
                 <a:tc>
@@ -3203,7 +3365,7 @@
                     <a:bodyPr/>
                     <a:lstStyle/>
                     <a:p>
-                      <a:pPr indent="0" marL="0">
+                      <a:pPr marL="0" indent="0">
                         <a:lnSpc>
                           <a:spcPts val="1680"/>
                         </a:lnSpc>
@@ -3227,7 +3389,7 @@
                       </a:endParaRPr>
                     </a:p>
                   </a:txBody>
-                  <a:tcPr marL="53340" marR="53340" marT="53340" marB="53340" anchor="t">
+                  <a:tcPr marL="53340" marR="53340" marT="53340" marB="53340">
                     <a:lnL w="12700" cap="flat" cmpd="sng" algn="ctr">
                       <a:solidFill>
                         <a:srgbClr val="C4C6C5"/>
@@ -3271,7 +3433,7 @@
                     <a:bodyPr/>
                     <a:lstStyle/>
                     <a:p>
-                      <a:pPr indent="0" marL="0">
+                      <a:pPr marL="0" indent="0">
                         <a:lnSpc>
                           <a:spcPts val="1680"/>
                         </a:lnSpc>
@@ -3295,7 +3457,7 @@
                       </a:endParaRPr>
                     </a:p>
                   </a:txBody>
-                  <a:tcPr marL="53340" marR="53340" marT="53340" marB="53340" anchor="t">
+                  <a:tcPr marL="53340" marR="53340" marT="53340" marB="53340">
                     <a:lnL w="12700" cap="flat" cmpd="sng" algn="ctr">
                       <a:solidFill>
                         <a:srgbClr val="C4C6C5"/>
@@ -3339,7 +3501,7 @@
                     <a:bodyPr/>
                     <a:lstStyle/>
                     <a:p>
-                      <a:pPr indent="0" marL="0">
+                      <a:pPr marL="0" indent="0">
                         <a:lnSpc>
                           <a:spcPts val="1680"/>
                         </a:lnSpc>
@@ -3363,7 +3525,7 @@
                       </a:endParaRPr>
                     </a:p>
                   </a:txBody>
-                  <a:tcPr marL="53340" marR="53340" marT="53340" marB="53340" anchor="t">
+                  <a:tcPr marL="53340" marR="53340" marT="53340" marB="53340">
                     <a:lnL w="12700" cap="flat" cmpd="sng" algn="ctr">
                       <a:solidFill>
                         <a:srgbClr val="C4C6C5"/>
@@ -3402,6 +3564,11 @@
                     </a:lnB>
                   </a:tcPr>
                 </a:tc>
+                <a:extLst>
+                  <a:ext uri="{0D108BD9-81ED-4DB2-BD59-A6C34878D82A}">
+                    <a16:rowId xmlns:a16="http://schemas.microsoft.com/office/drawing/2014/main" val="10004"/>
+                  </a:ext>
+                </a:extLst>
               </a:tr>
               <a:tr h="332680">
                 <a:tc>
@@ -3409,7 +3576,7 @@
                     <a:bodyPr/>
                     <a:lstStyle/>
                     <a:p>
-                      <a:pPr indent="0" marL="0">
+                      <a:pPr marL="0" indent="0">
                         <a:lnSpc>
                           <a:spcPts val="1680"/>
                         </a:lnSpc>
@@ -3433,7 +3600,7 @@
                       </a:endParaRPr>
                     </a:p>
                   </a:txBody>
-                  <a:tcPr marL="53340" marR="53340" marT="53340" marB="53340" anchor="t">
+                  <a:tcPr marL="53340" marR="53340" marT="53340" marB="53340">
                     <a:lnL w="12700" cap="flat" cmpd="sng" algn="ctr">
                       <a:solidFill>
                         <a:srgbClr val="C4C6C5"/>
@@ -3477,7 +3644,7 @@
                     <a:bodyPr/>
                     <a:lstStyle/>
                     <a:p>
-                      <a:pPr indent="0" marL="0">
+                      <a:pPr marL="0" indent="0">
                         <a:lnSpc>
                           <a:spcPts val="1680"/>
                         </a:lnSpc>
@@ -3501,7 +3668,7 @@
                       </a:endParaRPr>
                     </a:p>
                   </a:txBody>
-                  <a:tcPr marL="53340" marR="53340" marT="53340" marB="53340" anchor="t">
+                  <a:tcPr marL="53340" marR="53340" marT="53340" marB="53340">
                     <a:lnL w="12700" cap="flat" cmpd="sng" algn="ctr">
                       <a:solidFill>
                         <a:srgbClr val="C4C6C5"/>
@@ -3545,7 +3712,7 @@
                     <a:bodyPr/>
                     <a:lstStyle/>
                     <a:p>
-                      <a:pPr indent="0" marL="0">
+                      <a:pPr marL="0" indent="0">
                         <a:lnSpc>
                           <a:spcPts val="1680"/>
                         </a:lnSpc>
@@ -3569,7 +3736,7 @@
                       </a:endParaRPr>
                     </a:p>
                   </a:txBody>
-                  <a:tcPr marL="53340" marR="53340" marT="53340" marB="53340" anchor="t">
+                  <a:tcPr marL="53340" marR="53340" marT="53340" marB="53340">
                     <a:lnL w="12700" cap="flat" cmpd="sng" algn="ctr">
                       <a:solidFill>
                         <a:srgbClr val="C4C6C5"/>
@@ -3608,6 +3775,11 @@
                     </a:lnB>
                   </a:tcPr>
                 </a:tc>
+                <a:extLst>
+                  <a:ext uri="{0D108BD9-81ED-4DB2-BD59-A6C34878D82A}">
+                    <a16:rowId xmlns:a16="http://schemas.microsoft.com/office/drawing/2014/main" val="10005"/>
+                  </a:ext>
+                </a:extLst>
               </a:tr>
             </a:tbl>
           </a:graphicData>
@@ -3636,7 +3808,7 @@
           </a:bodyPr>
           <a:lstStyle/>
           <a:p>
-            <a:pPr algn="l" indent="0" marL="0">
+            <a:pPr marL="0" indent="0" algn="l">
               <a:lnSpc>
                 <a:spcPts val="1680"/>
               </a:lnSpc>
@@ -3680,7 +3852,7 @@
           </a:bodyPr>
           <a:lstStyle/>
           <a:p>
-            <a:pPr algn="l" indent="0" marL="0">
+            <a:pPr marL="0" indent="0" algn="l">
               <a:lnSpc>
                 <a:spcPts val="1680"/>
               </a:lnSpc>
@@ -3724,7 +3896,7 @@
           </a:bodyPr>
           <a:lstStyle/>
           <a:p>
-            <a:pPr algn="l" indent="0" marL="0">
+            <a:pPr marL="0" indent="0" algn="l">
               <a:lnSpc>
                 <a:spcPts val="1680"/>
               </a:lnSpc>
@@ -3739,7 +3911,7 @@
                 <a:ea typeface="IBM Plex Sans" pitchFamily="34" charset="-122"/>
                 <a:cs typeface="IBM Plex Sans" pitchFamily="34" charset="-120"/>
               </a:rPr>
-              <a:t>10</a:t>
+              <a:t>11</a:t>
             </a:r>
             <a:endParaRPr lang="en-US" sz="1200" dirty="0"/>
           </a:p>
@@ -3761,6 +3933,7 @@
         <a:solidFill>
           <a:srgbClr val="F6F8F7"/>
         </a:solidFill>
+        <a:effectLst/>
       </p:bgPr>
     </p:bg>
     <p:spTree>
@@ -3800,14 +3973,14 @@
           </a:bodyPr>
           <a:lstStyle/>
           <a:p>
-            <a:pPr algn="l" indent="0" marL="0">
+            <a:pPr marL="0" indent="0" algn="l">
               <a:lnSpc>
                 <a:spcPts val="1680"/>
               </a:lnSpc>
               <a:buNone/>
             </a:pPr>
             <a:r>
-              <a:rPr lang="en-US" sz="1200" b="1" spc="100" kern="0" dirty="0">
+              <a:rPr lang="en-US" sz="1200" b="1" kern="0" spc="100" dirty="0">
                 <a:solidFill>
                   <a:srgbClr val="0B6A8F"/>
                 </a:solidFill>
@@ -3844,7 +4017,7 @@
           </a:bodyPr>
           <a:lstStyle/>
           <a:p>
-            <a:pPr algn="l" indent="0" marL="0">
+            <a:pPr marL="0" indent="0" algn="l">
               <a:lnSpc>
                 <a:spcPts val="3300"/>
               </a:lnSpc>
@@ -3891,6 +4064,13 @@
             <a:prstDash val="solid"/>
           </a:ln>
         </p:spPr>
+        <p:txBody>
+          <a:bodyPr/>
+          <a:lstStyle/>
+          <a:p>
+            <a:endParaRPr lang="en-US"/>
+          </a:p>
+        </p:txBody>
       </p:sp>
       <p:sp>
         <p:nvSpPr>
@@ -3915,7 +4095,7 @@
           </a:bodyPr>
           <a:lstStyle/>
           <a:p>
-            <a:pPr algn="l" indent="0" marL="0">
+            <a:pPr marL="0" indent="0" algn="l">
               <a:lnSpc>
                 <a:spcPts val="2160"/>
               </a:lnSpc>
@@ -3959,7 +4139,7 @@
           </a:bodyPr>
           <a:lstStyle/>
           <a:p>
-            <a:pPr algn="l" indent="0" marL="0">
+            <a:pPr marL="0" indent="0" algn="l">
               <a:lnSpc>
                 <a:spcPts val="1960"/>
               </a:lnSpc>
@@ -4003,7 +4183,7 @@
           </a:bodyPr>
           <a:lstStyle/>
           <a:p>
-            <a:pPr algn="l" indent="0" marL="0">
+            <a:pPr marL="0" indent="0" algn="l">
               <a:lnSpc>
                 <a:spcPts val="1960"/>
               </a:lnSpc>
@@ -4061,6 +4241,13 @@
             <a:prstDash val="solid"/>
           </a:ln>
         </p:spPr>
+        <p:txBody>
+          <a:bodyPr/>
+          <a:lstStyle/>
+          <a:p>
+            <a:endParaRPr lang="en-US"/>
+          </a:p>
+        </p:txBody>
       </p:sp>
       <p:sp>
         <p:nvSpPr>
@@ -4085,7 +4272,7 @@
           </a:bodyPr>
           <a:lstStyle/>
           <a:p>
-            <a:pPr algn="l" indent="0" marL="0">
+            <a:pPr marL="0" indent="0" algn="l">
               <a:lnSpc>
                 <a:spcPts val="2160"/>
               </a:lnSpc>
@@ -4129,7 +4316,7 @@
           </a:bodyPr>
           <a:lstStyle/>
           <a:p>
-            <a:pPr algn="l" indent="0" marL="0">
+            <a:pPr marL="0" indent="0" algn="l">
               <a:lnSpc>
                 <a:spcPts val="1960"/>
               </a:lnSpc>
@@ -4173,7 +4360,7 @@
           </a:bodyPr>
           <a:lstStyle/>
           <a:p>
-            <a:pPr algn="l" indent="0" marL="0">
+            <a:pPr marL="0" indent="0" algn="l">
               <a:lnSpc>
                 <a:spcPts val="1960"/>
               </a:lnSpc>
@@ -4231,6 +4418,13 @@
             <a:prstDash val="solid"/>
           </a:ln>
         </p:spPr>
+        <p:txBody>
+          <a:bodyPr/>
+          <a:lstStyle/>
+          <a:p>
+            <a:endParaRPr lang="en-US"/>
+          </a:p>
+        </p:txBody>
       </p:sp>
       <p:sp>
         <p:nvSpPr>
@@ -4255,7 +4449,7 @@
           </a:bodyPr>
           <a:lstStyle/>
           <a:p>
-            <a:pPr algn="l" indent="0" marL="0">
+            <a:pPr marL="0" indent="0" algn="l">
               <a:lnSpc>
                 <a:spcPts val="2160"/>
               </a:lnSpc>
@@ -4299,7 +4493,7 @@
           </a:bodyPr>
           <a:lstStyle/>
           <a:p>
-            <a:pPr algn="l" indent="0" marL="0">
+            <a:pPr marL="0" indent="0" algn="l">
               <a:lnSpc>
                 <a:spcPts val="1960"/>
               </a:lnSpc>
@@ -4343,7 +4537,7 @@
           </a:bodyPr>
           <a:lstStyle/>
           <a:p>
-            <a:pPr algn="l" indent="0" marL="0">
+            <a:pPr marL="0" indent="0" algn="l">
               <a:lnSpc>
                 <a:spcPts val="1960"/>
               </a:lnSpc>
@@ -4398,7 +4592,7 @@
           </a:bodyPr>
           <a:lstStyle/>
           <a:p>
-            <a:pPr algn="l" indent="0" marL="0">
+            <a:pPr marL="0" indent="0" algn="l">
               <a:lnSpc>
                 <a:spcPts val="1960"/>
               </a:lnSpc>
@@ -4442,7 +4636,7 @@
           </a:bodyPr>
           <a:lstStyle/>
           <a:p>
-            <a:pPr algn="l" indent="0" marL="0">
+            <a:pPr marL="0" indent="0" algn="l">
               <a:lnSpc>
                 <a:spcPts val="1680"/>
               </a:lnSpc>
@@ -4486,7 +4680,7 @@
           </a:bodyPr>
           <a:lstStyle/>
           <a:p>
-            <a:pPr algn="l" indent="0" marL="0">
+            <a:pPr marL="0" indent="0" algn="l">
               <a:lnSpc>
                 <a:spcPts val="1680"/>
               </a:lnSpc>
@@ -4523,6 +4717,7 @@
         <a:solidFill>
           <a:srgbClr val="F6F8F7"/>
         </a:solidFill>
+        <a:effectLst/>
       </p:bgPr>
     </p:bg>
     <p:spTree>
@@ -4562,14 +4757,14 @@
           </a:bodyPr>
           <a:lstStyle/>
           <a:p>
-            <a:pPr algn="l" indent="0" marL="0">
+            <a:pPr marL="0" indent="0" algn="l">
               <a:lnSpc>
                 <a:spcPts val="1680"/>
               </a:lnSpc>
               <a:buNone/>
             </a:pPr>
             <a:r>
-              <a:rPr lang="en-US" sz="1200" b="1" spc="100" kern="0" dirty="0">
+              <a:rPr lang="en-US" sz="1200" b="1" kern="0" spc="100" dirty="0">
                 <a:solidFill>
                   <a:srgbClr val="0B6A8F"/>
                 </a:solidFill>
@@ -4606,7 +4801,7 @@
           </a:bodyPr>
           <a:lstStyle/>
           <a:p>
-            <a:pPr algn="l" indent="0" marL="0">
+            <a:pPr marL="0" indent="0" algn="l">
               <a:lnSpc>
                 <a:spcPts val="3300"/>
               </a:lnSpc>
@@ -4643,16 +4838,34 @@
         </p:nvGraphicFramePr>
         <p:xfrm>
           <a:off x="825500" y="1788120"/>
-          <a:ext cx="10553700" cy="2427833"/>
+          <a:ext cx="10553700" cy="2427835"/>
         </p:xfrm>
         <a:graphic>
           <a:graphicData uri="http://schemas.openxmlformats.org/drawingml/2006/table">
             <a:tbl>
               <a:tblPr/>
               <a:tblGrid>
-                <a:gridCol w="3588258"/>
-                <a:gridCol w="3482721"/>
-                <a:gridCol w="3482721"/>
+                <a:gridCol w="3588258">
+                  <a:extLst>
+                    <a:ext uri="{9D8B030D-6E8A-4147-A177-3AD203B41FA5}">
+                      <a16:colId xmlns:a16="http://schemas.microsoft.com/office/drawing/2014/main" val="20000"/>
+                    </a:ext>
+                  </a:extLst>
+                </a:gridCol>
+                <a:gridCol w="3482721">
+                  <a:extLst>
+                    <a:ext uri="{9D8B030D-6E8A-4147-A177-3AD203B41FA5}">
+                      <a16:colId xmlns:a16="http://schemas.microsoft.com/office/drawing/2014/main" val="20001"/>
+                    </a:ext>
+                  </a:extLst>
+                </a:gridCol>
+                <a:gridCol w="3482721">
+                  <a:extLst>
+                    <a:ext uri="{9D8B030D-6E8A-4147-A177-3AD203B41FA5}">
+                      <a16:colId xmlns:a16="http://schemas.microsoft.com/office/drawing/2014/main" val="20002"/>
+                    </a:ext>
+                  </a:extLst>
+                </a:gridCol>
               </a:tblGrid>
               <a:tr h="386011">
                 <a:tc>
@@ -4660,7 +4873,7 @@
                     <a:bodyPr/>
                     <a:lstStyle/>
                     <a:p>
-                      <a:pPr indent="0" marL="0">
+                      <a:pPr marL="0" indent="0">
                         <a:lnSpc>
                           <a:spcPts val="1960"/>
                         </a:lnSpc>
@@ -4684,7 +4897,7 @@
                       </a:endParaRPr>
                     </a:p>
                   </a:txBody>
-                  <a:tcPr marL="62230" marR="62230" marT="62230" marB="62230" anchor="t">
+                  <a:tcPr marL="62230" marR="62230" marT="62230" marB="62230">
                     <a:lnL w="12700" cap="flat" cmpd="sng" algn="ctr">
                       <a:solidFill>
                         <a:srgbClr val="C4C6C5"/>
@@ -4731,7 +4944,7 @@
                     <a:bodyPr/>
                     <a:lstStyle/>
                     <a:p>
-                      <a:pPr indent="0" marL="0">
+                      <a:pPr marL="0" indent="0">
                         <a:lnSpc>
                           <a:spcPts val="1960"/>
                         </a:lnSpc>
@@ -4755,7 +4968,7 @@
                       </a:endParaRPr>
                     </a:p>
                   </a:txBody>
-                  <a:tcPr marL="62230" marR="62230" marT="62230" marB="62230" anchor="t">
+                  <a:tcPr marL="62230" marR="62230" marT="62230" marB="62230">
                     <a:lnL w="12700" cap="flat" cmpd="sng" algn="ctr">
                       <a:solidFill>
                         <a:srgbClr val="BDC1C3"/>
@@ -4802,7 +5015,7 @@
                     <a:bodyPr/>
                     <a:lstStyle/>
                     <a:p>
-                      <a:pPr indent="0" marL="0">
+                      <a:pPr marL="0" indent="0">
                         <a:lnSpc>
                           <a:spcPts val="1960"/>
                         </a:lnSpc>
@@ -4826,7 +5039,7 @@
                       </a:endParaRPr>
                     </a:p>
                   </a:txBody>
-                  <a:tcPr marL="62230" marR="62230" marT="62230" marB="62230" anchor="t">
+                  <a:tcPr marL="62230" marR="62230" marT="62230" marB="62230">
                     <a:lnL w="12700" cap="flat" cmpd="sng" algn="ctr">
                       <a:solidFill>
                         <a:srgbClr val="BDC1C3"/>
@@ -4868,6 +5081,11 @@
                     </a:solidFill>
                   </a:tcPr>
                 </a:tc>
+                <a:extLst>
+                  <a:ext uri="{0D108BD9-81ED-4DB2-BD59-A6C34878D82A}">
+                    <a16:rowId xmlns:a16="http://schemas.microsoft.com/office/drawing/2014/main" val="10000"/>
+                  </a:ext>
+                </a:extLst>
               </a:tr>
               <a:tr h="634901">
                 <a:tc>
@@ -4875,7 +5093,7 @@
                     <a:bodyPr/>
                     <a:lstStyle/>
                     <a:p>
-                      <a:pPr indent="0" marL="0">
+                      <a:pPr marL="0" indent="0">
                         <a:lnSpc>
                           <a:spcPts val="1960"/>
                         </a:lnSpc>
@@ -4899,7 +5117,7 @@
                       </a:endParaRPr>
                     </a:p>
                   </a:txBody>
-                  <a:tcPr marL="62230" marR="62230" marT="62230" marB="62230" anchor="t">
+                  <a:tcPr marL="62230" marR="62230" marT="62230" marB="62230">
                     <a:lnL w="12700" cap="flat" cmpd="sng" algn="ctr">
                       <a:solidFill>
                         <a:srgbClr val="C4C6C5"/>
@@ -4943,7 +5161,7 @@
                     <a:bodyPr/>
                     <a:lstStyle/>
                     <a:p>
-                      <a:pPr indent="0" marL="0">
+                      <a:pPr marL="0" indent="0">
                         <a:lnSpc>
                           <a:spcPts val="1960"/>
                         </a:lnSpc>
@@ -4967,7 +5185,7 @@
                       </a:endParaRPr>
                     </a:p>
                   </a:txBody>
-                  <a:tcPr marL="62230" marR="62230" marT="62230" marB="62230" anchor="t">
+                  <a:tcPr marL="62230" marR="62230" marT="62230" marB="62230">
                     <a:lnL w="12700" cap="flat" cmpd="sng" algn="ctr">
                       <a:solidFill>
                         <a:srgbClr val="C4C6C5"/>
@@ -5011,7 +5229,7 @@
                     <a:bodyPr/>
                     <a:lstStyle/>
                     <a:p>
-                      <a:pPr indent="0" marL="0">
+                      <a:pPr marL="0" indent="0">
                         <a:lnSpc>
                           <a:spcPts val="1960"/>
                         </a:lnSpc>
@@ -5035,7 +5253,7 @@
                       </a:endParaRPr>
                     </a:p>
                   </a:txBody>
-                  <a:tcPr marL="62230" marR="62230" marT="62230" marB="62230" anchor="t">
+                  <a:tcPr marL="62230" marR="62230" marT="62230" marB="62230">
                     <a:lnL w="12700" cap="flat" cmpd="sng" algn="ctr">
                       <a:solidFill>
                         <a:srgbClr val="C4C6C5"/>
@@ -5074,6 +5292,11 @@
                     </a:lnB>
                   </a:tcPr>
                 </a:tc>
+                <a:extLst>
+                  <a:ext uri="{0D108BD9-81ED-4DB2-BD59-A6C34878D82A}">
+                    <a16:rowId xmlns:a16="http://schemas.microsoft.com/office/drawing/2014/main" val="10001"/>
+                  </a:ext>
+                </a:extLst>
               </a:tr>
               <a:tr h="386011">
                 <a:tc>
@@ -5081,7 +5304,7 @@
                     <a:bodyPr/>
                     <a:lstStyle/>
                     <a:p>
-                      <a:pPr indent="0" marL="0">
+                      <a:pPr marL="0" indent="0">
                         <a:lnSpc>
                           <a:spcPts val="1960"/>
                         </a:lnSpc>
@@ -5105,7 +5328,7 @@
                       </a:endParaRPr>
                     </a:p>
                   </a:txBody>
-                  <a:tcPr marL="62230" marR="62230" marT="62230" marB="62230" anchor="t">
+                  <a:tcPr marL="62230" marR="62230" marT="62230" marB="62230">
                     <a:lnL w="12700" cap="flat" cmpd="sng" algn="ctr">
                       <a:solidFill>
                         <a:srgbClr val="C4C6C5"/>
@@ -5149,7 +5372,7 @@
                     <a:bodyPr/>
                     <a:lstStyle/>
                     <a:p>
-                      <a:pPr indent="0" marL="0">
+                      <a:pPr marL="0" indent="0">
                         <a:lnSpc>
                           <a:spcPts val="1960"/>
                         </a:lnSpc>
@@ -5173,7 +5396,7 @@
                       </a:endParaRPr>
                     </a:p>
                   </a:txBody>
-                  <a:tcPr marL="62230" marR="62230" marT="62230" marB="62230" anchor="t">
+                  <a:tcPr marL="62230" marR="62230" marT="62230" marB="62230">
                     <a:lnL w="12700" cap="flat" cmpd="sng" algn="ctr">
                       <a:solidFill>
                         <a:srgbClr val="C4C6C5"/>
@@ -5217,7 +5440,7 @@
                     <a:bodyPr/>
                     <a:lstStyle/>
                     <a:p>
-                      <a:pPr indent="0" marL="0">
+                      <a:pPr marL="0" indent="0">
                         <a:lnSpc>
                           <a:spcPts val="1960"/>
                         </a:lnSpc>
@@ -5241,7 +5464,7 @@
                       </a:endParaRPr>
                     </a:p>
                   </a:txBody>
-                  <a:tcPr marL="62230" marR="62230" marT="62230" marB="62230" anchor="t">
+                  <a:tcPr marL="62230" marR="62230" marT="62230" marB="62230">
                     <a:lnL w="12700" cap="flat" cmpd="sng" algn="ctr">
                       <a:solidFill>
                         <a:srgbClr val="C4C6C5"/>
@@ -5280,6 +5503,11 @@
                     </a:lnB>
                   </a:tcPr>
                 </a:tc>
+                <a:extLst>
+                  <a:ext uri="{0D108BD9-81ED-4DB2-BD59-A6C34878D82A}">
+                    <a16:rowId xmlns:a16="http://schemas.microsoft.com/office/drawing/2014/main" val="10002"/>
+                  </a:ext>
+                </a:extLst>
               </a:tr>
               <a:tr h="634901">
                 <a:tc>
@@ -5287,7 +5515,7 @@
                     <a:bodyPr/>
                     <a:lstStyle/>
                     <a:p>
-                      <a:pPr indent="0" marL="0">
+                      <a:pPr marL="0" indent="0">
                         <a:lnSpc>
                           <a:spcPts val="1960"/>
                         </a:lnSpc>
@@ -5311,7 +5539,7 @@
                       </a:endParaRPr>
                     </a:p>
                   </a:txBody>
-                  <a:tcPr marL="62230" marR="62230" marT="62230" marB="62230" anchor="t">
+                  <a:tcPr marL="62230" marR="62230" marT="62230" marB="62230">
                     <a:lnL w="12700" cap="flat" cmpd="sng" algn="ctr">
                       <a:solidFill>
                         <a:srgbClr val="C4C6C5"/>
@@ -5355,7 +5583,7 @@
                     <a:bodyPr/>
                     <a:lstStyle/>
                     <a:p>
-                      <a:pPr indent="0" marL="0">
+                      <a:pPr marL="0" indent="0">
                         <a:lnSpc>
                           <a:spcPts val="1960"/>
                         </a:lnSpc>
@@ -5379,7 +5607,7 @@
                       </a:endParaRPr>
                     </a:p>
                   </a:txBody>
-                  <a:tcPr marL="62230" marR="62230" marT="62230" marB="62230" anchor="t">
+                  <a:tcPr marL="62230" marR="62230" marT="62230" marB="62230">
                     <a:lnL w="12700" cap="flat" cmpd="sng" algn="ctr">
                       <a:solidFill>
                         <a:srgbClr val="C4C6C5"/>
@@ -5423,7 +5651,7 @@
                     <a:bodyPr/>
                     <a:lstStyle/>
                     <a:p>
-                      <a:pPr indent="0" marL="0">
+                      <a:pPr marL="0" indent="0">
                         <a:lnSpc>
                           <a:spcPts val="1960"/>
                         </a:lnSpc>
@@ -5447,7 +5675,7 @@
                       </a:endParaRPr>
                     </a:p>
                   </a:txBody>
-                  <a:tcPr marL="62230" marR="62230" marT="62230" marB="62230" anchor="t">
+                  <a:tcPr marL="62230" marR="62230" marT="62230" marB="62230">
                     <a:lnL w="12700" cap="flat" cmpd="sng" algn="ctr">
                       <a:solidFill>
                         <a:srgbClr val="C4C6C5"/>
@@ -5486,6 +5714,11 @@
                     </a:lnB>
                   </a:tcPr>
                 </a:tc>
+                <a:extLst>
+                  <a:ext uri="{0D108BD9-81ED-4DB2-BD59-A6C34878D82A}">
+                    <a16:rowId xmlns:a16="http://schemas.microsoft.com/office/drawing/2014/main" val="10003"/>
+                  </a:ext>
+                </a:extLst>
               </a:tr>
               <a:tr h="386011">
                 <a:tc>
@@ -5493,7 +5726,7 @@
                     <a:bodyPr/>
                     <a:lstStyle/>
                     <a:p>
-                      <a:pPr indent="0" marL="0">
+                      <a:pPr marL="0" indent="0">
                         <a:lnSpc>
                           <a:spcPts val="1960"/>
                         </a:lnSpc>
@@ -5517,7 +5750,7 @@
                       </a:endParaRPr>
                     </a:p>
                   </a:txBody>
-                  <a:tcPr marL="62230" marR="62230" marT="62230" marB="62230" anchor="t">
+                  <a:tcPr marL="62230" marR="62230" marT="62230" marB="62230">
                     <a:lnL w="12700" cap="flat" cmpd="sng" algn="ctr">
                       <a:solidFill>
                         <a:srgbClr val="C4C6C5"/>
@@ -5561,7 +5794,7 @@
                     <a:bodyPr/>
                     <a:lstStyle/>
                     <a:p>
-                      <a:pPr indent="0" marL="0">
+                      <a:pPr marL="0" indent="0">
                         <a:lnSpc>
                           <a:spcPts val="1960"/>
                         </a:lnSpc>
@@ -5585,7 +5818,7 @@
                       </a:endParaRPr>
                     </a:p>
                   </a:txBody>
-                  <a:tcPr marL="62230" marR="62230" marT="62230" marB="62230" anchor="t">
+                  <a:tcPr marL="62230" marR="62230" marT="62230" marB="62230">
                     <a:lnL w="12700" cap="flat" cmpd="sng" algn="ctr">
                       <a:solidFill>
                         <a:srgbClr val="C4C6C5"/>
@@ -5629,7 +5862,7 @@
                     <a:bodyPr/>
                     <a:lstStyle/>
                     <a:p>
-                      <a:pPr indent="0" marL="0">
+                      <a:pPr marL="0" indent="0">
                         <a:lnSpc>
                           <a:spcPts val="1960"/>
                         </a:lnSpc>
@@ -5653,7 +5886,7 @@
                       </a:endParaRPr>
                     </a:p>
                   </a:txBody>
-                  <a:tcPr marL="62230" marR="62230" marT="62230" marB="62230" anchor="t">
+                  <a:tcPr marL="62230" marR="62230" marT="62230" marB="62230">
                     <a:lnL w="12700" cap="flat" cmpd="sng" algn="ctr">
                       <a:solidFill>
                         <a:srgbClr val="C4C6C5"/>
@@ -5692,6 +5925,11 @@
                     </a:lnB>
                   </a:tcPr>
                 </a:tc>
+                <a:extLst>
+                  <a:ext uri="{0D108BD9-81ED-4DB2-BD59-A6C34878D82A}">
+                    <a16:rowId xmlns:a16="http://schemas.microsoft.com/office/drawing/2014/main" val="10004"/>
+                  </a:ext>
+                </a:extLst>
               </a:tr>
             </a:tbl>
           </a:graphicData>
@@ -5720,7 +5958,7 @@
           </a:bodyPr>
           <a:lstStyle/>
           <a:p>
-            <a:pPr algn="l" indent="0" marL="0">
+            <a:pPr marL="0" indent="0" algn="l">
               <a:lnSpc>
                 <a:spcPts val="1680"/>
               </a:lnSpc>
@@ -5764,7 +6002,7 @@
           </a:bodyPr>
           <a:lstStyle/>
           <a:p>
-            <a:pPr algn="l" indent="0" marL="0">
+            <a:pPr marL="0" indent="0" algn="l">
               <a:lnSpc>
                 <a:spcPts val="1680"/>
               </a:lnSpc>
@@ -5808,7 +6046,7 @@
           </a:bodyPr>
           <a:lstStyle/>
           <a:p>
-            <a:pPr algn="l" indent="0" marL="0">
+            <a:pPr marL="0" indent="0" algn="l">
               <a:lnSpc>
                 <a:spcPts val="1680"/>
               </a:lnSpc>
@@ -5845,6 +6083,7 @@
         <a:solidFill>
           <a:srgbClr val="14303D"/>
         </a:solidFill>
+        <a:effectLst/>
       </p:bgPr>
     </p:bg>
     <p:spTree>
@@ -5884,14 +6123,14 @@
           </a:bodyPr>
           <a:lstStyle/>
           <a:p>
-            <a:pPr algn="l" indent="0" marL="0">
+            <a:pPr marL="0" indent="0" algn="l">
               <a:lnSpc>
                 <a:spcPts val="1680"/>
               </a:lnSpc>
               <a:buNone/>
             </a:pPr>
             <a:r>
-              <a:rPr lang="en-US" sz="1200" b="1" spc="100" kern="0" dirty="0">
+              <a:rPr lang="en-US" sz="1200" b="1" kern="0" spc="100" dirty="0">
                 <a:solidFill>
                   <a:srgbClr val="6FC3E3"/>
                 </a:solidFill>
@@ -5928,7 +6167,7 @@
           </a:bodyPr>
           <a:lstStyle/>
           <a:p>
-            <a:pPr algn="l" indent="0" marL="0">
+            <a:pPr marL="0" indent="0" algn="l">
               <a:lnSpc>
                 <a:spcPts val="6048"/>
               </a:lnSpc>
@@ -5972,7 +6211,7 @@
           </a:bodyPr>
           <a:lstStyle/>
           <a:p>
-            <a:pPr algn="l" indent="0" marL="0">
+            <a:pPr marL="0" indent="0" algn="l">
               <a:lnSpc>
                 <a:spcPts val="2430"/>
               </a:lnSpc>
@@ -6004,6 +6243,1266 @@
 <file path=ppt/slides/slide5.xml><?xml version="1.0" encoding="utf-8"?>
 <p:sld xmlns:a="http://schemas.openxmlformats.org/drawingml/2006/main" xmlns:r="http://schemas.openxmlformats.org/officeDocument/2006/relationships" xmlns:p="http://schemas.openxmlformats.org/presentationml/2006/main">
   <p:cSld name="Slide 5">
+    <p:bg>
+      <p:bgPr>
+        <a:solidFill>
+          <a:srgbClr val="F6F8F7"/>
+        </a:solidFill>
+        <a:effectLst/>
+      </p:bgPr>
+    </p:bg>
+    <p:spTree>
+      <p:nvGrpSpPr>
+        <p:cNvPr id="1" name=""/>
+        <p:cNvGrpSpPr/>
+        <p:nvPr/>
+      </p:nvGrpSpPr>
+      <p:grpSpPr>
+        <a:xfrm>
+          <a:off x="0" y="0"/>
+          <a:ext cx="0" cy="0"/>
+          <a:chOff x="0" y="0"/>
+          <a:chExt cx="0" cy="0"/>
+        </a:xfrm>
+      </p:grpSpPr>
+      <p:sp>
+        <p:nvSpPr>
+          <p:cNvPr id="2" name="Text 0"/>
+          <p:cNvSpPr/>
+          <p:nvPr/>
+        </p:nvSpPr>
+        <p:spPr>
+          <a:xfrm>
+            <a:off x="812800" y="812800"/>
+            <a:ext cx="10883392" cy="238720"/>
+          </a:xfrm>
+          <a:prstGeom prst="rect">
+            <a:avLst/>
+          </a:prstGeom>
+          <a:noFill/>
+          <a:ln/>
+        </p:spPr>
+        <p:txBody>
+          <a:bodyPr wrap="square" lIns="0" tIns="0" rIns="0" bIns="0" rtlCol="0" anchor="t">
+            <a:normAutofit/>
+          </a:bodyPr>
+          <a:lstStyle/>
+          <a:p>
+            <a:pPr marL="0" indent="0" algn="l">
+              <a:lnSpc>
+                <a:spcPts val="1680"/>
+              </a:lnSpc>
+              <a:buNone/>
+            </a:pPr>
+            <a:r>
+              <a:rPr lang="en-US" sz="1200" b="1" kern="0" spc="100" dirty="0">
+                <a:solidFill>
+                  <a:srgbClr val="0B6A8F"/>
+                </a:solidFill>
+                <a:latin typeface="IBM Plex Sans" pitchFamily="34" charset="0"/>
+                <a:ea typeface="IBM Plex Sans" pitchFamily="34" charset="-122"/>
+                <a:cs typeface="IBM Plex Sans" pitchFamily="34" charset="-120"/>
+              </a:rPr>
+              <a:t>ARCHITECTURE</a:t>
+            </a:r>
+            <a:endParaRPr lang="en-US" sz="1200" dirty="0"/>
+          </a:p>
+        </p:txBody>
+      </p:sp>
+      <p:sp>
+        <p:nvSpPr>
+          <p:cNvPr id="3" name="Text 1"/>
+          <p:cNvSpPr/>
+          <p:nvPr/>
+        </p:nvSpPr>
+        <p:spPr>
+          <a:xfrm>
+            <a:off x="812800" y="1102320"/>
+            <a:ext cx="10883392" cy="444500"/>
+          </a:xfrm>
+          <a:prstGeom prst="rect">
+            <a:avLst/>
+          </a:prstGeom>
+          <a:noFill/>
+          <a:ln/>
+        </p:spPr>
+        <p:txBody>
+          <a:bodyPr wrap="square" lIns="0" tIns="0" rIns="0" bIns="0" rtlCol="0" anchor="t">
+            <a:normAutofit/>
+          </a:bodyPr>
+          <a:lstStyle/>
+          <a:p>
+            <a:pPr marL="0" indent="0" algn="l">
+              <a:lnSpc>
+                <a:spcPts val="3300"/>
+              </a:lnSpc>
+              <a:buNone/>
+            </a:pPr>
+            <a:r>
+              <a:rPr lang="en-US" sz="3000" b="1" dirty="0">
+                <a:solidFill>
+                  <a:srgbClr val="14303D"/>
+                </a:solidFill>
+                <a:latin typeface="Source Serif 4" pitchFamily="34" charset="0"/>
+                <a:ea typeface="Source Serif 4" pitchFamily="34" charset="-122"/>
+                <a:cs typeface="Source Serif 4" pitchFamily="34" charset="-120"/>
+              </a:rPr>
+              <a:t>Three agents, one shared memory</a:t>
+            </a:r>
+            <a:endParaRPr lang="en-US" sz="3000" dirty="0"/>
+          </a:p>
+        </p:txBody>
+      </p:sp>
+      <p:sp>
+        <p:nvSpPr>
+          <p:cNvPr id="4" name="Shape 2"/>
+          <p:cNvSpPr/>
+          <p:nvPr/>
+        </p:nvSpPr>
+        <p:spPr>
+          <a:xfrm>
+            <a:off x="812800" y="1841500"/>
+            <a:ext cx="10566400" cy="825500"/>
+          </a:xfrm>
+          <a:prstGeom prst="roundRect">
+            <a:avLst>
+              <a:gd name="adj" fmla="val 12308"/>
+            </a:avLst>
+          </a:prstGeom>
+          <a:solidFill>
+            <a:srgbClr val="14303D"/>
+          </a:solidFill>
+          <a:ln/>
+        </p:spPr>
+        <p:txBody>
+          <a:bodyPr/>
+          <a:lstStyle/>
+          <a:p>
+            <a:endParaRPr lang="en-US"/>
+          </a:p>
+        </p:txBody>
+      </p:sp>
+      <p:sp>
+        <p:nvSpPr>
+          <p:cNvPr id="5" name="Text 3"/>
+          <p:cNvSpPr/>
+          <p:nvPr/>
+        </p:nvSpPr>
+        <p:spPr>
+          <a:xfrm>
+            <a:off x="1016000" y="1997720"/>
+            <a:ext cx="10464800" cy="299690"/>
+          </a:xfrm>
+          <a:prstGeom prst="rect">
+            <a:avLst/>
+          </a:prstGeom>
+          <a:noFill/>
+          <a:ln/>
+        </p:spPr>
+        <p:txBody>
+          <a:bodyPr wrap="square" lIns="0" tIns="0" rIns="0" bIns="0" rtlCol="0" anchor="t">
+            <a:normAutofit/>
+          </a:bodyPr>
+          <a:lstStyle/>
+          <a:p>
+            <a:pPr marL="0" indent="0" algn="l">
+              <a:lnSpc>
+                <a:spcPts val="2160"/>
+              </a:lnSpc>
+              <a:buNone/>
+            </a:pPr>
+            <a:r>
+              <a:rPr lang="en-US" sz="1800" b="1" dirty="0">
+                <a:solidFill>
+                  <a:srgbClr val="F3F6F5"/>
+                </a:solidFill>
+                <a:latin typeface="IBM Plex Sans" pitchFamily="34" charset="0"/>
+                <a:ea typeface="IBM Plex Sans" pitchFamily="34" charset="-122"/>
+                <a:cs typeface="IBM Plex Sans" pitchFamily="34" charset="-120"/>
+              </a:rPr>
+              <a:t>Knowledge graph · Neo4j</a:t>
+            </a:r>
+            <a:endParaRPr lang="en-US" sz="1800" dirty="0"/>
+          </a:p>
+        </p:txBody>
+      </p:sp>
+      <p:sp>
+        <p:nvSpPr>
+          <p:cNvPr id="6" name="Text 4"/>
+          <p:cNvSpPr/>
+          <p:nvPr/>
+        </p:nvSpPr>
+        <p:spPr>
+          <a:xfrm>
+            <a:off x="1016000" y="2297410"/>
+            <a:ext cx="10464800" cy="238720"/>
+          </a:xfrm>
+          <a:prstGeom prst="rect">
+            <a:avLst/>
+          </a:prstGeom>
+          <a:noFill/>
+          <a:ln/>
+        </p:spPr>
+        <p:txBody>
+          <a:bodyPr wrap="square" lIns="0" tIns="0" rIns="0" bIns="0" rtlCol="0" anchor="t">
+            <a:normAutofit/>
+          </a:bodyPr>
+          <a:lstStyle/>
+          <a:p>
+            <a:pPr marL="0" indent="0" algn="l">
+              <a:lnSpc>
+                <a:spcPts val="1680"/>
+              </a:lnSpc>
+              <a:buNone/>
+            </a:pPr>
+            <a:r>
+              <a:rPr lang="en-US" sz="1200" dirty="0">
+                <a:solidFill>
+                  <a:srgbClr val="BFD3DA"/>
+                </a:solidFill>
+                <a:latin typeface="IBM Plex Sans" pitchFamily="34" charset="0"/>
+                <a:ea typeface="IBM Plex Sans" pitchFamily="34" charset="-122"/>
+                <a:cs typeface="IBM Plex Sans" pitchFamily="34" charset="-120"/>
+              </a:rPr>
+              <a:t>requirements · observed screens · test cases · execution history · findings</a:t>
+            </a:r>
+            <a:endParaRPr lang="en-US" sz="1200" dirty="0"/>
+          </a:p>
+        </p:txBody>
+      </p:sp>
+      <p:sp>
+        <p:nvSpPr>
+          <p:cNvPr id="7" name="Shape 5"/>
+          <p:cNvSpPr/>
+          <p:nvPr/>
+        </p:nvSpPr>
+        <p:spPr>
+          <a:xfrm>
+            <a:off x="819150" y="3308350"/>
+            <a:ext cx="2781300" cy="1257300"/>
+          </a:xfrm>
+          <a:prstGeom prst="roundRect">
+            <a:avLst>
+              <a:gd name="adj" fmla="val 7576"/>
+            </a:avLst>
+          </a:prstGeom>
+          <a:solidFill>
+            <a:srgbClr val="FDFEFE"/>
+          </a:solidFill>
+          <a:ln w="12700">
+            <a:solidFill>
+              <a:srgbClr val="0F7EA8"/>
+            </a:solidFill>
+            <a:prstDash val="solid"/>
+          </a:ln>
+        </p:spPr>
+        <p:txBody>
+          <a:bodyPr/>
+          <a:lstStyle/>
+          <a:p>
+            <a:endParaRPr lang="en-US"/>
+          </a:p>
+        </p:txBody>
+      </p:sp>
+      <p:sp>
+        <p:nvSpPr>
+          <p:cNvPr id="8" name="Text 6"/>
+          <p:cNvSpPr/>
+          <p:nvPr/>
+        </p:nvSpPr>
+        <p:spPr>
+          <a:xfrm>
+            <a:off x="1003300" y="3492500"/>
+            <a:ext cx="2485390" cy="299690"/>
+          </a:xfrm>
+          <a:prstGeom prst="rect">
+            <a:avLst/>
+          </a:prstGeom>
+          <a:noFill/>
+          <a:ln/>
+        </p:spPr>
+        <p:txBody>
+          <a:bodyPr wrap="square" lIns="0" tIns="0" rIns="0" bIns="0" rtlCol="0" anchor="t">
+            <a:normAutofit/>
+          </a:bodyPr>
+          <a:lstStyle/>
+          <a:p>
+            <a:pPr marL="0" indent="0" algn="l">
+              <a:lnSpc>
+                <a:spcPts val="2160"/>
+              </a:lnSpc>
+              <a:buNone/>
+            </a:pPr>
+            <a:r>
+              <a:rPr lang="en-US" sz="1800" b="1" dirty="0">
+                <a:solidFill>
+                  <a:srgbClr val="14303D"/>
+                </a:solidFill>
+                <a:latin typeface="IBM Plex Sans" pitchFamily="34" charset="0"/>
+                <a:ea typeface="IBM Plex Sans" pitchFamily="34" charset="-122"/>
+                <a:cs typeface="IBM Plex Sans" pitchFamily="34" charset="-120"/>
+              </a:rPr>
+              <a:t>Planner</a:t>
+            </a:r>
+            <a:endParaRPr lang="en-US" sz="1800" dirty="0"/>
+          </a:p>
+        </p:txBody>
+      </p:sp>
+      <p:sp>
+        <p:nvSpPr>
+          <p:cNvPr id="9" name="Text 7"/>
+          <p:cNvSpPr/>
+          <p:nvPr/>
+        </p:nvSpPr>
+        <p:spPr>
+          <a:xfrm>
+            <a:off x="1003300" y="3817590"/>
+            <a:ext cx="2485390" cy="452041"/>
+          </a:xfrm>
+          <a:prstGeom prst="rect">
+            <a:avLst/>
+          </a:prstGeom>
+          <a:noFill/>
+          <a:ln/>
+        </p:spPr>
+        <p:txBody>
+          <a:bodyPr wrap="square" lIns="0" tIns="0" rIns="0" bIns="0" rtlCol="0" anchor="t">
+            <a:normAutofit/>
+          </a:bodyPr>
+          <a:lstStyle/>
+          <a:p>
+            <a:pPr marL="0" indent="0" algn="l">
+              <a:lnSpc>
+                <a:spcPts val="1680"/>
+              </a:lnSpc>
+              <a:buNone/>
+            </a:pPr>
+            <a:r>
+              <a:rPr lang="en-US" sz="1200" dirty="0">
+                <a:solidFill>
+                  <a:srgbClr val="46596A"/>
+                </a:solidFill>
+                <a:latin typeface="IBM Plex Sans" pitchFamily="34" charset="0"/>
+                <a:ea typeface="IBM Plex Sans" pitchFamily="34" charset="-122"/>
+                <a:cs typeface="IBM Plex Sans" pitchFamily="34" charset="-120"/>
+              </a:rPr>
+              <a:t>decides what to test next and writes the test case</a:t>
+            </a:r>
+            <a:endParaRPr lang="en-US" sz="1200" dirty="0"/>
+          </a:p>
+        </p:txBody>
+      </p:sp>
+      <p:sp>
+        <p:nvSpPr>
+          <p:cNvPr id="10" name="Shape 8"/>
+          <p:cNvSpPr/>
+          <p:nvPr/>
+        </p:nvSpPr>
+        <p:spPr>
+          <a:xfrm>
+            <a:off x="4705350" y="3308350"/>
+            <a:ext cx="2781300" cy="1257300"/>
+          </a:xfrm>
+          <a:prstGeom prst="roundRect">
+            <a:avLst>
+              <a:gd name="adj" fmla="val 7576"/>
+            </a:avLst>
+          </a:prstGeom>
+          <a:solidFill>
+            <a:srgbClr val="FDFEFE"/>
+          </a:solidFill>
+          <a:ln w="12700">
+            <a:solidFill>
+              <a:srgbClr val="0F7EA8"/>
+            </a:solidFill>
+            <a:prstDash val="solid"/>
+          </a:ln>
+        </p:spPr>
+        <p:txBody>
+          <a:bodyPr/>
+          <a:lstStyle/>
+          <a:p>
+            <a:endParaRPr lang="en-US"/>
+          </a:p>
+        </p:txBody>
+      </p:sp>
+      <p:sp>
+        <p:nvSpPr>
+          <p:cNvPr id="11" name="Text 9"/>
+          <p:cNvSpPr/>
+          <p:nvPr/>
+        </p:nvSpPr>
+        <p:spPr>
+          <a:xfrm>
+            <a:off x="4889500" y="3492500"/>
+            <a:ext cx="2485390" cy="299690"/>
+          </a:xfrm>
+          <a:prstGeom prst="rect">
+            <a:avLst/>
+          </a:prstGeom>
+          <a:noFill/>
+          <a:ln/>
+        </p:spPr>
+        <p:txBody>
+          <a:bodyPr wrap="square" lIns="0" tIns="0" rIns="0" bIns="0" rtlCol="0" anchor="t">
+            <a:normAutofit/>
+          </a:bodyPr>
+          <a:lstStyle/>
+          <a:p>
+            <a:pPr marL="0" indent="0" algn="l">
+              <a:lnSpc>
+                <a:spcPts val="2160"/>
+              </a:lnSpc>
+              <a:buNone/>
+            </a:pPr>
+            <a:r>
+              <a:rPr lang="en-US" sz="1800" b="1" dirty="0">
+                <a:solidFill>
+                  <a:srgbClr val="14303D"/>
+                </a:solidFill>
+                <a:latin typeface="IBM Plex Sans" pitchFamily="34" charset="0"/>
+                <a:ea typeface="IBM Plex Sans" pitchFamily="34" charset="-122"/>
+                <a:cs typeface="IBM Plex Sans" pitchFamily="34" charset="-120"/>
+              </a:rPr>
+              <a:t>Executor</a:t>
+            </a:r>
+            <a:endParaRPr lang="en-US" sz="1800" dirty="0"/>
+          </a:p>
+        </p:txBody>
+      </p:sp>
+      <p:sp>
+        <p:nvSpPr>
+          <p:cNvPr id="12" name="Text 10"/>
+          <p:cNvSpPr/>
+          <p:nvPr/>
+        </p:nvSpPr>
+        <p:spPr>
+          <a:xfrm>
+            <a:off x="4889500" y="3817590"/>
+            <a:ext cx="2485390" cy="452041"/>
+          </a:xfrm>
+          <a:prstGeom prst="rect">
+            <a:avLst/>
+          </a:prstGeom>
+          <a:noFill/>
+          <a:ln/>
+        </p:spPr>
+        <p:txBody>
+          <a:bodyPr wrap="square" lIns="0" tIns="0" rIns="0" bIns="0" rtlCol="0" anchor="t">
+            <a:normAutofit/>
+          </a:bodyPr>
+          <a:lstStyle/>
+          <a:p>
+            <a:pPr marL="0" indent="0" algn="l">
+              <a:lnSpc>
+                <a:spcPts val="1680"/>
+              </a:lnSpc>
+              <a:buNone/>
+            </a:pPr>
+            <a:r>
+              <a:rPr lang="en-US" sz="1200" dirty="0">
+                <a:solidFill>
+                  <a:srgbClr val="46596A"/>
+                </a:solidFill>
+                <a:latin typeface="IBM Plex Sans" pitchFamily="34" charset="0"/>
+                <a:ea typeface="IBM Plex Sans" pitchFamily="34" charset="-122"/>
+                <a:cs typeface="IBM Plex Sans" pitchFamily="34" charset="-120"/>
+              </a:rPr>
+              <a:t>drives the real app on an Android device</a:t>
+            </a:r>
+            <a:endParaRPr lang="en-US" sz="1200" dirty="0"/>
+          </a:p>
+        </p:txBody>
+      </p:sp>
+      <p:sp>
+        <p:nvSpPr>
+          <p:cNvPr id="13" name="Shape 11"/>
+          <p:cNvSpPr/>
+          <p:nvPr/>
+        </p:nvSpPr>
+        <p:spPr>
+          <a:xfrm>
+            <a:off x="8591550" y="3308350"/>
+            <a:ext cx="2781300" cy="1257300"/>
+          </a:xfrm>
+          <a:prstGeom prst="roundRect">
+            <a:avLst>
+              <a:gd name="adj" fmla="val 7576"/>
+            </a:avLst>
+          </a:prstGeom>
+          <a:solidFill>
+            <a:srgbClr val="FDFEFE"/>
+          </a:solidFill>
+          <a:ln w="12700">
+            <a:solidFill>
+              <a:srgbClr val="0F7EA8"/>
+            </a:solidFill>
+            <a:prstDash val="solid"/>
+          </a:ln>
+        </p:spPr>
+        <p:txBody>
+          <a:bodyPr/>
+          <a:lstStyle/>
+          <a:p>
+            <a:endParaRPr lang="en-US"/>
+          </a:p>
+        </p:txBody>
+      </p:sp>
+      <p:sp>
+        <p:nvSpPr>
+          <p:cNvPr id="14" name="Text 12"/>
+          <p:cNvSpPr/>
+          <p:nvPr/>
+        </p:nvSpPr>
+        <p:spPr>
+          <a:xfrm>
+            <a:off x="8775700" y="3492500"/>
+            <a:ext cx="2485390" cy="299690"/>
+          </a:xfrm>
+          <a:prstGeom prst="rect">
+            <a:avLst/>
+          </a:prstGeom>
+          <a:noFill/>
+          <a:ln/>
+        </p:spPr>
+        <p:txBody>
+          <a:bodyPr wrap="square" lIns="0" tIns="0" rIns="0" bIns="0" rtlCol="0" anchor="t">
+            <a:normAutofit/>
+          </a:bodyPr>
+          <a:lstStyle/>
+          <a:p>
+            <a:pPr marL="0" indent="0" algn="l">
+              <a:lnSpc>
+                <a:spcPts val="2160"/>
+              </a:lnSpc>
+              <a:buNone/>
+            </a:pPr>
+            <a:r>
+              <a:rPr lang="en-US" sz="1800" b="1" dirty="0">
+                <a:solidFill>
+                  <a:srgbClr val="14303D"/>
+                </a:solidFill>
+                <a:latin typeface="IBM Plex Sans" pitchFamily="34" charset="0"/>
+                <a:ea typeface="IBM Plex Sans" pitchFamily="34" charset="-122"/>
+                <a:cs typeface="IBM Plex Sans" pitchFamily="34" charset="-120"/>
+              </a:rPr>
+              <a:t>Investigator</a:t>
+            </a:r>
+            <a:endParaRPr lang="en-US" sz="1800" dirty="0"/>
+          </a:p>
+        </p:txBody>
+      </p:sp>
+      <p:sp>
+        <p:nvSpPr>
+          <p:cNvPr id="15" name="Text 13"/>
+          <p:cNvSpPr/>
+          <p:nvPr/>
+        </p:nvSpPr>
+        <p:spPr>
+          <a:xfrm>
+            <a:off x="8775700" y="3817590"/>
+            <a:ext cx="2485390" cy="452041"/>
+          </a:xfrm>
+          <a:prstGeom prst="rect">
+            <a:avLst/>
+          </a:prstGeom>
+          <a:noFill/>
+          <a:ln/>
+        </p:spPr>
+        <p:txBody>
+          <a:bodyPr wrap="square" lIns="0" tIns="0" rIns="0" bIns="0" rtlCol="0" anchor="t">
+            <a:normAutofit/>
+          </a:bodyPr>
+          <a:lstStyle/>
+          <a:p>
+            <a:pPr marL="0" indent="0" algn="l">
+              <a:lnSpc>
+                <a:spcPts val="1680"/>
+              </a:lnSpc>
+              <a:buNone/>
+            </a:pPr>
+            <a:r>
+              <a:rPr lang="en-US" sz="1200" dirty="0">
+                <a:solidFill>
+                  <a:srgbClr val="46596A"/>
+                </a:solidFill>
+                <a:latin typeface="IBM Plex Sans" pitchFamily="34" charset="0"/>
+                <a:ea typeface="IBM Plex Sans" pitchFamily="34" charset="-122"/>
+                <a:cs typeface="IBM Plex Sans" pitchFamily="34" charset="-120"/>
+              </a:rPr>
+              <a:t>decides what each run actually proved</a:t>
+            </a:r>
+            <a:endParaRPr lang="en-US" sz="1200" dirty="0"/>
+          </a:p>
+        </p:txBody>
+      </p:sp>
+      <p:sp>
+        <p:nvSpPr>
+          <p:cNvPr id="16" name="Shape 14"/>
+          <p:cNvSpPr/>
+          <p:nvPr/>
+        </p:nvSpPr>
+        <p:spPr>
+          <a:xfrm>
+            <a:off x="4702175" y="5019675"/>
+            <a:ext cx="2787650" cy="755650"/>
+          </a:xfrm>
+          <a:prstGeom prst="roundRect">
+            <a:avLst>
+              <a:gd name="adj" fmla="val 13025"/>
+            </a:avLst>
+          </a:prstGeom>
+          <a:solidFill>
+            <a:srgbClr val="E8EDEF"/>
+          </a:solidFill>
+          <a:ln w="6350">
+            <a:solidFill>
+              <a:srgbClr val="B8C5CB"/>
+            </a:solidFill>
+            <a:prstDash val="solid"/>
+          </a:ln>
+        </p:spPr>
+        <p:txBody>
+          <a:bodyPr/>
+          <a:lstStyle/>
+          <a:p>
+            <a:endParaRPr lang="en-US"/>
+          </a:p>
+        </p:txBody>
+      </p:sp>
+      <p:sp>
+        <p:nvSpPr>
+          <p:cNvPr id="17" name="Text 15"/>
+          <p:cNvSpPr/>
+          <p:nvPr/>
+        </p:nvSpPr>
+        <p:spPr>
+          <a:xfrm>
+            <a:off x="4883150" y="5162550"/>
+            <a:ext cx="2498471" cy="256530"/>
+          </a:xfrm>
+          <a:prstGeom prst="rect">
+            <a:avLst/>
+          </a:prstGeom>
+          <a:noFill/>
+          <a:ln/>
+        </p:spPr>
+        <p:txBody>
+          <a:bodyPr wrap="square" lIns="0" tIns="0" rIns="0" bIns="0" rtlCol="0" anchor="t">
+            <a:normAutofit/>
+          </a:bodyPr>
+          <a:lstStyle/>
+          <a:p>
+            <a:pPr marL="0" indent="0" algn="l">
+              <a:lnSpc>
+                <a:spcPts val="1820"/>
+              </a:lnSpc>
+              <a:buNone/>
+            </a:pPr>
+            <a:r>
+              <a:rPr lang="en-US" sz="1400" b="1" dirty="0">
+                <a:solidFill>
+                  <a:srgbClr val="14303D"/>
+                </a:solidFill>
+                <a:latin typeface="IBM Plex Sans" pitchFamily="34" charset="0"/>
+                <a:ea typeface="IBM Plex Sans" pitchFamily="34" charset="-122"/>
+                <a:cs typeface="IBM Plex Sans" pitchFamily="34" charset="-120"/>
+              </a:rPr>
+              <a:t>Android device</a:t>
+            </a:r>
+            <a:endParaRPr lang="en-US" sz="1400" dirty="0"/>
+          </a:p>
+        </p:txBody>
+      </p:sp>
+      <p:sp>
+        <p:nvSpPr>
+          <p:cNvPr id="18" name="Text 16"/>
+          <p:cNvSpPr/>
+          <p:nvPr/>
+        </p:nvSpPr>
+        <p:spPr>
+          <a:xfrm>
+            <a:off x="4883150" y="5419080"/>
+            <a:ext cx="2498471" cy="238720"/>
+          </a:xfrm>
+          <a:prstGeom prst="rect">
+            <a:avLst/>
+          </a:prstGeom>
+          <a:noFill/>
+          <a:ln/>
+        </p:spPr>
+        <p:txBody>
+          <a:bodyPr wrap="square" lIns="0" tIns="0" rIns="0" bIns="0" rtlCol="0" anchor="t">
+            <a:normAutofit/>
+          </a:bodyPr>
+          <a:lstStyle/>
+          <a:p>
+            <a:pPr marL="0" indent="0" algn="l">
+              <a:lnSpc>
+                <a:spcPts val="1680"/>
+              </a:lnSpc>
+              <a:buNone/>
+            </a:pPr>
+            <a:r>
+              <a:rPr lang="en-US" sz="1200" dirty="0">
+                <a:solidFill>
+                  <a:srgbClr val="46596A"/>
+                </a:solidFill>
+                <a:latin typeface="IBM Plex Sans" pitchFamily="34" charset="0"/>
+                <a:ea typeface="IBM Plex Sans" pitchFamily="34" charset="-122"/>
+                <a:cs typeface="IBM Plex Sans" pitchFamily="34" charset="-120"/>
+              </a:rPr>
+              <a:t>app under test · on-device portal</a:t>
+            </a:r>
+            <a:endParaRPr lang="en-US" sz="1200" dirty="0"/>
+          </a:p>
+        </p:txBody>
+      </p:sp>
+      <p:sp>
+        <p:nvSpPr>
+          <p:cNvPr id="19" name="Text 17"/>
+          <p:cNvSpPr/>
+          <p:nvPr/>
+        </p:nvSpPr>
+        <p:spPr>
+          <a:xfrm>
+            <a:off x="812800" y="5016500"/>
+            <a:ext cx="2877820" cy="452041"/>
+          </a:xfrm>
+          <a:prstGeom prst="rect">
+            <a:avLst/>
+          </a:prstGeom>
+          <a:noFill/>
+          <a:ln/>
+        </p:spPr>
+        <p:txBody>
+          <a:bodyPr wrap="square" lIns="0" tIns="0" rIns="0" bIns="0" rtlCol="0" anchor="t">
+            <a:normAutofit/>
+          </a:bodyPr>
+          <a:lstStyle/>
+          <a:p>
+            <a:pPr marL="0" indent="0" algn="l">
+              <a:lnSpc>
+                <a:spcPts val="1680"/>
+              </a:lnSpc>
+              <a:buNone/>
+            </a:pPr>
+            <a:r>
+              <a:rPr lang="en-US" sz="1200" dirty="0">
+                <a:solidFill>
+                  <a:srgbClr val="46596A"/>
+                </a:solidFill>
+                <a:latin typeface="IBM Plex Sans" pitchFamily="34" charset="0"/>
+                <a:ea typeface="IBM Plex Sans" pitchFamily="34" charset="-122"/>
+                <a:cs typeface="IBM Plex Sans" pitchFamily="34" charset="-120"/>
+              </a:rPr>
+              <a:t>Stateless: no conversation history. Every call is rebuilt from the graph.</a:t>
+            </a:r>
+            <a:endParaRPr lang="en-US" sz="1200" dirty="0"/>
+          </a:p>
+        </p:txBody>
+      </p:sp>
+      <p:sp>
+        <p:nvSpPr>
+          <p:cNvPr id="20" name="Text 18"/>
+          <p:cNvSpPr/>
+          <p:nvPr/>
+        </p:nvSpPr>
+        <p:spPr>
+          <a:xfrm>
+            <a:off x="8585200" y="5016500"/>
+            <a:ext cx="2877820" cy="452041"/>
+          </a:xfrm>
+          <a:prstGeom prst="rect">
+            <a:avLst/>
+          </a:prstGeom>
+          <a:noFill/>
+          <a:ln/>
+        </p:spPr>
+        <p:txBody>
+          <a:bodyPr wrap="square" lIns="0" tIns="0" rIns="0" bIns="0" rtlCol="0" anchor="t">
+            <a:normAutofit/>
+          </a:bodyPr>
+          <a:lstStyle/>
+          <a:p>
+            <a:pPr marL="0" indent="0" algn="l">
+              <a:lnSpc>
+                <a:spcPts val="1680"/>
+              </a:lnSpc>
+              <a:buNone/>
+            </a:pPr>
+            <a:r>
+              <a:rPr lang="en-US" sz="1200" dirty="0">
+                <a:solidFill>
+                  <a:srgbClr val="46596A"/>
+                </a:solidFill>
+                <a:latin typeface="IBM Plex Sans" pitchFamily="34" charset="0"/>
+                <a:ea typeface="IBM Plex Sans" pitchFamily="34" charset="-122"/>
+                <a:cs typeface="IBM Plex Sans" pitchFamily="34" charset="-120"/>
+              </a:rPr>
+              <a:t>qwen3.7-flash plans and drives; glm-5.3-flash evaluates. All via OpenRouter.</a:t>
+            </a:r>
+            <a:endParaRPr lang="en-US" sz="1200" dirty="0"/>
+          </a:p>
+        </p:txBody>
+      </p:sp>
+      <p:pic>
+        <p:nvPicPr>
+          <p:cNvPr id="21" name="Image 0" descr="connector"/>
+          <p:cNvPicPr>
+            <a:picLocks noChangeAspect="1"/>
+          </p:cNvPicPr>
+          <p:nvPr/>
+        </p:nvPicPr>
+        <p:blipFill>
+          <a:blip r:embed="rId3"/>
+          <a:srcRect/>
+          <a:stretch/>
+        </p:blipFill>
+        <p:spPr>
+          <a:xfrm>
+            <a:off x="2159000" y="2628900"/>
+            <a:ext cx="101600" cy="711200"/>
+          </a:xfrm>
+          <a:prstGeom prst="rect">
+            <a:avLst/>
+          </a:prstGeom>
+        </p:spPr>
+      </p:pic>
+      <p:pic>
+        <p:nvPicPr>
+          <p:cNvPr id="22" name="Image 1" descr="connector"/>
+          <p:cNvPicPr>
+            <a:picLocks noChangeAspect="1"/>
+          </p:cNvPicPr>
+          <p:nvPr/>
+        </p:nvPicPr>
+        <p:blipFill>
+          <a:blip r:embed="rId4"/>
+          <a:srcRect/>
+          <a:stretch/>
+        </p:blipFill>
+        <p:spPr>
+          <a:xfrm>
+            <a:off x="6045200" y="2628900"/>
+            <a:ext cx="101600" cy="711200"/>
+          </a:xfrm>
+          <a:prstGeom prst="rect">
+            <a:avLst/>
+          </a:prstGeom>
+        </p:spPr>
+      </p:pic>
+      <p:pic>
+        <p:nvPicPr>
+          <p:cNvPr id="23" name="Image 2" descr="connector"/>
+          <p:cNvPicPr>
+            <a:picLocks noChangeAspect="1"/>
+          </p:cNvPicPr>
+          <p:nvPr/>
+        </p:nvPicPr>
+        <p:blipFill>
+          <a:blip r:embed="rId4"/>
+          <a:srcRect/>
+          <a:stretch/>
+        </p:blipFill>
+        <p:spPr>
+          <a:xfrm>
+            <a:off x="9931400" y="2628900"/>
+            <a:ext cx="101600" cy="711200"/>
+          </a:xfrm>
+          <a:prstGeom prst="rect">
+            <a:avLst/>
+          </a:prstGeom>
+        </p:spPr>
+      </p:pic>
+      <p:pic>
+        <p:nvPicPr>
+          <p:cNvPr id="24" name="Image 3" descr="connector"/>
+          <p:cNvPicPr>
+            <a:picLocks noChangeAspect="1"/>
+          </p:cNvPicPr>
+          <p:nvPr/>
+        </p:nvPicPr>
+        <p:blipFill>
+          <a:blip r:embed="rId5"/>
+          <a:srcRect/>
+          <a:stretch/>
+        </p:blipFill>
+        <p:spPr>
+          <a:xfrm>
+            <a:off x="3568700" y="3886200"/>
+            <a:ext cx="1168400" cy="101600"/>
+          </a:xfrm>
+          <a:prstGeom prst="rect">
+            <a:avLst/>
+          </a:prstGeom>
+        </p:spPr>
+      </p:pic>
+      <p:pic>
+        <p:nvPicPr>
+          <p:cNvPr id="25" name="Image 4" descr="connector"/>
+          <p:cNvPicPr>
+            <a:picLocks noChangeAspect="1"/>
+          </p:cNvPicPr>
+          <p:nvPr/>
+        </p:nvPicPr>
+        <p:blipFill>
+          <a:blip r:embed="rId5"/>
+          <a:srcRect/>
+          <a:stretch/>
+        </p:blipFill>
+        <p:spPr>
+          <a:xfrm>
+            <a:off x="7454900" y="3886200"/>
+            <a:ext cx="1168400" cy="101600"/>
+          </a:xfrm>
+          <a:prstGeom prst="rect">
+            <a:avLst/>
+          </a:prstGeom>
+        </p:spPr>
+      </p:pic>
+      <p:pic>
+        <p:nvPicPr>
+          <p:cNvPr id="26" name="Image 5" descr="connector"/>
+          <p:cNvPicPr>
+            <a:picLocks noChangeAspect="1"/>
+          </p:cNvPicPr>
+          <p:nvPr/>
+        </p:nvPicPr>
+        <p:blipFill>
+          <a:blip r:embed="rId6"/>
+          <a:srcRect/>
+          <a:stretch/>
+        </p:blipFill>
+        <p:spPr>
+          <a:xfrm>
+            <a:off x="6045200" y="4533900"/>
+            <a:ext cx="101600" cy="520700"/>
+          </a:xfrm>
+          <a:prstGeom prst="rect">
+            <a:avLst/>
+          </a:prstGeom>
+        </p:spPr>
+      </p:pic>
+      <p:sp>
+        <p:nvSpPr>
+          <p:cNvPr id="27" name="Text 19"/>
+          <p:cNvSpPr/>
+          <p:nvPr/>
+        </p:nvSpPr>
+        <p:spPr>
+          <a:xfrm>
+            <a:off x="2311400" y="2870200"/>
+            <a:ext cx="1066800" cy="238720"/>
+          </a:xfrm>
+          <a:prstGeom prst="rect">
+            <a:avLst/>
+          </a:prstGeom>
+          <a:noFill/>
+          <a:ln/>
+        </p:spPr>
+        <p:txBody>
+          <a:bodyPr wrap="square" lIns="0" tIns="0" rIns="0" bIns="0" rtlCol="0" anchor="t">
+            <a:normAutofit/>
+          </a:bodyPr>
+          <a:lstStyle/>
+          <a:p>
+            <a:pPr marL="0" indent="0" algn="l">
+              <a:lnSpc>
+                <a:spcPts val="1680"/>
+              </a:lnSpc>
+              <a:buNone/>
+            </a:pPr>
+            <a:r>
+              <a:rPr lang="en-US" sz="1200" dirty="0">
+                <a:solidFill>
+                  <a:srgbClr val="0B6A8F"/>
+                </a:solidFill>
+                <a:latin typeface="IBM Plex Sans" pitchFamily="34" charset="0"/>
+                <a:ea typeface="IBM Plex Sans" pitchFamily="34" charset="-122"/>
+                <a:cs typeface="IBM Plex Sans" pitchFamily="34" charset="-120"/>
+              </a:rPr>
+              <a:t>reads</a:t>
+            </a:r>
+            <a:endParaRPr lang="en-US" sz="1200" dirty="0"/>
+          </a:p>
+        </p:txBody>
+      </p:sp>
+      <p:sp>
+        <p:nvSpPr>
+          <p:cNvPr id="28" name="Text 20"/>
+          <p:cNvSpPr/>
+          <p:nvPr/>
+        </p:nvSpPr>
+        <p:spPr>
+          <a:xfrm>
+            <a:off x="6197600" y="2870200"/>
+            <a:ext cx="2092960" cy="238720"/>
+          </a:xfrm>
+          <a:prstGeom prst="rect">
+            <a:avLst/>
+          </a:prstGeom>
+          <a:noFill/>
+          <a:ln/>
+        </p:spPr>
+        <p:txBody>
+          <a:bodyPr wrap="square" lIns="0" tIns="0" rIns="0" bIns="0" rtlCol="0" anchor="t">
+            <a:normAutofit/>
+          </a:bodyPr>
+          <a:lstStyle/>
+          <a:p>
+            <a:pPr marL="0" indent="0" algn="l">
+              <a:lnSpc>
+                <a:spcPts val="1680"/>
+              </a:lnSpc>
+              <a:buNone/>
+            </a:pPr>
+            <a:r>
+              <a:rPr lang="en-US" sz="1200" dirty="0">
+                <a:solidFill>
+                  <a:srgbClr val="0B6A8F"/>
+                </a:solidFill>
+                <a:latin typeface="IBM Plex Sans" pitchFamily="34" charset="0"/>
+                <a:ea typeface="IBM Plex Sans" pitchFamily="34" charset="-122"/>
+                <a:cs typeface="IBM Plex Sans" pitchFamily="34" charset="-120"/>
+              </a:rPr>
+              <a:t>writes screens seen</a:t>
+            </a:r>
+            <a:endParaRPr lang="en-US" sz="1200" dirty="0"/>
+          </a:p>
+        </p:txBody>
+      </p:sp>
+      <p:sp>
+        <p:nvSpPr>
+          <p:cNvPr id="29" name="Text 21"/>
+          <p:cNvSpPr/>
+          <p:nvPr/>
+        </p:nvSpPr>
+        <p:spPr>
+          <a:xfrm>
+            <a:off x="10083800" y="2870200"/>
+            <a:ext cx="1320800" cy="238720"/>
+          </a:xfrm>
+          <a:prstGeom prst="rect">
+            <a:avLst/>
+          </a:prstGeom>
+          <a:noFill/>
+          <a:ln/>
+        </p:spPr>
+        <p:txBody>
+          <a:bodyPr wrap="square" lIns="0" tIns="0" rIns="0" bIns="0" rtlCol="0" anchor="t">
+            <a:normAutofit/>
+          </a:bodyPr>
+          <a:lstStyle/>
+          <a:p>
+            <a:pPr marL="0" indent="0" algn="l">
+              <a:lnSpc>
+                <a:spcPts val="1680"/>
+              </a:lnSpc>
+              <a:buNone/>
+            </a:pPr>
+            <a:r>
+              <a:rPr lang="en-US" sz="1200" dirty="0">
+                <a:solidFill>
+                  <a:srgbClr val="0B6A8F"/>
+                </a:solidFill>
+                <a:latin typeface="IBM Plex Sans" pitchFamily="34" charset="0"/>
+                <a:ea typeface="IBM Plex Sans" pitchFamily="34" charset="-122"/>
+                <a:cs typeface="IBM Plex Sans" pitchFamily="34" charset="-120"/>
+              </a:rPr>
+              <a:t>writes findings</a:t>
+            </a:r>
+            <a:endParaRPr lang="en-US" sz="1200" dirty="0"/>
+          </a:p>
+        </p:txBody>
+      </p:sp>
+      <p:sp>
+        <p:nvSpPr>
+          <p:cNvPr id="30" name="Text 22"/>
+          <p:cNvSpPr/>
+          <p:nvPr/>
+        </p:nvSpPr>
+        <p:spPr>
+          <a:xfrm>
+            <a:off x="3594100" y="3606800"/>
+            <a:ext cx="1117600" cy="238720"/>
+          </a:xfrm>
+          <a:prstGeom prst="rect">
+            <a:avLst/>
+          </a:prstGeom>
+          <a:noFill/>
+          <a:ln/>
+        </p:spPr>
+        <p:txBody>
+          <a:bodyPr wrap="square" lIns="0" tIns="0" rIns="0" bIns="0" rtlCol="0" anchor="t">
+            <a:normAutofit/>
+          </a:bodyPr>
+          <a:lstStyle/>
+          <a:p>
+            <a:pPr marL="0" indent="0" algn="ctr">
+              <a:lnSpc>
+                <a:spcPts val="1680"/>
+              </a:lnSpc>
+              <a:buNone/>
+            </a:pPr>
+            <a:r>
+              <a:rPr lang="en-US" sz="1200" dirty="0">
+                <a:solidFill>
+                  <a:srgbClr val="0B6A8F"/>
+                </a:solidFill>
+                <a:latin typeface="IBM Plex Sans" pitchFamily="34" charset="0"/>
+                <a:ea typeface="IBM Plex Sans" pitchFamily="34" charset="-122"/>
+                <a:cs typeface="IBM Plex Sans" pitchFamily="34" charset="-120"/>
+              </a:rPr>
+              <a:t>test case</a:t>
+            </a:r>
+            <a:endParaRPr lang="en-US" sz="1200" dirty="0"/>
+          </a:p>
+        </p:txBody>
+      </p:sp>
+      <p:sp>
+        <p:nvSpPr>
+          <p:cNvPr id="31" name="Text 23"/>
+          <p:cNvSpPr/>
+          <p:nvPr/>
+        </p:nvSpPr>
+        <p:spPr>
+          <a:xfrm>
+            <a:off x="7480300" y="3606800"/>
+            <a:ext cx="1117600" cy="238720"/>
+          </a:xfrm>
+          <a:prstGeom prst="rect">
+            <a:avLst/>
+          </a:prstGeom>
+          <a:noFill/>
+          <a:ln/>
+        </p:spPr>
+        <p:txBody>
+          <a:bodyPr wrap="square" lIns="0" tIns="0" rIns="0" bIns="0" rtlCol="0" anchor="t">
+            <a:normAutofit/>
+          </a:bodyPr>
+          <a:lstStyle/>
+          <a:p>
+            <a:pPr marL="0" indent="0" algn="ctr">
+              <a:lnSpc>
+                <a:spcPts val="1680"/>
+              </a:lnSpc>
+              <a:buNone/>
+            </a:pPr>
+            <a:r>
+              <a:rPr lang="en-US" sz="1200" dirty="0">
+                <a:solidFill>
+                  <a:srgbClr val="0B6A8F"/>
+                </a:solidFill>
+                <a:latin typeface="IBM Plex Sans" pitchFamily="34" charset="0"/>
+                <a:ea typeface="IBM Plex Sans" pitchFamily="34" charset="-122"/>
+                <a:cs typeface="IBM Plex Sans" pitchFamily="34" charset="-120"/>
+              </a:rPr>
+              <a:t>trajectory</a:t>
+            </a:r>
+            <a:endParaRPr lang="en-US" sz="1200" dirty="0"/>
+          </a:p>
+        </p:txBody>
+      </p:sp>
+      <p:sp>
+        <p:nvSpPr>
+          <p:cNvPr id="32" name="Text 24"/>
+          <p:cNvSpPr/>
+          <p:nvPr/>
+        </p:nvSpPr>
+        <p:spPr>
+          <a:xfrm>
+            <a:off x="812800" y="6238280"/>
+            <a:ext cx="3459976" cy="238720"/>
+          </a:xfrm>
+          <a:prstGeom prst="rect">
+            <a:avLst/>
+          </a:prstGeom>
+          <a:noFill/>
+          <a:ln/>
+        </p:spPr>
+        <p:txBody>
+          <a:bodyPr wrap="square" lIns="0" tIns="0" rIns="0" bIns="0" rtlCol="0" anchor="t">
+            <a:normAutofit/>
+          </a:bodyPr>
+          <a:lstStyle/>
+          <a:p>
+            <a:pPr marL="0" indent="0" algn="l">
+              <a:lnSpc>
+                <a:spcPts val="1680"/>
+              </a:lnSpc>
+              <a:buNone/>
+            </a:pPr>
+            <a:r>
+              <a:rPr lang="en-US" sz="1200" dirty="0">
+                <a:solidFill>
+                  <a:srgbClr val="55697A"/>
+                </a:solidFill>
+                <a:latin typeface="IBM Plex Sans" pitchFamily="34" charset="0"/>
+                <a:ea typeface="IBM Plex Sans" pitchFamily="34" charset="-122"/>
+                <a:cs typeface="IBM Plex Sans" pitchFamily="34" charset="-120"/>
+              </a:rPr>
+              <a:t>Exploratory Testing Automation · CSE 450 · BUET</a:t>
+            </a:r>
+            <a:endParaRPr lang="en-US" sz="1200" dirty="0"/>
+          </a:p>
+        </p:txBody>
+      </p:sp>
+      <p:sp>
+        <p:nvSpPr>
+          <p:cNvPr id="33" name="Text 25"/>
+          <p:cNvSpPr/>
+          <p:nvPr/>
+        </p:nvSpPr>
+        <p:spPr>
+          <a:xfrm>
+            <a:off x="11287720" y="6238280"/>
+            <a:ext cx="142280" cy="238720"/>
+          </a:xfrm>
+          <a:prstGeom prst="rect">
+            <a:avLst/>
+          </a:prstGeom>
+          <a:noFill/>
+          <a:ln/>
+        </p:spPr>
+        <p:txBody>
+          <a:bodyPr wrap="square" lIns="0" tIns="0" rIns="0" bIns="0" rtlCol="0" anchor="t">
+            <a:normAutofit/>
+          </a:bodyPr>
+          <a:lstStyle/>
+          <a:p>
+            <a:pPr marL="0" indent="0" algn="l">
+              <a:lnSpc>
+                <a:spcPts val="1680"/>
+              </a:lnSpc>
+              <a:buNone/>
+            </a:pPr>
+            <a:r>
+              <a:rPr lang="en-US" sz="1200" dirty="0">
+                <a:solidFill>
+                  <a:srgbClr val="55697A"/>
+                </a:solidFill>
+                <a:latin typeface="IBM Plex Sans" pitchFamily="34" charset="0"/>
+                <a:ea typeface="IBM Plex Sans" pitchFamily="34" charset="-122"/>
+                <a:cs typeface="IBM Plex Sans" pitchFamily="34" charset="-120"/>
+              </a:rPr>
+              <a:t>5</a:t>
+            </a:r>
+            <a:endParaRPr lang="en-US" sz="1200" dirty="0"/>
+          </a:p>
+        </p:txBody>
+      </p:sp>
+    </p:spTree>
+  </p:cSld>
+  <p:clrMapOvr>
+    <a:masterClrMapping/>
+  </p:clrMapOvr>
+</p:sld>
+</file>
+
+<file path=ppt/slides/slide6.xml><?xml version="1.0" encoding="utf-8"?>
+<p:sld xmlns:a="http://schemas.openxmlformats.org/drawingml/2006/main" xmlns:r="http://schemas.openxmlformats.org/officeDocument/2006/relationships" xmlns:p="http://schemas.openxmlformats.org/presentationml/2006/main">
+  <p:cSld name="Slide 1">
     <p:bg>
       <p:bgPr>
         <a:solidFill>
@@ -6028,34 +7527,29 @@
       <p:sp>
         <p:nvSpPr>
           <p:cNvPr id="2" name="Text 0"/>
-          <p:cNvSpPr/>
-          <p:nvPr/>
-        </p:nvSpPr>
-        <p:spPr>
-          <a:xfrm>
-            <a:off x="812800" y="812800"/>
-            <a:ext cx="10883392" cy="238720"/>
-          </a:xfrm>
-          <a:prstGeom prst="rect">
-            <a:avLst/>
-          </a:prstGeom>
-          <a:noFill/>
-          <a:ln/>
-        </p:spPr>
-        <p:txBody>
-          <a:bodyPr wrap="square" lIns="0" tIns="0" rIns="0" bIns="0" rtlCol="0" anchor="t">
-            <a:normAutofit/>
-          </a:bodyPr>
-          <a:lstStyle/>
-          <a:p>
-            <a:pPr algn="l" indent="0" marL="0">
-              <a:lnSpc>
-                <a:spcPts val="1680"/>
-              </a:lnSpc>
-              <a:buNone/>
-            </a:pPr>
-            <a:r>
-              <a:rPr lang="en-US" sz="1200" b="1" spc="100" kern="0" dirty="0">
+          <p:cNvSpPr txBox="1"/>
+          <p:nvPr/>
+        </p:nvSpPr>
+        <p:spPr>
+          <a:xfrm>
+            <a:off x="813816" y="813816"/>
+            <a:ext cx="10881360" cy="237744"/>
+          </a:xfrm>
+          <a:prstGeom prst="rect">
+            <a:avLst/>
+          </a:prstGeom>
+          <a:noFill/>
+          <a:ln/>
+        </p:spPr>
+        <p:txBody>
+          <a:bodyPr wrap="square" lIns="0" tIns="0" rIns="0" bIns="0" rtlCol="0" anchor="ctr"/>
+          <a:lstStyle/>
+          <a:p>
+            <a:pPr indent="0" marL="0">
+              <a:buNone/>
+            </a:pPr>
+            <a:r>
+              <a:rPr lang="en-US" sz="1200" b="1" spc="150" kern="0" dirty="0">
                 <a:solidFill>
                   <a:srgbClr val="0B6A8F"/>
                 </a:solidFill>
@@ -6063,7 +7557,7 @@
                 <a:ea typeface="IBM Plex Sans" pitchFamily="34" charset="-122"/>
                 <a:cs typeface="IBM Plex Sans" pitchFamily="34" charset="-120"/>
               </a:rPr>
-              <a:t>ARCHITECTURE</a:t>
+              <a:t>INGESTION</a:t>
             </a:r>
             <a:endParaRPr lang="en-US" sz="1200" dirty="0"/>
           </a:p>
@@ -6072,30 +7566,25 @@
       <p:sp>
         <p:nvSpPr>
           <p:cNvPr id="3" name="Text 1"/>
-          <p:cNvSpPr/>
-          <p:nvPr/>
-        </p:nvSpPr>
-        <p:spPr>
-          <a:xfrm>
-            <a:off x="812800" y="1102320"/>
-            <a:ext cx="10883392" cy="444500"/>
-          </a:xfrm>
-          <a:prstGeom prst="rect">
-            <a:avLst/>
-          </a:prstGeom>
-          <a:noFill/>
-          <a:ln/>
-        </p:spPr>
-        <p:txBody>
-          <a:bodyPr wrap="square" lIns="0" tIns="0" rIns="0" bIns="0" rtlCol="0" anchor="t">
-            <a:normAutofit/>
-          </a:bodyPr>
-          <a:lstStyle/>
-          <a:p>
-            <a:pPr algn="l" indent="0" marL="0">
-              <a:lnSpc>
-                <a:spcPts val="3300"/>
-              </a:lnSpc>
+          <p:cNvSpPr txBox="1"/>
+          <p:nvPr/>
+        </p:nvSpPr>
+        <p:spPr>
+          <a:xfrm>
+            <a:off x="813816" y="1106424"/>
+            <a:ext cx="10881360" cy="448056"/>
+          </a:xfrm>
+          <a:prstGeom prst="rect">
+            <a:avLst/>
+          </a:prstGeom>
+          <a:noFill/>
+          <a:ln/>
+        </p:spPr>
+        <p:txBody>
+          <a:bodyPr wrap="square" lIns="0" tIns="0" rIns="0" bIns="0" rtlCol="0" anchor="ctr"/>
+          <a:lstStyle/>
+          <a:p>
+            <a:pPr indent="0" marL="0">
               <a:buNone/>
             </a:pPr>
             <a:r>
@@ -6107,7 +7596,7 @@
                 <a:ea typeface="Source Serif 4" pitchFamily="34" charset="-122"/>
                 <a:cs typeface="Source Serif 4" pitchFamily="34" charset="-120"/>
               </a:rPr>
-              <a:t>Three agents, one shared memory</a:t>
+              <a:t>A document becomes queryable requirements</a:t>
             </a:r>
             <a:endParaRPr lang="en-US" sz="3000" dirty="0"/>
           </a:p>
@@ -6115,1103 +7604,452 @@
       </p:sp>
       <p:sp>
         <p:nvSpPr>
-          <p:cNvPr id="4" name="Shape 2"/>
-          <p:cNvSpPr/>
-          <p:nvPr/>
-        </p:nvSpPr>
-        <p:spPr>
-          <a:xfrm>
-            <a:off x="812800" y="1841500"/>
-            <a:ext cx="10566400" cy="825500"/>
-          </a:xfrm>
-          <a:prstGeom prst="roundRect">
-            <a:avLst>
-              <a:gd name="adj" fmla="val 12308"/>
-            </a:avLst>
+          <p:cNvPr id="4" name="Text 2"/>
+          <p:cNvSpPr txBox="1"/>
+          <p:nvPr/>
+        </p:nvSpPr>
+        <p:spPr>
+          <a:xfrm>
+            <a:off x="813816" y="1645920"/>
+            <a:ext cx="10881360" cy="256032"/>
+          </a:xfrm>
+          <a:prstGeom prst="rect">
+            <a:avLst/>
+          </a:prstGeom>
+          <a:noFill/>
+          <a:ln/>
+        </p:spPr>
+        <p:txBody>
+          <a:bodyPr wrap="square" lIns="0" tIns="0" rIns="0" bIns="0" rtlCol="0" anchor="ctr"/>
+          <a:lstStyle/>
+          <a:p>
+            <a:pPr indent="0" marL="0">
+              <a:buNone/>
+            </a:pPr>
+            <a:r>
+              <a:rPr lang="en-US" sz="1200" dirty="0">
+                <a:solidFill>
+                  <a:srgbClr val="46596A"/>
+                </a:solidFill>
+                <a:latin typeface="IBM Plex Sans" pitchFamily="34" charset="0"/>
+                <a:ea typeface="IBM Plex Sans" pitchFamily="34" charset="-122"/>
+                <a:cs typeface="IBM Plex Sans" pitchFamily="34" charset="-120"/>
+              </a:rPr>
+              <a:t>Prose in. Individually identified, traceable requirements out.</a:t>
+            </a:r>
+            <a:endParaRPr lang="en-US" sz="1200" dirty="0"/>
+          </a:p>
+        </p:txBody>
+      </p:sp>
+      <p:pic>
+        <p:nvPicPr>
+          <p:cNvPr id="5" name="Image 0" descr="D:/Projects/Exploratory-Testing-Planner-Agent/Report/BUET_CSE_Capstone_Project_Template/figures/11-ingestion-document-to-queryable-requirements.png">    </p:cNvPr>
+          <p:cNvPicPr>
+            <a:picLocks noChangeAspect="1"/>
+          </p:cNvPicPr>
+          <p:nvPr/>
+        </p:nvPicPr>
+        <p:blipFill>
+          <a:blip r:embed="rId1"/>
+          <a:stretch>
+            <a:fillRect/>
+          </a:stretch>
+        </p:blipFill>
+        <p:spPr>
+          <a:xfrm>
+            <a:off x="813816" y="2121408"/>
+            <a:ext cx="6537960" cy="3218688"/>
+          </a:xfrm>
+          <a:prstGeom prst="rect">
+            <a:avLst/>
+          </a:prstGeom>
+        </p:spPr>
+      </p:pic>
+      <p:sp>
+        <p:nvSpPr>
+          <p:cNvPr id="6" name="Text 3"/>
+          <p:cNvSpPr txBox="1"/>
+          <p:nvPr/>
+        </p:nvSpPr>
+        <p:spPr>
+          <a:xfrm>
+            <a:off x="813816" y="5440680"/>
+            <a:ext cx="6537960" cy="502920"/>
+          </a:xfrm>
+          <a:prstGeom prst="rect">
+            <a:avLst/>
+          </a:prstGeom>
+          <a:noFill/>
+          <a:ln/>
+        </p:spPr>
+        <p:txBody>
+          <a:bodyPr wrap="square" lIns="0" tIns="0" rIns="0" bIns="0" rtlCol="0" anchor="ctr"/>
+          <a:lstStyle/>
+          <a:p>
+            <a:pPr indent="0" marL="0">
+              <a:lnSpc>
+                <a:spcPts val="1600"/>
+              </a:lnSpc>
+              <a:buNone/>
+            </a:pPr>
+            <a:r>
+              <a:rPr lang="en-US" sz="1200" dirty="0">
+                <a:solidFill>
+                  <a:srgbClr val="46596A"/>
+                </a:solidFill>
+                <a:latin typeface="IBM Plex Sans" pitchFamily="34" charset="0"/>
+                <a:ea typeface="IBM Plex Sans" pitchFamily="34" charset="-122"/>
+                <a:cs typeface="IBM Plex Sans" pitchFamily="34" charset="-120"/>
+              </a:rPr>
+              <a:t>Each requirement links back to the exact chunk of text it came from, which is what makes requirement coverage reportable.</a:t>
+            </a:r>
+            <a:endParaRPr lang="en-US" sz="1200" dirty="0"/>
+          </a:p>
+        </p:txBody>
+      </p:sp>
+      <p:sp>
+        <p:nvSpPr>
+          <p:cNvPr id="7" name="Shape 4"/>
+          <p:cNvSpPr/>
+          <p:nvPr/>
+        </p:nvSpPr>
+        <p:spPr>
+          <a:xfrm>
+            <a:off x="7772400" y="2121408"/>
+            <a:ext cx="3611880" cy="3218688"/>
+          </a:xfrm>
+          <a:prstGeom prst="rect">
+            <a:avLst/>
           </a:prstGeom>
           <a:solidFill>
             <a:srgbClr val="14303D"/>
           </a:solidFill>
-          <a:ln/>
-        </p:spPr>
-      </p:sp>
-      <p:sp>
-        <p:nvSpPr>
-          <p:cNvPr id="5" name="Text 3"/>
-          <p:cNvSpPr/>
-          <p:nvPr/>
-        </p:nvSpPr>
-        <p:spPr>
-          <a:xfrm>
-            <a:off x="1016000" y="1997720"/>
-            <a:ext cx="10464800" cy="299690"/>
-          </a:xfrm>
-          <a:prstGeom prst="rect">
-            <a:avLst/>
-          </a:prstGeom>
-          <a:noFill/>
-          <a:ln/>
-        </p:spPr>
-        <p:txBody>
-          <a:bodyPr wrap="square" lIns="0" tIns="0" rIns="0" bIns="0" rtlCol="0" anchor="t">
-            <a:normAutofit/>
-          </a:bodyPr>
-          <a:lstStyle/>
-          <a:p>
-            <a:pPr algn="l" indent="0" marL="0">
-              <a:lnSpc>
-                <a:spcPts val="2160"/>
-              </a:lnSpc>
-              <a:buNone/>
-            </a:pPr>
-            <a:r>
-              <a:rPr lang="en-US" sz="1800" b="1" dirty="0">
-                <a:solidFill>
-                  <a:srgbClr val="F3F6F5"/>
+          <a:ln w="12700">
+            <a:solidFill>
+              <a:srgbClr val="14303D"/>
+            </a:solidFill>
+            <a:prstDash val="solid"/>
+          </a:ln>
+        </p:spPr>
+      </p:sp>
+      <p:sp>
+        <p:nvSpPr>
+          <p:cNvPr id="8" name="Text 5"/>
+          <p:cNvSpPr txBox="1"/>
+          <p:nvPr/>
+        </p:nvSpPr>
+        <p:spPr>
+          <a:xfrm>
+            <a:off x="8028432" y="2340864"/>
+            <a:ext cx="3108960" cy="237744"/>
+          </a:xfrm>
+          <a:prstGeom prst="rect">
+            <a:avLst/>
+          </a:prstGeom>
+          <a:noFill/>
+          <a:ln/>
+        </p:spPr>
+        <p:txBody>
+          <a:bodyPr wrap="square" lIns="0" tIns="0" rIns="0" bIns="0" rtlCol="0" anchor="ctr"/>
+          <a:lstStyle/>
+          <a:p>
+            <a:pPr indent="0" marL="0">
+              <a:buNone/>
+            </a:pPr>
+            <a:r>
+              <a:rPr lang="en-US" sz="1200" b="1" spc="120" kern="0" dirty="0">
+                <a:solidFill>
+                  <a:srgbClr val="7FB3C8"/>
                 </a:solidFill>
                 <a:latin typeface="IBM Plex Sans" pitchFamily="34" charset="0"/>
                 <a:ea typeface="IBM Plex Sans" pitchFamily="34" charset="-122"/>
                 <a:cs typeface="IBM Plex Sans" pitchFamily="34" charset="-120"/>
               </a:rPr>
-              <a:t>Knowledge graph · Neo4j</a:t>
-            </a:r>
-            <a:endParaRPr lang="en-US" sz="1800" dirty="0"/>
-          </a:p>
-        </p:txBody>
-      </p:sp>
-      <p:sp>
-        <p:nvSpPr>
-          <p:cNvPr id="6" name="Text 4"/>
-          <p:cNvSpPr/>
-          <p:nvPr/>
-        </p:nvSpPr>
-        <p:spPr>
-          <a:xfrm>
-            <a:off x="1016000" y="2297410"/>
-            <a:ext cx="10464800" cy="238720"/>
-          </a:xfrm>
-          <a:prstGeom prst="rect">
-            <a:avLst/>
-          </a:prstGeom>
-          <a:noFill/>
-          <a:ln/>
-        </p:spPr>
-        <p:txBody>
-          <a:bodyPr wrap="square" lIns="0" tIns="0" rIns="0" bIns="0" rtlCol="0" anchor="t">
-            <a:normAutofit/>
-          </a:bodyPr>
-          <a:lstStyle/>
-          <a:p>
-            <a:pPr algn="l" indent="0" marL="0">
-              <a:lnSpc>
-                <a:spcPts val="1680"/>
-              </a:lnSpc>
-              <a:buNone/>
-            </a:pPr>
-            <a:r>
-              <a:rPr lang="en-US" sz="1200" dirty="0">
-                <a:solidFill>
-                  <a:srgbClr val="BFD3DA"/>
+              <a:t>Each requirement carries</a:t>
+            </a:r>
+            <a:endParaRPr lang="en-US" sz="1200" dirty="0"/>
+          </a:p>
+        </p:txBody>
+      </p:sp>
+      <p:sp>
+        <p:nvSpPr>
+          <p:cNvPr id="9" name="Text 6"/>
+          <p:cNvSpPr txBox="1"/>
+          <p:nvPr/>
+        </p:nvSpPr>
+        <p:spPr>
+          <a:xfrm>
+            <a:off x="8028432" y="2688336"/>
+            <a:ext cx="3108960" cy="1417320"/>
+          </a:xfrm>
+          <a:prstGeom prst="rect">
+            <a:avLst/>
+          </a:prstGeom>
+          <a:noFill/>
+          <a:ln/>
+        </p:spPr>
+        <p:txBody>
+          <a:bodyPr wrap="square" lIns="0" tIns="0" rIns="0" bIns="0" rtlCol="0" anchor="ctr"/>
+          <a:lstStyle/>
+          <a:p>
+            <a:pPr indent="0" marL="0">
+              <a:lnSpc>
+                <a:spcPts val="2200"/>
+              </a:lnSpc>
+              <a:buNone/>
+            </a:pPr>
+            <a:r>
+              <a:rPr lang="en-US" sz="1400" dirty="0">
+                <a:solidFill>
+                  <a:srgbClr val="FDFEFE"/>
                 </a:solidFill>
                 <a:latin typeface="IBM Plex Sans" pitchFamily="34" charset="0"/>
                 <a:ea typeface="IBM Plex Sans" pitchFamily="34" charset="-122"/>
                 <a:cs typeface="IBM Plex Sans" pitchFamily="34" charset="-120"/>
               </a:rPr>
-              <a:t>requirements · observed screens · test cases · execution history · findings</a:t>
-            </a:r>
-            <a:endParaRPr lang="en-US" sz="1200" dirty="0"/>
-          </a:p>
-        </p:txBody>
-      </p:sp>
-      <p:sp>
-        <p:nvSpPr>
-          <p:cNvPr id="7" name="Shape 5"/>
-          <p:cNvSpPr/>
-          <p:nvPr/>
-        </p:nvSpPr>
-        <p:spPr>
-          <a:xfrm>
-            <a:off x="819150" y="3308350"/>
-            <a:ext cx="2781300" cy="1257300"/>
-          </a:xfrm>
-          <a:prstGeom prst="roundRect">
-            <a:avLst>
-              <a:gd name="adj" fmla="val 7576"/>
-            </a:avLst>
-          </a:prstGeom>
-          <a:solidFill>
-            <a:srgbClr val="FDFEFE"/>
-          </a:solidFill>
-          <a:ln w="12700">
-            <a:solidFill>
-              <a:srgbClr val="0F7EA8"/>
-            </a:solidFill>
-            <a:prstDash val="solid"/>
-          </a:ln>
-        </p:spPr>
-      </p:sp>
-      <p:sp>
-        <p:nvSpPr>
-          <p:cNvPr id="8" name="Text 6"/>
-          <p:cNvSpPr/>
-          <p:nvPr/>
-        </p:nvSpPr>
-        <p:spPr>
-          <a:xfrm>
-            <a:off x="1003300" y="3492500"/>
-            <a:ext cx="2485390" cy="299690"/>
-          </a:xfrm>
-          <a:prstGeom prst="rect">
-            <a:avLst/>
-          </a:prstGeom>
-          <a:noFill/>
-          <a:ln/>
-        </p:spPr>
-        <p:txBody>
-          <a:bodyPr wrap="square" lIns="0" tIns="0" rIns="0" bIns="0" rtlCol="0" anchor="t">
-            <a:normAutofit/>
-          </a:bodyPr>
-          <a:lstStyle/>
-          <a:p>
-            <a:pPr algn="l" indent="0" marL="0">
-              <a:lnSpc>
-                <a:spcPts val="2160"/>
-              </a:lnSpc>
-              <a:buNone/>
-            </a:pPr>
-            <a:r>
-              <a:rPr lang="en-US" sz="1800" b="1" dirty="0">
-                <a:solidFill>
-                  <a:srgbClr val="14303D"/>
+              <a:t>id · type · priority</a:t>
+            </a:r>
+            <a:endParaRPr lang="en-US" sz="1400" dirty="0"/>
+          </a:p>
+          <a:p>
+            <a:pPr indent="0" marL="0">
+              <a:lnSpc>
+                <a:spcPts val="2200"/>
+              </a:lnSpc>
+              <a:buNone/>
+            </a:pPr>
+            <a:r>
+              <a:rPr lang="en-US" sz="1400" dirty="0">
+                <a:solidFill>
+                  <a:srgbClr val="FDFEFE"/>
                 </a:solidFill>
                 <a:latin typeface="IBM Plex Sans" pitchFamily="34" charset="0"/>
                 <a:ea typeface="IBM Plex Sans" pitchFamily="34" charset="-122"/>
                 <a:cs typeface="IBM Plex Sans" pitchFamily="34" charset="-120"/>
               </a:rPr>
-              <a:t>Planner</a:t>
-            </a:r>
-            <a:endParaRPr lang="en-US" sz="1800" dirty="0"/>
-          </a:p>
-        </p:txBody>
-      </p:sp>
-      <p:sp>
-        <p:nvSpPr>
-          <p:cNvPr id="9" name="Text 7"/>
-          <p:cNvSpPr/>
-          <p:nvPr/>
-        </p:nvSpPr>
-        <p:spPr>
-          <a:xfrm>
-            <a:off x="1003300" y="3817590"/>
-            <a:ext cx="2485390" cy="452041"/>
-          </a:xfrm>
-          <a:prstGeom prst="rect">
-            <a:avLst/>
-          </a:prstGeom>
-          <a:noFill/>
-          <a:ln/>
-        </p:spPr>
-        <p:txBody>
-          <a:bodyPr wrap="square" lIns="0" tIns="0" rIns="0" bIns="0" rtlCol="0" anchor="t">
-            <a:normAutofit/>
-          </a:bodyPr>
-          <a:lstStyle/>
-          <a:p>
-            <a:pPr algn="l" indent="0" marL="0">
-              <a:lnSpc>
-                <a:spcPts val="1680"/>
-              </a:lnSpc>
-              <a:buNone/>
-            </a:pPr>
-            <a:r>
-              <a:rPr lang="en-US" sz="1200" dirty="0">
-                <a:solidFill>
-                  <a:srgbClr val="46596A"/>
+              <a:t>actor · action</a:t>
+            </a:r>
+            <a:endParaRPr lang="en-US" sz="1400" dirty="0"/>
+          </a:p>
+          <a:p>
+            <a:pPr indent="0" marL="0">
+              <a:lnSpc>
+                <a:spcPts val="2200"/>
+              </a:lnSpc>
+              <a:buNone/>
+            </a:pPr>
+            <a:r>
+              <a:rPr lang="en-US" sz="1400" dirty="0">
+                <a:solidFill>
+                  <a:srgbClr val="FDFEFE"/>
                 </a:solidFill>
                 <a:latin typeface="IBM Plex Sans" pitchFamily="34" charset="0"/>
                 <a:ea typeface="IBM Plex Sans" pitchFamily="34" charset="-122"/>
                 <a:cs typeface="IBM Plex Sans" pitchFamily="34" charset="-120"/>
               </a:rPr>
-              <a:t>decides what to test next and writes the test case</a:t>
-            </a:r>
-            <a:endParaRPr lang="en-US" sz="1200" dirty="0"/>
-          </a:p>
-        </p:txBody>
-      </p:sp>
-      <p:sp>
-        <p:nvSpPr>
-          <p:cNvPr id="10" name="Shape 8"/>
-          <p:cNvSpPr/>
-          <p:nvPr/>
-        </p:nvSpPr>
-        <p:spPr>
-          <a:xfrm>
-            <a:off x="4705350" y="3308350"/>
-            <a:ext cx="2781300" cy="1257300"/>
-          </a:xfrm>
-          <a:prstGeom prst="roundRect">
-            <a:avLst>
-              <a:gd name="adj" fmla="val 7576"/>
-            </a:avLst>
-          </a:prstGeom>
-          <a:solidFill>
-            <a:srgbClr val="FDFEFE"/>
-          </a:solidFill>
-          <a:ln w="12700">
-            <a:solidFill>
-              <a:srgbClr val="0F7EA8"/>
-            </a:solidFill>
-            <a:prstDash val="solid"/>
-          </a:ln>
-        </p:spPr>
-      </p:sp>
-      <p:sp>
-        <p:nvSpPr>
-          <p:cNvPr id="11" name="Text 9"/>
-          <p:cNvSpPr/>
-          <p:nvPr/>
-        </p:nvSpPr>
-        <p:spPr>
-          <a:xfrm>
-            <a:off x="4889500" y="3492500"/>
-            <a:ext cx="2485390" cy="299690"/>
-          </a:xfrm>
-          <a:prstGeom prst="rect">
-            <a:avLst/>
-          </a:prstGeom>
-          <a:noFill/>
-          <a:ln/>
-        </p:spPr>
-        <p:txBody>
-          <a:bodyPr wrap="square" lIns="0" tIns="0" rIns="0" bIns="0" rtlCol="0" anchor="t">
-            <a:normAutofit/>
-          </a:bodyPr>
-          <a:lstStyle/>
-          <a:p>
-            <a:pPr algn="l" indent="0" marL="0">
-              <a:lnSpc>
-                <a:spcPts val="2160"/>
-              </a:lnSpc>
-              <a:buNone/>
-            </a:pPr>
-            <a:r>
-              <a:rPr lang="en-US" sz="1800" b="1" dirty="0">
-                <a:solidFill>
-                  <a:srgbClr val="14303D"/>
+              <a:t>constraints</a:t>
+            </a:r>
+            <a:endParaRPr lang="en-US" sz="1400" dirty="0"/>
+          </a:p>
+          <a:p>
+            <a:pPr indent="0" marL="0">
+              <a:lnSpc>
+                <a:spcPts val="2200"/>
+              </a:lnSpc>
+              <a:buNone/>
+            </a:pPr>
+            <a:r>
+              <a:rPr lang="en-US" sz="1400" dirty="0">
+                <a:solidFill>
+                  <a:srgbClr val="FDFEFE"/>
                 </a:solidFill>
                 <a:latin typeface="IBM Plex Sans" pitchFamily="34" charset="0"/>
                 <a:ea typeface="IBM Plex Sans" pitchFamily="34" charset="-122"/>
                 <a:cs typeface="IBM Plex Sans" pitchFamily="34" charset="-120"/>
               </a:rPr>
-              <a:t>Executor</a:t>
-            </a:r>
-            <a:endParaRPr lang="en-US" sz="1800" dirty="0"/>
-          </a:p>
-        </p:txBody>
-      </p:sp>
-      <p:sp>
-        <p:nvSpPr>
-          <p:cNvPr id="12" name="Text 10"/>
-          <p:cNvSpPr/>
-          <p:nvPr/>
-        </p:nvSpPr>
-        <p:spPr>
-          <a:xfrm>
-            <a:off x="4889500" y="3817590"/>
-            <a:ext cx="2485390" cy="452041"/>
-          </a:xfrm>
-          <a:prstGeom prst="rect">
-            <a:avLst/>
-          </a:prstGeom>
-          <a:noFill/>
-          <a:ln/>
-        </p:spPr>
-        <p:txBody>
-          <a:bodyPr wrap="square" lIns="0" tIns="0" rIns="0" bIns="0" rtlCol="0" anchor="t">
-            <a:normAutofit/>
-          </a:bodyPr>
-          <a:lstStyle/>
-          <a:p>
-            <a:pPr algn="l" indent="0" marL="0">
-              <a:lnSpc>
-                <a:spcPts val="1680"/>
-              </a:lnSpc>
-              <a:buNone/>
-            </a:pPr>
-            <a:r>
-              <a:rPr lang="en-US" sz="1200" dirty="0">
-                <a:solidFill>
-                  <a:srgbClr val="46596A"/>
+              <a:t>acceptance</a:t>
+            </a:r>
+            <a:endParaRPr lang="en-US" sz="1400" dirty="0"/>
+          </a:p>
+          <a:p>
+            <a:pPr indent="0" marL="0">
+              <a:lnSpc>
+                <a:spcPts val="2200"/>
+              </a:lnSpc>
+              <a:buNone/>
+            </a:pPr>
+            <a:r>
+              <a:rPr lang="en-US" sz="1400" dirty="0">
+                <a:solidFill>
+                  <a:srgbClr val="FDFEFE"/>
                 </a:solidFill>
                 <a:latin typeface="IBM Plex Sans" pitchFamily="34" charset="0"/>
                 <a:ea typeface="IBM Plex Sans" pitchFamily="34" charset="-122"/>
                 <a:cs typeface="IBM Plex Sans" pitchFamily="34" charset="-120"/>
               </a:rPr>
-              <a:t>drives the real app on an Android device</a:t>
-            </a:r>
-            <a:endParaRPr lang="en-US" sz="1200" dirty="0"/>
-          </a:p>
-        </p:txBody>
-      </p:sp>
-      <p:sp>
-        <p:nvSpPr>
-          <p:cNvPr id="13" name="Shape 11"/>
-          <p:cNvSpPr/>
-          <p:nvPr/>
-        </p:nvSpPr>
-        <p:spPr>
-          <a:xfrm>
-            <a:off x="8591550" y="3308350"/>
-            <a:ext cx="2781300" cy="1257300"/>
-          </a:xfrm>
-          <a:prstGeom prst="roundRect">
-            <a:avLst>
-              <a:gd name="adj" fmla="val 7576"/>
-            </a:avLst>
-          </a:prstGeom>
-          <a:solidFill>
-            <a:srgbClr val="FDFEFE"/>
-          </a:solidFill>
-          <a:ln w="12700">
-            <a:solidFill>
-              <a:srgbClr val="0F7EA8"/>
-            </a:solidFill>
-            <a:prstDash val="solid"/>
-          </a:ln>
-        </p:spPr>
-      </p:sp>
-      <p:sp>
-        <p:nvSpPr>
-          <p:cNvPr id="14" name="Text 12"/>
-          <p:cNvSpPr/>
-          <p:nvPr/>
-        </p:nvSpPr>
-        <p:spPr>
-          <a:xfrm>
-            <a:off x="8775700" y="3492500"/>
-            <a:ext cx="2485390" cy="299690"/>
-          </a:xfrm>
-          <a:prstGeom prst="rect">
-            <a:avLst/>
-          </a:prstGeom>
-          <a:noFill/>
-          <a:ln/>
-        </p:spPr>
-        <p:txBody>
-          <a:bodyPr wrap="square" lIns="0" tIns="0" rIns="0" bIns="0" rtlCol="0" anchor="t">
-            <a:normAutofit/>
-          </a:bodyPr>
-          <a:lstStyle/>
-          <a:p>
-            <a:pPr algn="l" indent="0" marL="0">
-              <a:lnSpc>
-                <a:spcPts val="2160"/>
-              </a:lnSpc>
-              <a:buNone/>
-            </a:pPr>
-            <a:r>
-              <a:rPr lang="en-US" sz="1800" b="1" dirty="0">
-                <a:solidFill>
-                  <a:srgbClr val="14303D"/>
+              <a:t>feature area</a:t>
+            </a:r>
+            <a:endParaRPr lang="en-US" sz="1400" dirty="0"/>
+          </a:p>
+        </p:txBody>
+      </p:sp>
+      <p:sp>
+        <p:nvSpPr>
+          <p:cNvPr id="10" name="Text 7"/>
+          <p:cNvSpPr txBox="1"/>
+          <p:nvPr/>
+        </p:nvSpPr>
+        <p:spPr>
+          <a:xfrm>
+            <a:off x="8028432" y="4224528"/>
+            <a:ext cx="3108960" cy="640080"/>
+          </a:xfrm>
+          <a:prstGeom prst="rect">
+            <a:avLst/>
+          </a:prstGeom>
+          <a:noFill/>
+          <a:ln/>
+        </p:spPr>
+        <p:txBody>
+          <a:bodyPr wrap="square" lIns="0" tIns="0" rIns="0" bIns="0" rtlCol="0" anchor="ctr"/>
+          <a:lstStyle/>
+          <a:p>
+            <a:pPr indent="0" marL="0">
+              <a:lnSpc>
+                <a:spcPts val="1600"/>
+              </a:lnSpc>
+              <a:buNone/>
+            </a:pPr>
+            <a:r>
+              <a:rPr lang="en-US" sz="1200" dirty="0">
+                <a:solidFill>
+                  <a:srgbClr val="C4D6DE"/>
                 </a:solidFill>
                 <a:latin typeface="IBM Plex Sans" pitchFamily="34" charset="0"/>
                 <a:ea typeface="IBM Plex Sans" pitchFamily="34" charset="-122"/>
                 <a:cs typeface="IBM Plex Sans" pitchFamily="34" charset="-120"/>
               </a:rPr>
-              <a:t>Investigator</a:t>
-            </a:r>
-            <a:endParaRPr lang="en-US" sz="1800" dirty="0"/>
-          </a:p>
-        </p:txBody>
-      </p:sp>
-      <p:sp>
-        <p:nvSpPr>
-          <p:cNvPr id="15" name="Text 13"/>
-          <p:cNvSpPr/>
-          <p:nvPr/>
-        </p:nvSpPr>
-        <p:spPr>
-          <a:xfrm>
-            <a:off x="8775700" y="3817590"/>
-            <a:ext cx="2485390" cy="452041"/>
-          </a:xfrm>
-          <a:prstGeom prst="rect">
-            <a:avLst/>
-          </a:prstGeom>
-          <a:noFill/>
-          <a:ln/>
-        </p:spPr>
-        <p:txBody>
-          <a:bodyPr wrap="square" lIns="0" tIns="0" rIns="0" bIns="0" rtlCol="0" anchor="t">
-            <a:normAutofit/>
-          </a:bodyPr>
-          <a:lstStyle/>
-          <a:p>
-            <a:pPr algn="l" indent="0" marL="0">
-              <a:lnSpc>
-                <a:spcPts val="1680"/>
-              </a:lnSpc>
-              <a:buNone/>
-            </a:pPr>
-            <a:r>
-              <a:rPr lang="en-US" sz="1200" dirty="0">
-                <a:solidFill>
-                  <a:srgbClr val="46596A"/>
+              <a:t>plus validation rules and the domain entities they act on</a:t>
+            </a:r>
+            <a:endParaRPr lang="en-US" sz="1200" dirty="0"/>
+          </a:p>
+        </p:txBody>
+      </p:sp>
+      <p:sp>
+        <p:nvSpPr>
+          <p:cNvPr id="11" name="Text 8"/>
+          <p:cNvSpPr txBox="1"/>
+          <p:nvPr/>
+        </p:nvSpPr>
+        <p:spPr>
+          <a:xfrm>
+            <a:off x="8028432" y="4846320"/>
+            <a:ext cx="3108960" cy="384048"/>
+          </a:xfrm>
+          <a:prstGeom prst="rect">
+            <a:avLst/>
+          </a:prstGeom>
+          <a:noFill/>
+          <a:ln/>
+        </p:spPr>
+        <p:txBody>
+          <a:bodyPr wrap="square" lIns="0" tIns="0" rIns="0" bIns="0" rtlCol="0" anchor="ctr"/>
+          <a:lstStyle/>
+          <a:p>
+            <a:pPr indent="0" marL="0">
+              <a:lnSpc>
+                <a:spcPts val="1500"/>
+              </a:lnSpc>
+              <a:buNone/>
+            </a:pPr>
+            <a:r>
+              <a:rPr lang="en-US" sz="1150" i="1" dirty="0">
+                <a:solidFill>
+                  <a:srgbClr val="7FB3C8"/>
                 </a:solidFill>
                 <a:latin typeface="IBM Plex Sans" pitchFamily="34" charset="0"/>
                 <a:ea typeface="IBM Plex Sans" pitchFamily="34" charset="-122"/>
                 <a:cs typeface="IBM Plex Sans" pitchFamily="34" charset="-120"/>
               </a:rPr>
-              <a:t>decides what each run actually proved</a:t>
-            </a:r>
-            <a:endParaRPr lang="en-US" sz="1200" dirty="0"/>
-          </a:p>
-        </p:txBody>
-      </p:sp>
-      <p:sp>
-        <p:nvSpPr>
-          <p:cNvPr id="16" name="Shape 14"/>
-          <p:cNvSpPr/>
-          <p:nvPr/>
-        </p:nvSpPr>
-        <p:spPr>
-          <a:xfrm>
-            <a:off x="4702175" y="5019675"/>
-            <a:ext cx="2787650" cy="755650"/>
-          </a:xfrm>
-          <a:prstGeom prst="roundRect">
-            <a:avLst>
-              <a:gd name="adj" fmla="val 13025"/>
-            </a:avLst>
-          </a:prstGeom>
-          <a:solidFill>
-            <a:srgbClr val="E8EDEF"/>
-          </a:solidFill>
-          <a:ln w="6350">
-            <a:solidFill>
-              <a:srgbClr val="B8C5CB"/>
-            </a:solidFill>
-            <a:prstDash val="solid"/>
-          </a:ln>
-        </p:spPr>
-      </p:sp>
-      <p:sp>
-        <p:nvSpPr>
-          <p:cNvPr id="17" name="Text 15"/>
-          <p:cNvSpPr/>
-          <p:nvPr/>
-        </p:nvSpPr>
-        <p:spPr>
-          <a:xfrm>
-            <a:off x="4883150" y="5162550"/>
-            <a:ext cx="2498471" cy="256530"/>
-          </a:xfrm>
-          <a:prstGeom prst="rect">
-            <a:avLst/>
-          </a:prstGeom>
-          <a:noFill/>
-          <a:ln/>
-        </p:spPr>
-        <p:txBody>
-          <a:bodyPr wrap="square" lIns="0" tIns="0" rIns="0" bIns="0" rtlCol="0" anchor="t">
-            <a:normAutofit/>
-          </a:bodyPr>
-          <a:lstStyle/>
-          <a:p>
-            <a:pPr algn="l" indent="0" marL="0">
-              <a:lnSpc>
-                <a:spcPts val="1820"/>
-              </a:lnSpc>
-              <a:buNone/>
-            </a:pPr>
-            <a:r>
-              <a:rPr lang="en-US" sz="1400" b="1" dirty="0">
-                <a:solidFill>
-                  <a:srgbClr val="14303D"/>
+              <a:t>All three documents are optional. A target with none of them still runs.</a:t>
+            </a:r>
+            <a:endParaRPr lang="en-US" sz="1150" dirty="0"/>
+          </a:p>
+        </p:txBody>
+      </p:sp>
+      <p:sp>
+        <p:nvSpPr>
+          <p:cNvPr id="12" name="Text 9"/>
+          <p:cNvSpPr txBox="1"/>
+          <p:nvPr/>
+        </p:nvSpPr>
+        <p:spPr>
+          <a:xfrm>
+            <a:off x="813816" y="6236208"/>
+            <a:ext cx="3456432" cy="237744"/>
+          </a:xfrm>
+          <a:prstGeom prst="rect">
+            <a:avLst/>
+          </a:prstGeom>
+          <a:noFill/>
+          <a:ln/>
+        </p:spPr>
+        <p:txBody>
+          <a:bodyPr wrap="square" lIns="0" tIns="0" rIns="0" bIns="0" rtlCol="0" anchor="ctr"/>
+          <a:lstStyle/>
+          <a:p>
+            <a:pPr indent="0" marL="0">
+              <a:buNone/>
+            </a:pPr>
+            <a:r>
+              <a:rPr lang="en-US" sz="1200" dirty="0">
+                <a:solidFill>
+                  <a:srgbClr val="55697A"/>
                 </a:solidFill>
                 <a:latin typeface="IBM Plex Sans" pitchFamily="34" charset="0"/>
                 <a:ea typeface="IBM Plex Sans" pitchFamily="34" charset="-122"/>
                 <a:cs typeface="IBM Plex Sans" pitchFamily="34" charset="-120"/>
               </a:rPr>
-              <a:t>Android device</a:t>
-            </a:r>
-            <a:endParaRPr lang="en-US" sz="1400" dirty="0"/>
-          </a:p>
-        </p:txBody>
-      </p:sp>
-      <p:sp>
-        <p:nvSpPr>
-          <p:cNvPr id="18" name="Text 16"/>
-          <p:cNvSpPr/>
-          <p:nvPr/>
-        </p:nvSpPr>
-        <p:spPr>
-          <a:xfrm>
-            <a:off x="4883150" y="5419080"/>
-            <a:ext cx="2498471" cy="238720"/>
-          </a:xfrm>
-          <a:prstGeom prst="rect">
-            <a:avLst/>
-          </a:prstGeom>
-          <a:noFill/>
-          <a:ln/>
-        </p:spPr>
-        <p:txBody>
-          <a:bodyPr wrap="square" lIns="0" tIns="0" rIns="0" bIns="0" rtlCol="0" anchor="t">
-            <a:normAutofit/>
-          </a:bodyPr>
-          <a:lstStyle/>
-          <a:p>
-            <a:pPr algn="l" indent="0" marL="0">
-              <a:lnSpc>
-                <a:spcPts val="1680"/>
-              </a:lnSpc>
+              <a:t>Exploratory Testing Automation · CSE 450 · BUET</a:t>
+            </a:r>
+            <a:endParaRPr lang="en-US" sz="1200" dirty="0"/>
+          </a:p>
+        </p:txBody>
+      </p:sp>
+      <p:sp>
+        <p:nvSpPr>
+          <p:cNvPr id="13" name="Text 10"/>
+          <p:cNvSpPr txBox="1"/>
+          <p:nvPr/>
+        </p:nvSpPr>
+        <p:spPr>
+          <a:xfrm>
+            <a:off x="11283696" y="6236208"/>
+            <a:ext cx="146304" cy="237744"/>
+          </a:xfrm>
+          <a:prstGeom prst="rect">
+            <a:avLst/>
+          </a:prstGeom>
+          <a:noFill/>
+          <a:ln/>
+        </p:spPr>
+        <p:txBody>
+          <a:bodyPr wrap="square" lIns="0" tIns="0" rIns="0" bIns="0" rtlCol="0" anchor="ctr"/>
+          <a:lstStyle/>
+          <a:p>
+            <a:pPr indent="0" marL="0">
               <a:buNone/>
             </a:pPr>
             <a:r>
               <a:rPr lang="en-US" sz="1200" dirty="0">
                 <a:solidFill>
-                  <a:srgbClr val="46596A"/>
+                  <a:srgbClr val="55697A"/>
                 </a:solidFill>
                 <a:latin typeface="IBM Plex Sans" pitchFamily="34" charset="0"/>
                 <a:ea typeface="IBM Plex Sans" pitchFamily="34" charset="-122"/>
                 <a:cs typeface="IBM Plex Sans" pitchFamily="34" charset="-120"/>
               </a:rPr>
-              <a:t>app under test · on-device portal</a:t>
-            </a:r>
-            <a:endParaRPr lang="en-US" sz="1200" dirty="0"/>
-          </a:p>
-        </p:txBody>
-      </p:sp>
-      <p:sp>
-        <p:nvSpPr>
-          <p:cNvPr id="19" name="Text 17"/>
-          <p:cNvSpPr/>
-          <p:nvPr/>
-        </p:nvSpPr>
-        <p:spPr>
-          <a:xfrm>
-            <a:off x="812800" y="5016500"/>
-            <a:ext cx="2877820" cy="452041"/>
-          </a:xfrm>
-          <a:prstGeom prst="rect">
-            <a:avLst/>
-          </a:prstGeom>
-          <a:noFill/>
-          <a:ln/>
-        </p:spPr>
-        <p:txBody>
-          <a:bodyPr wrap="square" lIns="0" tIns="0" rIns="0" bIns="0" rtlCol="0" anchor="t">
-            <a:normAutofit/>
-          </a:bodyPr>
-          <a:lstStyle/>
-          <a:p>
-            <a:pPr algn="l" indent="0" marL="0">
-              <a:lnSpc>
-                <a:spcPts val="1680"/>
-              </a:lnSpc>
-              <a:buNone/>
-            </a:pPr>
-            <a:r>
-              <a:rPr lang="en-US" sz="1200" dirty="0">
-                <a:solidFill>
-                  <a:srgbClr val="46596A"/>
-                </a:solidFill>
-                <a:latin typeface="IBM Plex Sans" pitchFamily="34" charset="0"/>
-                <a:ea typeface="IBM Plex Sans" pitchFamily="34" charset="-122"/>
-                <a:cs typeface="IBM Plex Sans" pitchFamily="34" charset="-120"/>
-              </a:rPr>
-              <a:t>Stateless: no conversation history. Every call is rebuilt from the graph.</a:t>
-            </a:r>
-            <a:endParaRPr lang="en-US" sz="1200" dirty="0"/>
-          </a:p>
-        </p:txBody>
-      </p:sp>
-      <p:sp>
-        <p:nvSpPr>
-          <p:cNvPr id="20" name="Text 18"/>
-          <p:cNvSpPr/>
-          <p:nvPr/>
-        </p:nvSpPr>
-        <p:spPr>
-          <a:xfrm>
-            <a:off x="8585200" y="5016500"/>
-            <a:ext cx="2877820" cy="452041"/>
-          </a:xfrm>
-          <a:prstGeom prst="rect">
-            <a:avLst/>
-          </a:prstGeom>
-          <a:noFill/>
-          <a:ln/>
-        </p:spPr>
-        <p:txBody>
-          <a:bodyPr wrap="square" lIns="0" tIns="0" rIns="0" bIns="0" rtlCol="0" anchor="t">
-            <a:normAutofit/>
-          </a:bodyPr>
-          <a:lstStyle/>
-          <a:p>
-            <a:pPr algn="l" indent="0" marL="0">
-              <a:lnSpc>
-                <a:spcPts val="1680"/>
-              </a:lnSpc>
-              <a:buNone/>
-            </a:pPr>
-            <a:r>
-              <a:rPr lang="en-US" sz="1200" dirty="0">
-                <a:solidFill>
-                  <a:srgbClr val="46596A"/>
-                </a:solidFill>
-                <a:latin typeface="IBM Plex Sans" pitchFamily="34" charset="0"/>
-                <a:ea typeface="IBM Plex Sans" pitchFamily="34" charset="-122"/>
-                <a:cs typeface="IBM Plex Sans" pitchFamily="34" charset="-120"/>
-              </a:rPr>
-              <a:t>qwen3.7-flash plans and drives; glm-5.3-flash evaluates. All via OpenRouter.</a:t>
-            </a:r>
-            <a:endParaRPr lang="en-US" sz="1200" dirty="0"/>
-          </a:p>
-        </p:txBody>
-      </p:sp>
-      <p:pic>
-        <p:nvPicPr>
-          <p:cNvPr id="21" name="Image 0" descr="connector">    </p:cNvPr>
-          <p:cNvPicPr>
-            <a:picLocks noChangeAspect="1"/>
-          </p:cNvPicPr>
-          <p:nvPr/>
-        </p:nvPicPr>
-        <p:blipFill>
-          <a:blip r:embed="rId1"/>
-          <a:srcRect l="0" r="0" t="0" b="0"/>
-          <a:stretch/>
-        </p:blipFill>
-        <p:spPr>
-          <a:xfrm>
-            <a:off x="2159000" y="2628900"/>
-            <a:ext cx="101600" cy="711200"/>
-          </a:xfrm>
-          <a:prstGeom prst="rect">
-            <a:avLst/>
-          </a:prstGeom>
-        </p:spPr>
-      </p:pic>
-      <p:pic>
-        <p:nvPicPr>
-          <p:cNvPr id="22" name="Image 1" descr="connector">    </p:cNvPr>
-          <p:cNvPicPr>
-            <a:picLocks noChangeAspect="1"/>
-          </p:cNvPicPr>
-          <p:nvPr/>
-        </p:nvPicPr>
-        <p:blipFill>
-          <a:blip r:embed="rId2"/>
-          <a:srcRect l="0" r="0" t="0" b="0"/>
-          <a:stretch/>
-        </p:blipFill>
-        <p:spPr>
-          <a:xfrm>
-            <a:off x="6045200" y="2628900"/>
-            <a:ext cx="101600" cy="711200"/>
-          </a:xfrm>
-          <a:prstGeom prst="rect">
-            <a:avLst/>
-          </a:prstGeom>
-        </p:spPr>
-      </p:pic>
-      <p:pic>
-        <p:nvPicPr>
-          <p:cNvPr id="23" name="Image 2" descr="connector">    </p:cNvPr>
-          <p:cNvPicPr>
-            <a:picLocks noChangeAspect="1"/>
-          </p:cNvPicPr>
-          <p:nvPr/>
-        </p:nvPicPr>
-        <p:blipFill>
-          <a:blip r:embed="rId3"/>
-          <a:srcRect l="0" r="0" t="0" b="0"/>
-          <a:stretch/>
-        </p:blipFill>
-        <p:spPr>
-          <a:xfrm>
-            <a:off x="9931400" y="2628900"/>
-            <a:ext cx="101600" cy="711200"/>
-          </a:xfrm>
-          <a:prstGeom prst="rect">
-            <a:avLst/>
-          </a:prstGeom>
-        </p:spPr>
-      </p:pic>
-      <p:pic>
-        <p:nvPicPr>
-          <p:cNvPr id="24" name="Image 3" descr="connector">    </p:cNvPr>
-          <p:cNvPicPr>
-            <a:picLocks noChangeAspect="1"/>
-          </p:cNvPicPr>
-          <p:nvPr/>
-        </p:nvPicPr>
-        <p:blipFill>
-          <a:blip r:embed="rId4"/>
-          <a:srcRect l="0" r="0" t="0" b="0"/>
-          <a:stretch/>
-        </p:blipFill>
-        <p:spPr>
-          <a:xfrm>
-            <a:off x="3568700" y="3886200"/>
-            <a:ext cx="1168400" cy="101600"/>
-          </a:xfrm>
-          <a:prstGeom prst="rect">
-            <a:avLst/>
-          </a:prstGeom>
-        </p:spPr>
-      </p:pic>
-      <p:pic>
-        <p:nvPicPr>
-          <p:cNvPr id="25" name="Image 4" descr="connector">    </p:cNvPr>
-          <p:cNvPicPr>
-            <a:picLocks noChangeAspect="1"/>
-          </p:cNvPicPr>
-          <p:nvPr/>
-        </p:nvPicPr>
-        <p:blipFill>
-          <a:blip r:embed="rId5"/>
-          <a:srcRect l="0" r="0" t="0" b="0"/>
-          <a:stretch/>
-        </p:blipFill>
-        <p:spPr>
-          <a:xfrm>
-            <a:off x="7454900" y="3886200"/>
-            <a:ext cx="1168400" cy="101600"/>
-          </a:xfrm>
-          <a:prstGeom prst="rect">
-            <a:avLst/>
-          </a:prstGeom>
-        </p:spPr>
-      </p:pic>
-      <p:pic>
-        <p:nvPicPr>
-          <p:cNvPr id="26" name="Image 5" descr="connector">    </p:cNvPr>
-          <p:cNvPicPr>
-            <a:picLocks noChangeAspect="1"/>
-          </p:cNvPicPr>
-          <p:nvPr/>
-        </p:nvPicPr>
-        <p:blipFill>
-          <a:blip r:embed="rId6"/>
-          <a:srcRect l="0" r="0" t="0" b="0"/>
-          <a:stretch/>
-        </p:blipFill>
-        <p:spPr>
-          <a:xfrm>
-            <a:off x="6045200" y="4533900"/>
-            <a:ext cx="101600" cy="520700"/>
-          </a:xfrm>
-          <a:prstGeom prst="rect">
-            <a:avLst/>
-          </a:prstGeom>
-        </p:spPr>
-      </p:pic>
-      <p:sp>
-        <p:nvSpPr>
-          <p:cNvPr id="27" name="Text 19"/>
-          <p:cNvSpPr/>
-          <p:nvPr/>
-        </p:nvSpPr>
-        <p:spPr>
-          <a:xfrm>
-            <a:off x="2311400" y="2870200"/>
-            <a:ext cx="1066800" cy="238720"/>
-          </a:xfrm>
-          <a:prstGeom prst="rect">
-            <a:avLst/>
-          </a:prstGeom>
-          <a:noFill/>
-          <a:ln/>
-        </p:spPr>
-        <p:txBody>
-          <a:bodyPr wrap="square" lIns="0" tIns="0" rIns="0" bIns="0" rtlCol="0" anchor="t">
-            <a:normAutofit/>
-          </a:bodyPr>
-          <a:lstStyle/>
-          <a:p>
-            <a:pPr algn="l" indent="0" marL="0">
-              <a:lnSpc>
-                <a:spcPts val="1680"/>
-              </a:lnSpc>
-              <a:buNone/>
-            </a:pPr>
-            <a:r>
-              <a:rPr lang="en-US" sz="1200" dirty="0">
-                <a:solidFill>
-                  <a:srgbClr val="0B6A8F"/>
-                </a:solidFill>
-                <a:latin typeface="IBM Plex Sans" pitchFamily="34" charset="0"/>
-                <a:ea typeface="IBM Plex Sans" pitchFamily="34" charset="-122"/>
-                <a:cs typeface="IBM Plex Sans" pitchFamily="34" charset="-120"/>
-              </a:rPr>
-              <a:t>reads</a:t>
-            </a:r>
-            <a:endParaRPr lang="en-US" sz="1200" dirty="0"/>
-          </a:p>
-        </p:txBody>
-      </p:sp>
-      <p:sp>
-        <p:nvSpPr>
-          <p:cNvPr id="28" name="Text 20"/>
-          <p:cNvSpPr/>
-          <p:nvPr/>
-        </p:nvSpPr>
-        <p:spPr>
-          <a:xfrm>
-            <a:off x="6197600" y="2870200"/>
-            <a:ext cx="2092960" cy="238720"/>
-          </a:xfrm>
-          <a:prstGeom prst="rect">
-            <a:avLst/>
-          </a:prstGeom>
-          <a:noFill/>
-          <a:ln/>
-        </p:spPr>
-        <p:txBody>
-          <a:bodyPr wrap="square" lIns="0" tIns="0" rIns="0" bIns="0" rtlCol="0" anchor="t">
-            <a:normAutofit/>
-          </a:bodyPr>
-          <a:lstStyle/>
-          <a:p>
-            <a:pPr algn="l" indent="0" marL="0">
-              <a:lnSpc>
-                <a:spcPts val="1680"/>
-              </a:lnSpc>
-              <a:buNone/>
-            </a:pPr>
-            <a:r>
-              <a:rPr lang="en-US" sz="1200" dirty="0">
-                <a:solidFill>
-                  <a:srgbClr val="0B6A8F"/>
-                </a:solidFill>
-                <a:latin typeface="IBM Plex Sans" pitchFamily="34" charset="0"/>
-                <a:ea typeface="IBM Plex Sans" pitchFamily="34" charset="-122"/>
-                <a:cs typeface="IBM Plex Sans" pitchFamily="34" charset="-120"/>
-              </a:rPr>
-              <a:t>writes screens seen</a:t>
-            </a:r>
-            <a:endParaRPr lang="en-US" sz="1200" dirty="0"/>
-          </a:p>
-        </p:txBody>
-      </p:sp>
-      <p:sp>
-        <p:nvSpPr>
-          <p:cNvPr id="29" name="Text 21"/>
-          <p:cNvSpPr/>
-          <p:nvPr/>
-        </p:nvSpPr>
-        <p:spPr>
-          <a:xfrm>
-            <a:off x="10083800" y="2870200"/>
-            <a:ext cx="1320800" cy="238720"/>
-          </a:xfrm>
-          <a:prstGeom prst="rect">
-            <a:avLst/>
-          </a:prstGeom>
-          <a:noFill/>
-          <a:ln/>
-        </p:spPr>
-        <p:txBody>
-          <a:bodyPr wrap="square" lIns="0" tIns="0" rIns="0" bIns="0" rtlCol="0" anchor="t">
-            <a:normAutofit/>
-          </a:bodyPr>
-          <a:lstStyle/>
-          <a:p>
-            <a:pPr algn="l" indent="0" marL="0">
-              <a:lnSpc>
-                <a:spcPts val="1680"/>
-              </a:lnSpc>
-              <a:buNone/>
-            </a:pPr>
-            <a:r>
-              <a:rPr lang="en-US" sz="1200" dirty="0">
-                <a:solidFill>
-                  <a:srgbClr val="0B6A8F"/>
-                </a:solidFill>
-                <a:latin typeface="IBM Plex Sans" pitchFamily="34" charset="0"/>
-                <a:ea typeface="IBM Plex Sans" pitchFamily="34" charset="-122"/>
-                <a:cs typeface="IBM Plex Sans" pitchFamily="34" charset="-120"/>
-              </a:rPr>
-              <a:t>writes findings</a:t>
-            </a:r>
-            <a:endParaRPr lang="en-US" sz="1200" dirty="0"/>
-          </a:p>
-        </p:txBody>
-      </p:sp>
-      <p:sp>
-        <p:nvSpPr>
-          <p:cNvPr id="30" name="Text 22"/>
-          <p:cNvSpPr/>
-          <p:nvPr/>
-        </p:nvSpPr>
-        <p:spPr>
-          <a:xfrm>
-            <a:off x="3594100" y="3606800"/>
-            <a:ext cx="1117600" cy="238720"/>
-          </a:xfrm>
-          <a:prstGeom prst="rect">
-            <a:avLst/>
-          </a:prstGeom>
-          <a:noFill/>
-          <a:ln/>
-        </p:spPr>
-        <p:txBody>
-          <a:bodyPr wrap="square" lIns="0" tIns="0" rIns="0" bIns="0" rtlCol="0" anchor="t">
-            <a:normAutofit/>
-          </a:bodyPr>
-          <a:lstStyle/>
-          <a:p>
-            <a:pPr algn="ctr" indent="0" marL="0">
-              <a:lnSpc>
-                <a:spcPts val="1680"/>
-              </a:lnSpc>
-              <a:buNone/>
-            </a:pPr>
-            <a:r>
-              <a:rPr lang="en-US" sz="1200" dirty="0">
-                <a:solidFill>
-                  <a:srgbClr val="0B6A8F"/>
-                </a:solidFill>
-                <a:latin typeface="IBM Plex Sans" pitchFamily="34" charset="0"/>
-                <a:ea typeface="IBM Plex Sans" pitchFamily="34" charset="-122"/>
-                <a:cs typeface="IBM Plex Sans" pitchFamily="34" charset="-120"/>
-              </a:rPr>
-              <a:t>test case</a:t>
-            </a:r>
-            <a:endParaRPr lang="en-US" sz="1200" dirty="0"/>
-          </a:p>
-        </p:txBody>
-      </p:sp>
-      <p:sp>
-        <p:nvSpPr>
-          <p:cNvPr id="31" name="Text 23"/>
-          <p:cNvSpPr/>
-          <p:nvPr/>
-        </p:nvSpPr>
-        <p:spPr>
-          <a:xfrm>
-            <a:off x="7480300" y="3606800"/>
-            <a:ext cx="1117600" cy="238720"/>
-          </a:xfrm>
-          <a:prstGeom prst="rect">
-            <a:avLst/>
-          </a:prstGeom>
-          <a:noFill/>
-          <a:ln/>
-        </p:spPr>
-        <p:txBody>
-          <a:bodyPr wrap="square" lIns="0" tIns="0" rIns="0" bIns="0" rtlCol="0" anchor="t">
-            <a:normAutofit/>
-          </a:bodyPr>
-          <a:lstStyle/>
-          <a:p>
-            <a:pPr algn="ctr" indent="0" marL="0">
-              <a:lnSpc>
-                <a:spcPts val="1680"/>
-              </a:lnSpc>
-              <a:buNone/>
-            </a:pPr>
-            <a:r>
-              <a:rPr lang="en-US" sz="1200" dirty="0">
-                <a:solidFill>
-                  <a:srgbClr val="0B6A8F"/>
-                </a:solidFill>
-                <a:latin typeface="IBM Plex Sans" pitchFamily="34" charset="0"/>
-                <a:ea typeface="IBM Plex Sans" pitchFamily="34" charset="-122"/>
-                <a:cs typeface="IBM Plex Sans" pitchFamily="34" charset="-120"/>
-              </a:rPr>
-              <a:t>trajectory</a:t>
-            </a:r>
-            <a:endParaRPr lang="en-US" sz="1200" dirty="0"/>
-          </a:p>
-        </p:txBody>
-      </p:sp>
-      <p:sp>
-        <p:nvSpPr>
-          <p:cNvPr id="32" name="Text 24"/>
-          <p:cNvSpPr/>
-          <p:nvPr/>
-        </p:nvSpPr>
-        <p:spPr>
-          <a:xfrm>
-            <a:off x="812800" y="6238280"/>
-            <a:ext cx="3459976" cy="238720"/>
-          </a:xfrm>
-          <a:prstGeom prst="rect">
-            <a:avLst/>
-          </a:prstGeom>
-          <a:noFill/>
-          <a:ln/>
-        </p:spPr>
-        <p:txBody>
-          <a:bodyPr wrap="square" lIns="0" tIns="0" rIns="0" bIns="0" rtlCol="0" anchor="t">
-            <a:normAutofit/>
-          </a:bodyPr>
-          <a:lstStyle/>
-          <a:p>
-            <a:pPr algn="l" indent="0" marL="0">
-              <a:lnSpc>
-                <a:spcPts val="1680"/>
-              </a:lnSpc>
-              <a:buNone/>
-            </a:pPr>
-            <a:r>
-              <a:rPr lang="en-US" sz="1200" dirty="0">
-                <a:solidFill>
-                  <a:srgbClr val="55697A"/>
-                </a:solidFill>
-                <a:latin typeface="IBM Plex Sans" pitchFamily="34" charset="0"/>
-                <a:ea typeface="IBM Plex Sans" pitchFamily="34" charset="-122"/>
-                <a:cs typeface="IBM Plex Sans" pitchFamily="34" charset="-120"/>
-              </a:rPr>
-              <a:t>Exploratory Testing Automation · CSE 450 · BUET</a:t>
-            </a:r>
-            <a:endParaRPr lang="en-US" sz="1200" dirty="0"/>
-          </a:p>
-        </p:txBody>
-      </p:sp>
-      <p:sp>
-        <p:nvSpPr>
-          <p:cNvPr id="33" name="Text 25"/>
-          <p:cNvSpPr/>
-          <p:nvPr/>
-        </p:nvSpPr>
-        <p:spPr>
-          <a:xfrm>
-            <a:off x="11287720" y="6238280"/>
-            <a:ext cx="142280" cy="238720"/>
-          </a:xfrm>
-          <a:prstGeom prst="rect">
-            <a:avLst/>
-          </a:prstGeom>
-          <a:noFill/>
-          <a:ln/>
-        </p:spPr>
-        <p:txBody>
-          <a:bodyPr wrap="square" lIns="0" tIns="0" rIns="0" bIns="0" rtlCol="0" anchor="t">
-            <a:normAutofit/>
-          </a:bodyPr>
-          <a:lstStyle/>
-          <a:p>
-            <a:pPr algn="l" indent="0" marL="0">
-              <a:lnSpc>
-                <a:spcPts val="1680"/>
-              </a:lnSpc>
-              <a:buNone/>
-            </a:pPr>
-            <a:r>
-              <a:rPr lang="en-US" sz="1200" dirty="0">
-                <a:solidFill>
-                  <a:srgbClr val="55697A"/>
-                </a:solidFill>
-                <a:latin typeface="IBM Plex Sans" pitchFamily="34" charset="0"/>
-                <a:ea typeface="IBM Plex Sans" pitchFamily="34" charset="-122"/>
-                <a:cs typeface="IBM Plex Sans" pitchFamily="34" charset="-120"/>
-              </a:rPr>
-              <a:t>5</a:t>
+              <a:t>6</a:t>
             </a:r>
             <a:endParaRPr lang="en-US" sz="1200" dirty="0"/>
           </a:p>
@@ -7225,7 +8063,7 @@
 </p:sld>
 </file>
 
-<file path=ppt/slides/slide6.xml><?xml version="1.0" encoding="utf-8"?>
+<file path=ppt/slides/slide7.xml><?xml version="1.0" encoding="utf-8"?>
 <p:sld xmlns:a="http://schemas.openxmlformats.org/drawingml/2006/main" xmlns:r="http://schemas.openxmlformats.org/officeDocument/2006/relationships" xmlns:p="http://schemas.openxmlformats.org/presentationml/2006/main">
   <p:cSld name="Slide 6">
     <p:bg>
@@ -7233,6 +8071,7 @@
         <a:solidFill>
           <a:srgbClr val="EDF2F4"/>
         </a:solidFill>
+        <a:effectLst/>
       </p:bgPr>
     </p:bg>
     <p:spTree>
@@ -7272,14 +8111,14 @@
           </a:bodyPr>
           <a:lstStyle/>
           <a:p>
-            <a:pPr algn="l" indent="0" marL="0">
+            <a:pPr marL="0" indent="0" algn="l">
               <a:lnSpc>
                 <a:spcPts val="1675"/>
               </a:lnSpc>
               <a:buNone/>
             </a:pPr>
             <a:r>
-              <a:rPr lang="en-US" sz="1196" b="1" spc="100" kern="0" dirty="0">
+              <a:rPr lang="en-US" sz="1196" b="1" kern="0" spc="100" dirty="0">
                 <a:solidFill>
                   <a:srgbClr val="0B6A8F"/>
                 </a:solidFill>
@@ -7316,7 +8155,7 @@
           </a:bodyPr>
           <a:lstStyle/>
           <a:p>
-            <a:pPr algn="l" indent="0" marL="0">
+            <a:pPr marL="0" indent="0" algn="l">
               <a:lnSpc>
                 <a:spcPts val="3300"/>
               </a:lnSpc>
@@ -7358,17 +8197,24 @@
           </a:solidFill>
           <a:ln/>
         </p:spPr>
+        <p:txBody>
+          <a:bodyPr/>
+          <a:lstStyle/>
+          <a:p>
+            <a:endParaRPr lang="en-US"/>
+          </a:p>
+        </p:txBody>
       </p:sp>
       <p:pic>
         <p:nvPicPr>
-          <p:cNvPr id="5" name="Image 0" descr="Full system architecture: inputs (SRS, Figma, defect history) feed the RAG API and Neo4j knowledge graph; the gateway hosts the planner and investigator; the executor drives the device through the on-device portal; all agents call OpenRouter models">    </p:cNvPr>
+          <p:cNvPr id="5" name="Image 0" descr="Full system architecture: inputs (SRS, Figma, defect history) feed the RAG API and Neo4j knowledge graph; the gateway hosts the planner and investigator; the executor drives the device through the on-device portal; all agents call OpenRouter models"/>
           <p:cNvPicPr>
             <a:picLocks noChangeAspect="1"/>
           </p:cNvPicPr>
           <p:nvPr/>
         </p:nvPicPr>
         <p:blipFill>
-          <a:blip r:embed="rId1"/>
+          <a:blip r:embed="rId3"/>
           <a:stretch>
             <a:fillRect/>
           </a:stretch>
@@ -7407,6 +8253,13 @@
             <a:prstDash val="solid"/>
           </a:ln>
         </p:spPr>
+        <p:txBody>
+          <a:bodyPr/>
+          <a:lstStyle/>
+          <a:p>
+            <a:endParaRPr lang="en-US"/>
+          </a:p>
+        </p:txBody>
       </p:sp>
       <p:sp>
         <p:nvSpPr>
@@ -7431,7 +8284,7 @@
           </a:bodyPr>
           <a:lstStyle/>
           <a:p>
-            <a:pPr algn="l" indent="0" marL="0">
+            <a:pPr marL="0" indent="0" algn="l">
               <a:lnSpc>
                 <a:spcPts val="1680"/>
               </a:lnSpc>
@@ -7475,7 +8328,7 @@
           </a:bodyPr>
           <a:lstStyle/>
           <a:p>
-            <a:pPr algn="l" indent="0" marL="0">
+            <a:pPr marL="0" indent="0" algn="l">
               <a:lnSpc>
                 <a:spcPts val="1680"/>
               </a:lnSpc>
@@ -7490,7 +8343,7 @@
                 <a:ea typeface="IBM Plex Sans" pitchFamily="34" charset="-122"/>
                 <a:cs typeface="IBM Plex Sans" pitchFamily="34" charset="-120"/>
               </a:rPr>
-              <a:t>6</a:t>
+              <a:t>7</a:t>
             </a:r>
             <a:endParaRPr lang="en-US" sz="1200" dirty="0"/>
           </a:p>
@@ -7504,7 +8357,7 @@
 </p:sld>
 </file>
 
-<file path=ppt/slides/slide7.xml><?xml version="1.0" encoding="utf-8"?>
+<file path=ppt/slides/slide8.xml><?xml version="1.0" encoding="utf-8"?>
 <p:sld xmlns:a="http://schemas.openxmlformats.org/drawingml/2006/main" xmlns:r="http://schemas.openxmlformats.org/officeDocument/2006/relationships" xmlns:p="http://schemas.openxmlformats.org/presentationml/2006/main">
   <p:cSld name="Slide 7">
     <p:bg>
@@ -7512,6 +8365,7 @@
         <a:solidFill>
           <a:srgbClr val="F6F8F7"/>
         </a:solidFill>
+        <a:effectLst/>
       </p:bgPr>
     </p:bg>
     <p:spTree>
@@ -7551,14 +8405,14 @@
           </a:bodyPr>
           <a:lstStyle/>
           <a:p>
-            <a:pPr algn="l" indent="0" marL="0">
+            <a:pPr marL="0" indent="0" algn="l">
               <a:lnSpc>
                 <a:spcPts val="1680"/>
               </a:lnSpc>
               <a:buNone/>
             </a:pPr>
             <a:r>
-              <a:rPr lang="en-US" sz="1200" b="1" spc="100" kern="0" dirty="0">
+              <a:rPr lang="en-US" sz="1200" b="1" kern="0" spc="100" dirty="0">
                 <a:solidFill>
                   <a:srgbClr val="0B6A8F"/>
                 </a:solidFill>
@@ -7595,7 +8449,7 @@
           </a:bodyPr>
           <a:lstStyle/>
           <a:p>
-            <a:pPr algn="l" indent="0" marL="0">
+            <a:pPr marL="0" indent="0" algn="l">
               <a:lnSpc>
                 <a:spcPts val="3300"/>
               </a:lnSpc>
@@ -7642,6 +8496,13 @@
             <a:prstDash val="solid"/>
           </a:ln>
         </p:spPr>
+        <p:txBody>
+          <a:bodyPr/>
+          <a:lstStyle/>
+          <a:p>
+            <a:endParaRPr lang="en-US"/>
+          </a:p>
+        </p:txBody>
       </p:sp>
       <p:sp>
         <p:nvSpPr>
@@ -7664,6 +8525,13 @@
           </a:solidFill>
           <a:ln/>
         </p:spPr>
+        <p:txBody>
+          <a:bodyPr/>
+          <a:lstStyle/>
+          <a:p>
+            <a:endParaRPr lang="en-US"/>
+          </a:p>
+        </p:txBody>
       </p:sp>
       <p:sp>
         <p:nvSpPr>
@@ -7688,7 +8556,7 @@
           </a:bodyPr>
           <a:lstStyle/>
           <a:p>
-            <a:pPr algn="l" indent="0" marL="0">
+            <a:pPr marL="0" indent="0" algn="l">
               <a:lnSpc>
                 <a:spcPts val="1680"/>
               </a:lnSpc>
@@ -7732,7 +8600,7 @@
           </a:bodyPr>
           <a:lstStyle/>
           <a:p>
-            <a:pPr algn="l" indent="0" marL="0">
+            <a:pPr marL="0" indent="0" algn="l">
               <a:lnSpc>
                 <a:spcPts val="2160"/>
               </a:lnSpc>
@@ -7776,7 +8644,7 @@
           </a:bodyPr>
           <a:lstStyle/>
           <a:p>
-            <a:pPr algn="l" indent="0" marL="0">
+            <a:pPr marL="0" indent="0" algn="l">
               <a:lnSpc>
                 <a:spcPts val="1680"/>
               </a:lnSpc>
@@ -7820,7 +8688,7 @@
           </a:bodyPr>
           <a:lstStyle/>
           <a:p>
-            <a:pPr algn="l" indent="0" marL="0">
+            <a:pPr marL="0" indent="0" algn="l">
               <a:lnSpc>
                 <a:spcPts val="1680"/>
               </a:lnSpc>
@@ -7867,6 +8735,13 @@
             <a:prstDash val="solid"/>
           </a:ln>
         </p:spPr>
+        <p:txBody>
+          <a:bodyPr/>
+          <a:lstStyle/>
+          <a:p>
+            <a:endParaRPr lang="en-US"/>
+          </a:p>
+        </p:txBody>
       </p:sp>
       <p:sp>
         <p:nvSpPr>
@@ -7889,6 +8764,13 @@
           </a:solidFill>
           <a:ln/>
         </p:spPr>
+        <p:txBody>
+          <a:bodyPr/>
+          <a:lstStyle/>
+          <a:p>
+            <a:endParaRPr lang="en-US"/>
+          </a:p>
+        </p:txBody>
       </p:sp>
       <p:sp>
         <p:nvSpPr>
@@ -7913,7 +8795,7 @@
           </a:bodyPr>
           <a:lstStyle/>
           <a:p>
-            <a:pPr algn="l" indent="0" marL="0">
+            <a:pPr marL="0" indent="0" algn="l">
               <a:lnSpc>
                 <a:spcPts val="1680"/>
               </a:lnSpc>
@@ -7957,7 +8839,7 @@
           </a:bodyPr>
           <a:lstStyle/>
           <a:p>
-            <a:pPr algn="l" indent="0" marL="0">
+            <a:pPr marL="0" indent="0" algn="l">
               <a:lnSpc>
                 <a:spcPts val="2160"/>
               </a:lnSpc>
@@ -8001,7 +8883,7 @@
           </a:bodyPr>
           <a:lstStyle/>
           <a:p>
-            <a:pPr algn="l" indent="0" marL="0">
+            <a:pPr marL="0" indent="0" algn="l">
               <a:lnSpc>
                 <a:spcPts val="1680"/>
               </a:lnSpc>
@@ -8045,7 +8927,7 @@
           </a:bodyPr>
           <a:lstStyle/>
           <a:p>
-            <a:pPr algn="l" indent="0" marL="0">
+            <a:pPr marL="0" indent="0" algn="l">
               <a:lnSpc>
                 <a:spcPts val="1680"/>
               </a:lnSpc>
@@ -8092,6 +8974,13 @@
             <a:prstDash val="solid"/>
           </a:ln>
         </p:spPr>
+        <p:txBody>
+          <a:bodyPr/>
+          <a:lstStyle/>
+          <a:p>
+            <a:endParaRPr lang="en-US"/>
+          </a:p>
+        </p:txBody>
       </p:sp>
       <p:sp>
         <p:nvSpPr>
@@ -8114,6 +9003,13 @@
           </a:solidFill>
           <a:ln/>
         </p:spPr>
+        <p:txBody>
+          <a:bodyPr/>
+          <a:lstStyle/>
+          <a:p>
+            <a:endParaRPr lang="en-US"/>
+          </a:p>
+        </p:txBody>
       </p:sp>
       <p:sp>
         <p:nvSpPr>
@@ -8138,7 +9034,7 @@
           </a:bodyPr>
           <a:lstStyle/>
           <a:p>
-            <a:pPr algn="l" indent="0" marL="0">
+            <a:pPr marL="0" indent="0" algn="l">
               <a:lnSpc>
                 <a:spcPts val="1680"/>
               </a:lnSpc>
@@ -8182,7 +9078,7 @@
           </a:bodyPr>
           <a:lstStyle/>
           <a:p>
-            <a:pPr algn="l" indent="0" marL="0">
+            <a:pPr marL="0" indent="0" algn="l">
               <a:lnSpc>
                 <a:spcPts val="2160"/>
               </a:lnSpc>
@@ -8226,7 +9122,7 @@
           </a:bodyPr>
           <a:lstStyle/>
           <a:p>
-            <a:pPr algn="l" indent="0" marL="0">
+            <a:pPr marL="0" indent="0" algn="l">
               <a:lnSpc>
                 <a:spcPts val="1680"/>
               </a:lnSpc>
@@ -8270,7 +9166,7 @@
           </a:bodyPr>
           <a:lstStyle/>
           <a:p>
-            <a:pPr algn="l" indent="0" marL="0">
+            <a:pPr marL="0" indent="0" algn="l">
               <a:lnSpc>
                 <a:spcPts val="1680"/>
               </a:lnSpc>
@@ -8317,6 +9213,13 @@
             <a:prstDash val="solid"/>
           </a:ln>
         </p:spPr>
+        <p:txBody>
+          <a:bodyPr/>
+          <a:lstStyle/>
+          <a:p>
+            <a:endParaRPr lang="en-US"/>
+          </a:p>
+        </p:txBody>
       </p:sp>
       <p:sp>
         <p:nvSpPr>
@@ -8339,6 +9242,13 @@
           </a:solidFill>
           <a:ln/>
         </p:spPr>
+        <p:txBody>
+          <a:bodyPr/>
+          <a:lstStyle/>
+          <a:p>
+            <a:endParaRPr lang="en-US"/>
+          </a:p>
+        </p:txBody>
       </p:sp>
       <p:sp>
         <p:nvSpPr>
@@ -8363,7 +9273,7 @@
           </a:bodyPr>
           <a:lstStyle/>
           <a:p>
-            <a:pPr algn="l" indent="0" marL="0">
+            <a:pPr marL="0" indent="0" algn="l">
               <a:lnSpc>
                 <a:spcPts val="1680"/>
               </a:lnSpc>
@@ -8407,7 +9317,7 @@
           </a:bodyPr>
           <a:lstStyle/>
           <a:p>
-            <a:pPr algn="l" indent="0" marL="0">
+            <a:pPr marL="0" indent="0" algn="l">
               <a:lnSpc>
                 <a:spcPts val="2160"/>
               </a:lnSpc>
@@ -8451,7 +9361,7 @@
           </a:bodyPr>
           <a:lstStyle/>
           <a:p>
-            <a:pPr algn="l" indent="0" marL="0">
+            <a:pPr marL="0" indent="0" algn="l">
               <a:lnSpc>
                 <a:spcPts val="1680"/>
               </a:lnSpc>
@@ -8495,7 +9405,7 @@
           </a:bodyPr>
           <a:lstStyle/>
           <a:p>
-            <a:pPr algn="l" indent="0" marL="0">
+            <a:pPr marL="0" indent="0" algn="l">
               <a:lnSpc>
                 <a:spcPts val="1680"/>
               </a:lnSpc>
@@ -8518,15 +9428,15 @@
       </p:sp>
       <p:pic>
         <p:nvPicPr>
-          <p:cNvPr id="28" name="Image 0" descr="connector">    </p:cNvPr>
+          <p:cNvPr id="28" name="Image 0" descr="connector"/>
           <p:cNvPicPr>
             <a:picLocks noChangeAspect="1"/>
           </p:cNvPicPr>
           <p:nvPr/>
         </p:nvPicPr>
         <p:blipFill>
-          <a:blip r:embed="rId1"/>
-          <a:srcRect l="0" r="0" t="0" b="0"/>
+          <a:blip r:embed="rId3"/>
+          <a:srcRect/>
           <a:stretch/>
         </p:blipFill>
         <p:spPr>
@@ -8541,15 +9451,15 @@
       </p:pic>
       <p:pic>
         <p:nvPicPr>
-          <p:cNvPr id="29" name="Image 1" descr="connector">    </p:cNvPr>
+          <p:cNvPr id="29" name="Image 1" descr="connector"/>
           <p:cNvPicPr>
             <a:picLocks noChangeAspect="1"/>
           </p:cNvPicPr>
           <p:nvPr/>
         </p:nvPicPr>
         <p:blipFill>
-          <a:blip r:embed="rId2"/>
-          <a:srcRect l="0" r="0" t="0" b="0"/>
+          <a:blip r:embed="rId3"/>
+          <a:srcRect/>
           <a:stretch/>
         </p:blipFill>
         <p:spPr>
@@ -8564,7 +9474,7 @@
       </p:pic>
       <p:pic>
         <p:nvPicPr>
-          <p:cNvPr id="30" name="Image 2" descr="connector">    </p:cNvPr>
+          <p:cNvPr id="30" name="Image 2" descr="connector"/>
           <p:cNvPicPr>
             <a:picLocks noChangeAspect="1"/>
           </p:cNvPicPr>
@@ -8572,7 +9482,7 @@
         </p:nvPicPr>
         <p:blipFill>
           <a:blip r:embed="rId3"/>
-          <a:srcRect l="0" r="0" t="0" b="0"/>
+          <a:srcRect/>
           <a:stretch/>
         </p:blipFill>
         <p:spPr>
@@ -8587,7 +9497,7 @@
       </p:pic>
       <p:pic>
         <p:nvPicPr>
-          <p:cNvPr id="31" name="Image 3" descr="connector">    </p:cNvPr>
+          <p:cNvPr id="31" name="Image 3" descr="connector"/>
           <p:cNvPicPr>
             <a:picLocks noChangeAspect="1"/>
           </p:cNvPicPr>
@@ -8595,7 +9505,7 @@
         </p:nvPicPr>
         <p:blipFill>
           <a:blip r:embed="rId4"/>
-          <a:srcRect l="0" r="0" t="0" b="0"/>
+          <a:srcRect/>
           <a:stretch/>
         </p:blipFill>
         <p:spPr>
@@ -8610,7 +9520,7 @@
       </p:pic>
       <p:pic>
         <p:nvPicPr>
-          <p:cNvPr id="32" name="Image 4" descr="connector">    </p:cNvPr>
+          <p:cNvPr id="32" name="Image 4" descr="connector"/>
           <p:cNvPicPr>
             <a:picLocks noChangeAspect="1"/>
           </p:cNvPicPr>
@@ -8618,7 +9528,7 @@
         </p:nvPicPr>
         <p:blipFill>
           <a:blip r:embed="rId5"/>
-          <a:srcRect l="0" r="0" t="0" b="0"/>
+          <a:srcRect/>
           <a:stretch/>
         </p:blipFill>
         <p:spPr>
@@ -8654,7 +9564,7 @@
           </a:bodyPr>
           <a:lstStyle/>
           <a:p>
-            <a:pPr algn="ctr" indent="0" marL="0">
+            <a:pPr marL="0" indent="0" algn="ctr">
               <a:lnSpc>
                 <a:spcPts val="1680"/>
               </a:lnSpc>
@@ -8698,7 +9608,7 @@
           </a:bodyPr>
           <a:lstStyle/>
           <a:p>
-            <a:pPr algn="l" indent="0" marL="0">
+            <a:pPr marL="0" indent="0" algn="l">
               <a:lnSpc>
                 <a:spcPts val="1820"/>
               </a:lnSpc>
@@ -8742,7 +9652,7 @@
           </a:bodyPr>
           <a:lstStyle/>
           <a:p>
-            <a:pPr algn="l" indent="0" marL="0">
+            <a:pPr marL="0" indent="0" algn="l">
               <a:lnSpc>
                 <a:spcPts val="1680"/>
               </a:lnSpc>
@@ -8786,7 +9696,7 @@
           </a:bodyPr>
           <a:lstStyle/>
           <a:p>
-            <a:pPr algn="l" indent="0" marL="0">
+            <a:pPr marL="0" indent="0" algn="l">
               <a:lnSpc>
                 <a:spcPts val="1680"/>
               </a:lnSpc>
@@ -8801,7 +9711,7 @@
                 <a:ea typeface="IBM Plex Sans" pitchFamily="34" charset="-122"/>
                 <a:cs typeface="IBM Plex Sans" pitchFamily="34" charset="-120"/>
               </a:rPr>
-              <a:t>7</a:t>
+              <a:t>8</a:t>
             </a:r>
             <a:endParaRPr lang="en-US" sz="1200" dirty="0"/>
           </a:p>
@@ -8815,7 +9725,7 @@
 </p:sld>
 </file>
 
-<file path=ppt/slides/slide8.xml><?xml version="1.0" encoding="utf-8"?>
+<file path=ppt/slides/slide9.xml><?xml version="1.0" encoding="utf-8"?>
 <p:sld xmlns:a="http://schemas.openxmlformats.org/drawingml/2006/main" xmlns:r="http://schemas.openxmlformats.org/officeDocument/2006/relationships" xmlns:p="http://schemas.openxmlformats.org/presentationml/2006/main">
   <p:cSld name="Slide 8">
     <p:bg>
@@ -8823,6 +9733,7 @@
         <a:solidFill>
           <a:srgbClr val="EDF2F4"/>
         </a:solidFill>
+        <a:effectLst/>
       </p:bgPr>
     </p:bg>
     <p:spTree>
@@ -8862,7 +9773,7 @@
           </a:bodyPr>
           <a:lstStyle/>
           <a:p>
-            <a:pPr algn="l" indent="0" marL="0">
+            <a:pPr marL="0" indent="0" algn="l">
               <a:lnSpc>
                 <a:spcPts val="1680"/>
               </a:lnSpc>
@@ -8877,7 +9788,7 @@
                 <a:ea typeface="IBM Plex Sans" pitchFamily="34" charset="-122"/>
                 <a:cs typeface="IBM Plex Sans" pitchFamily="34" charset="-120"/>
               </a:rPr>
-              <a:t>8</a:t>
+              <a:t>9</a:t>
             </a:r>
             <a:endParaRPr lang="en-US" sz="1200" dirty="0"/>
           </a:p>
@@ -8906,7 +9817,7 @@
           </a:bodyPr>
           <a:lstStyle/>
           <a:p>
-            <a:pPr algn="l" indent="0" marL="0">
+            <a:pPr marL="0" indent="0" algn="l">
               <a:lnSpc>
                 <a:spcPts val="3300"/>
               </a:lnSpc>
@@ -8950,7 +9861,7 @@
           </a:bodyPr>
           <a:lstStyle/>
           <a:p>
-            <a:pPr algn="l" indent="0" marL="0">
+            <a:pPr marL="0" indent="0" algn="l">
               <a:lnSpc>
                 <a:spcPts val="1960"/>
               </a:lnSpc>
@@ -8994,7 +9905,7 @@
           </a:bodyPr>
           <a:lstStyle/>
           <a:p>
-            <a:pPr algn="l" indent="0" marL="0">
+            <a:pPr marL="0" indent="0" algn="l">
               <a:lnSpc>
                 <a:spcPts val="1680"/>
               </a:lnSpc>
@@ -9038,7 +9949,7 @@
           </a:bodyPr>
           <a:lstStyle/>
           <a:p>
-            <a:pPr algn="l" indent="0" marL="0">
+            <a:pPr marL="0" indent="0" algn="l">
               <a:lnSpc>
                 <a:spcPts val="1960"/>
               </a:lnSpc>
@@ -9082,7 +9993,7 @@
           </a:bodyPr>
           <a:lstStyle/>
           <a:p>
-            <a:pPr algn="l" indent="0" marL="0">
+            <a:pPr marL="0" indent="0" algn="l">
               <a:lnSpc>
                 <a:spcPts val="1680"/>
               </a:lnSpc>
@@ -9126,7 +10037,7 @@
           </a:bodyPr>
           <a:lstStyle/>
           <a:p>
-            <a:pPr algn="l" indent="0" marL="0">
+            <a:pPr marL="0" indent="0" algn="l">
               <a:lnSpc>
                 <a:spcPts val="1960"/>
               </a:lnSpc>
@@ -9170,7 +10081,7 @@
           </a:bodyPr>
           <a:lstStyle/>
           <a:p>
-            <a:pPr algn="l" indent="0" marL="0">
+            <a:pPr marL="0" indent="0" algn="l">
               <a:lnSpc>
                 <a:spcPts val="1680"/>
               </a:lnSpc>
@@ -9214,7 +10125,7 @@
           </a:bodyPr>
           <a:lstStyle/>
           <a:p>
-            <a:pPr algn="l" indent="0" marL="0">
+            <a:pPr marL="0" indent="0" algn="l">
               <a:lnSpc>
                 <a:spcPts val="1680"/>
               </a:lnSpc>
@@ -9256,17 +10167,24 @@
           </a:solidFill>
           <a:ln/>
         </p:spPr>
+        <p:txBody>
+          <a:bodyPr/>
+          <a:lstStyle/>
+          <a:p>
+            <a:endParaRPr lang="en-US"/>
+          </a:p>
+        </p:txBody>
       </p:sp>
       <p:pic>
         <p:nvPicPr>
-          <p:cNvPr id="12" name="Image 0" descr="Sequence diagram of one test round between the planner, knowledge graph, executor, device and investigator, numbered 1 to 14">    </p:cNvPr>
+          <p:cNvPr id="12" name="Image 0" descr="Sequence diagram of one test round between the planner, knowledge graph, executor, device and investigator, numbered 1 to 14"/>
           <p:cNvPicPr>
             <a:picLocks noChangeAspect="1"/>
           </p:cNvPicPr>
           <p:nvPr/>
         </p:nvPicPr>
         <p:blipFill>
-          <a:blip r:embed="rId1"/>
+          <a:blip r:embed="rId3"/>
           <a:stretch>
             <a:fillRect/>
           </a:stretch>
@@ -9305,6 +10223,13 @@
             <a:prstDash val="solid"/>
           </a:ln>
         </p:spPr>
+        <p:txBody>
+          <a:bodyPr/>
+          <a:lstStyle/>
+          <a:p>
+            <a:endParaRPr lang="en-US"/>
+          </a:p>
+        </p:txBody>
       </p:sp>
       <p:sp>
         <p:nvSpPr>
@@ -9329,14 +10254,14 @@
           </a:bodyPr>
           <a:lstStyle/>
           <a:p>
-            <a:pPr algn="l" indent="0" marL="0">
+            <a:pPr marL="0" indent="0" algn="l">
               <a:lnSpc>
                 <a:spcPts val="1680"/>
               </a:lnSpc>
               <a:buNone/>
             </a:pPr>
             <a:r>
-              <a:rPr lang="en-US" sz="1200" b="1" spc="100" kern="0" dirty="0">
+              <a:rPr lang="en-US" sz="1200" b="1" kern="0" spc="100" dirty="0">
                 <a:solidFill>
                   <a:srgbClr val="0B6A8F"/>
                 </a:solidFill>
@@ -9373,7 +10298,7 @@
           </a:bodyPr>
           <a:lstStyle/>
           <a:p>
-            <a:pPr algn="l" indent="0" marL="0">
+            <a:pPr marL="0" indent="0" algn="l">
               <a:lnSpc>
                 <a:spcPts val="1680"/>
               </a:lnSpc>
@@ -9389,329 +10314,6 @@
                 <a:cs typeface="IBM Plex Sans" pitchFamily="34" charset="-120"/>
               </a:rPr>
               <a:t>Exploratory Testing Automation · CSE 450 · BUET</a:t>
-            </a:r>
-            <a:endParaRPr lang="en-US" sz="1200" dirty="0"/>
-          </a:p>
-        </p:txBody>
-      </p:sp>
-    </p:spTree>
-  </p:cSld>
-  <p:clrMapOvr>
-    <a:masterClrMapping/>
-  </p:clrMapOvr>
-</p:sld>
-</file>
-
-<file path=ppt/slides/slide9.xml><?xml version="1.0" encoding="utf-8"?>
-<p:sld xmlns:a="http://schemas.openxmlformats.org/drawingml/2006/main" xmlns:r="http://schemas.openxmlformats.org/officeDocument/2006/relationships" xmlns:p="http://schemas.openxmlformats.org/presentationml/2006/main">
-  <p:cSld name="Slide 9">
-    <p:bg>
-      <p:bgPr>
-        <a:solidFill>
-          <a:srgbClr val="EDF2F4"/>
-        </a:solidFill>
-      </p:bgPr>
-    </p:bg>
-    <p:spTree>
-      <p:nvGrpSpPr>
-        <p:cNvPr id="1" name=""/>
-        <p:cNvGrpSpPr/>
-        <p:nvPr/>
-      </p:nvGrpSpPr>
-      <p:grpSpPr>
-        <a:xfrm>
-          <a:off x="0" y="0"/>
-          <a:ext cx="0" cy="0"/>
-          <a:chOff x="0" y="0"/>
-          <a:chExt cx="0" cy="0"/>
-        </a:xfrm>
-      </p:grpSpPr>
-      <p:sp>
-        <p:nvSpPr>
-          <p:cNvPr id="2" name="Text 0"/>
-          <p:cNvSpPr/>
-          <p:nvPr/>
-        </p:nvSpPr>
-        <p:spPr>
-          <a:xfrm>
-            <a:off x="812800" y="508000"/>
-            <a:ext cx="10883392" cy="231279"/>
-          </a:xfrm>
-          <a:prstGeom prst="rect">
-            <a:avLst/>
-          </a:prstGeom>
-          <a:noFill/>
-          <a:ln/>
-        </p:spPr>
-        <p:txBody>
-          <a:bodyPr wrap="square" lIns="0" tIns="0" rIns="0" bIns="0" rtlCol="0" anchor="t">
-            <a:normAutofit/>
-          </a:bodyPr>
-          <a:lstStyle/>
-          <a:p>
-            <a:pPr algn="l" indent="0" marL="0">
-              <a:lnSpc>
-                <a:spcPts val="1622"/>
-              </a:lnSpc>
-              <a:buNone/>
-            </a:pPr>
-            <a:r>
-              <a:rPr lang="en-US" sz="1159" b="1" spc="100" kern="0" dirty="0">
-                <a:solidFill>
-                  <a:srgbClr val="0B6A8F"/>
-                </a:solidFill>
-                <a:latin typeface="IBM Plex Sans" pitchFamily="34" charset="0"/>
-                <a:ea typeface="IBM Plex Sans" pitchFamily="34" charset="-122"/>
-                <a:cs typeface="IBM Plex Sans" pitchFamily="34" charset="-120"/>
-              </a:rPr>
-              <a:t>ARCHITECTURE · THE SHARED MEMORY</a:t>
-            </a:r>
-            <a:endParaRPr lang="en-US" sz="1159" dirty="0"/>
-          </a:p>
-        </p:txBody>
-      </p:sp>
-      <p:sp>
-        <p:nvSpPr>
-          <p:cNvPr id="3" name="Text 1"/>
-          <p:cNvSpPr/>
-          <p:nvPr/>
-        </p:nvSpPr>
-        <p:spPr>
-          <a:xfrm>
-            <a:off x="812800" y="790079"/>
-            <a:ext cx="10883392" cy="429816"/>
-          </a:xfrm>
-          <a:prstGeom prst="rect">
-            <a:avLst/>
-          </a:prstGeom>
-          <a:noFill/>
-          <a:ln/>
-        </p:spPr>
-        <p:txBody>
-          <a:bodyPr wrap="square" lIns="0" tIns="0" rIns="0" bIns="0" rtlCol="0" anchor="t">
-            <a:normAutofit/>
-          </a:bodyPr>
-          <a:lstStyle/>
-          <a:p>
-            <a:pPr algn="l" indent="0" marL="0">
-              <a:lnSpc>
-                <a:spcPts val="3218"/>
-              </a:lnSpc>
-              <a:buNone/>
-            </a:pPr>
-            <a:r>
-              <a:rPr lang="en-US" sz="2925" b="1" dirty="0">
-                <a:solidFill>
-                  <a:srgbClr val="14303D"/>
-                </a:solidFill>
-                <a:latin typeface="Source Serif 4" pitchFamily="34" charset="0"/>
-                <a:ea typeface="Source Serif 4" pitchFamily="34" charset="-122"/>
-                <a:cs typeface="Source Serif 4" pitchFamily="34" charset="-120"/>
-              </a:rPr>
-              <a:t>What the knowledge graph stores</a:t>
-            </a:r>
-            <a:endParaRPr lang="en-US" sz="2925" dirty="0"/>
-          </a:p>
-        </p:txBody>
-      </p:sp>
-      <p:sp>
-        <p:nvSpPr>
-          <p:cNvPr id="4" name="Shape 2"/>
-          <p:cNvSpPr/>
-          <p:nvPr/>
-        </p:nvSpPr>
-        <p:spPr>
-          <a:xfrm>
-            <a:off x="812800" y="1346895"/>
-            <a:ext cx="10566400" cy="4183410"/>
-          </a:xfrm>
-          <a:prstGeom prst="roundRect">
-            <a:avLst>
-              <a:gd name="adj" fmla="val 2429"/>
-            </a:avLst>
-          </a:prstGeom>
-          <a:solidFill>
-            <a:srgbClr val="FDFEFE"/>
-          </a:solidFill>
-          <a:ln/>
-        </p:spPr>
-      </p:sp>
-      <p:pic>
-        <p:nvPicPr>
-          <p:cNvPr id="5" name="Image 0" descr="Neo4j schema. Specification side: SRS has chunks; each Requirement is derived from a chunk, has validation rules and involves entities. Tests: a TestCase covers requirements and a feature area and has runs; an ExecutionLog points to its test case and stores the ordered path of screens. App model: UIState transitions to UIState, and navigation-tree nodes lead to screens. A Finding is found by an execution log, is about a screen, concerns a requirement, and can be generalised by another finding.">    </p:cNvPr>
-          <p:cNvPicPr>
-            <a:picLocks noChangeAspect="1"/>
-          </p:cNvPicPr>
-          <p:nvPr/>
-        </p:nvPicPr>
-        <p:blipFill>
-          <a:blip r:embed="rId1"/>
-          <a:stretch>
-            <a:fillRect/>
-          </a:stretch>
-        </p:blipFill>
-        <p:spPr>
-          <a:xfrm>
-            <a:off x="1330082" y="1353245"/>
-            <a:ext cx="9531836" cy="4170710"/>
-          </a:xfrm>
-          <a:prstGeom prst="rect">
-            <a:avLst/>
-          </a:prstGeom>
-        </p:spPr>
-      </p:pic>
-      <p:sp>
-        <p:nvSpPr>
-          <p:cNvPr id="6" name="Shape 3"/>
-          <p:cNvSpPr/>
-          <p:nvPr/>
-        </p:nvSpPr>
-        <p:spPr>
-          <a:xfrm>
-            <a:off x="815975" y="1350070"/>
-            <a:ext cx="10560050" cy="4177060"/>
-          </a:xfrm>
-          <a:prstGeom prst="roundRect">
-            <a:avLst>
-              <a:gd name="adj" fmla="val 2356"/>
-            </a:avLst>
-          </a:prstGeom>
-          <a:noFill/>
-          <a:ln w="6350">
-            <a:solidFill>
-              <a:srgbClr val="D6E1E6"/>
-            </a:solidFill>
-            <a:prstDash val="solid"/>
-          </a:ln>
-        </p:spPr>
-      </p:sp>
-      <p:sp>
-        <p:nvSpPr>
-          <p:cNvPr id="7" name="Text 4"/>
-          <p:cNvSpPr/>
-          <p:nvPr/>
-        </p:nvSpPr>
-        <p:spPr>
-          <a:xfrm>
-            <a:off x="812800" y="5682704"/>
-            <a:ext cx="10883392" cy="438696"/>
-          </a:xfrm>
-          <a:prstGeom prst="rect">
-            <a:avLst/>
-          </a:prstGeom>
-          <a:noFill/>
-          <a:ln/>
-        </p:spPr>
-        <p:txBody>
-          <a:bodyPr wrap="square" lIns="0" tIns="0" rIns="0" bIns="0" rtlCol="0" anchor="t">
-            <a:normAutofit/>
-          </a:bodyPr>
-          <a:lstStyle/>
-          <a:p>
-            <a:pPr algn="l" indent="0" marL="0">
-              <a:lnSpc>
-                <a:spcPts val="1633"/>
-              </a:lnSpc>
-              <a:buNone/>
-            </a:pPr>
-            <a:r>
-              <a:rPr lang="en-US" sz="1166" dirty="0">
-                <a:solidFill>
-                  <a:srgbClr val="46596A"/>
-                </a:solidFill>
-                <a:latin typeface="IBM Plex Sans" pitchFamily="34" charset="0"/>
-                <a:ea typeface="IBM Plex Sans" pitchFamily="34" charset="-122"/>
-                <a:cs typeface="IBM Plex Sans" pitchFamily="34" charset="-120"/>
-              </a:rPr>
-              <a:t>Orange: from the specification · Purple: tests and runs · Blue: the app model · Red: findings · Dashed: stored as a property, not a relationship. Every node belongs to one project.</a:t>
-            </a:r>
-            <a:endParaRPr lang="en-US" sz="1166" dirty="0"/>
-          </a:p>
-        </p:txBody>
-      </p:sp>
-      <p:sp>
-        <p:nvSpPr>
-          <p:cNvPr id="8" name="Text 5"/>
-          <p:cNvSpPr/>
-          <p:nvPr/>
-        </p:nvSpPr>
-        <p:spPr>
-          <a:xfrm>
-            <a:off x="812800" y="6238280"/>
-            <a:ext cx="3459976" cy="238720"/>
-          </a:xfrm>
-          <a:prstGeom prst="rect">
-            <a:avLst/>
-          </a:prstGeom>
-          <a:noFill/>
-          <a:ln/>
-        </p:spPr>
-        <p:txBody>
-          <a:bodyPr wrap="square" lIns="0" tIns="0" rIns="0" bIns="0" rtlCol="0" anchor="t">
-            <a:normAutofit/>
-          </a:bodyPr>
-          <a:lstStyle/>
-          <a:p>
-            <a:pPr algn="l" indent="0" marL="0">
-              <a:lnSpc>
-                <a:spcPts val="1680"/>
-              </a:lnSpc>
-              <a:buNone/>
-            </a:pPr>
-            <a:r>
-              <a:rPr lang="en-US" sz="1200" dirty="0">
-                <a:solidFill>
-                  <a:srgbClr val="55697A"/>
-                </a:solidFill>
-                <a:latin typeface="IBM Plex Sans" pitchFamily="34" charset="0"/>
-                <a:ea typeface="IBM Plex Sans" pitchFamily="34" charset="-122"/>
-                <a:cs typeface="IBM Plex Sans" pitchFamily="34" charset="-120"/>
-              </a:rPr>
-              <a:t>Exploratory Testing Automation · CSE 450 · BUET</a:t>
-            </a:r>
-            <a:endParaRPr lang="en-US" sz="1200" dirty="0"/>
-          </a:p>
-        </p:txBody>
-      </p:sp>
-      <p:sp>
-        <p:nvSpPr>
-          <p:cNvPr id="9" name="Text 6"/>
-          <p:cNvSpPr/>
-          <p:nvPr/>
-        </p:nvSpPr>
-        <p:spPr>
-          <a:xfrm>
-            <a:off x="11287720" y="6238280"/>
-            <a:ext cx="142280" cy="238720"/>
-          </a:xfrm>
-          <a:prstGeom prst="rect">
-            <a:avLst/>
-          </a:prstGeom>
-          <a:noFill/>
-          <a:ln/>
-        </p:spPr>
-        <p:txBody>
-          <a:bodyPr wrap="square" lIns="0" tIns="0" rIns="0" bIns="0" rtlCol="0" anchor="t">
-            <a:normAutofit/>
-          </a:bodyPr>
-          <a:lstStyle/>
-          <a:p>
-            <a:pPr algn="l" indent="0" marL="0">
-              <a:lnSpc>
-                <a:spcPts val="1680"/>
-              </a:lnSpc>
-              <a:buNone/>
-            </a:pPr>
-            <a:r>
-              <a:rPr lang="en-US" sz="1200" dirty="0">
-                <a:solidFill>
-                  <a:srgbClr val="55697A"/>
-                </a:solidFill>
-                <a:latin typeface="IBM Plex Sans" pitchFamily="34" charset="0"/>
-                <a:ea typeface="IBM Plex Sans" pitchFamily="34" charset="-122"/>
-                <a:cs typeface="IBM Plex Sans" pitchFamily="34" charset="-120"/>
-              </a:rPr>
-              <a:t>9</a:t>
             </a:r>
             <a:endParaRPr lang="en-US" sz="1200" dirty="0"/>
           </a:p>
@@ -10018,4 +10620,319 @@
     </a:ext>
   </a:extLst>
 </a:theme>
+</file>
+
+<file path=ppt/theme/theme2.xml><?xml version="1.0" encoding="utf-8"?>
+<a:theme xmlns:a="http://schemas.openxmlformats.org/drawingml/2006/main" name="Office Theme">
+  <a:themeElements>
+    <a:clrScheme name="Office">
+      <a:dk1>
+        <a:sysClr val="windowText" lastClr="000000"/>
+      </a:dk1>
+      <a:lt1>
+        <a:sysClr val="window" lastClr="FFFFFF"/>
+      </a:lt1>
+      <a:dk2>
+        <a:srgbClr val="0E2841"/>
+      </a:dk2>
+      <a:lt2>
+        <a:srgbClr val="E8E8E8"/>
+      </a:lt2>
+      <a:accent1>
+        <a:srgbClr val="156082"/>
+      </a:accent1>
+      <a:accent2>
+        <a:srgbClr val="E97132"/>
+      </a:accent2>
+      <a:accent3>
+        <a:srgbClr val="196B24"/>
+      </a:accent3>
+      <a:accent4>
+        <a:srgbClr val="0F9ED5"/>
+      </a:accent4>
+      <a:accent5>
+        <a:srgbClr val="A02B93"/>
+      </a:accent5>
+      <a:accent6>
+        <a:srgbClr val="4EA72E"/>
+      </a:accent6>
+      <a:hlink>
+        <a:srgbClr val="467886"/>
+      </a:hlink>
+      <a:folHlink>
+        <a:srgbClr val="96607D"/>
+      </a:folHlink>
+    </a:clrScheme>
+    <a:fontScheme name="Office">
+      <a:majorFont>
+        <a:latin typeface="Aptos Display" panose="02110004020202020204"/>
+        <a:ea typeface=""/>
+        <a:cs typeface=""/>
+        <a:font script="Jpan" typeface="游ゴシック Light"/>
+        <a:font script="Hang" typeface="맑은 고딕"/>
+        <a:font script="Hans" typeface="等线 Light"/>
+        <a:font script="Hant" typeface="新細明體"/>
+        <a:font script="Arab" typeface="Times New Roman"/>
+        <a:font script="Hebr" typeface="Times New Roman"/>
+        <a:font script="Thai" typeface="Angsana New"/>
+        <a:font script="Ethi" typeface="Nyala"/>
+        <a:font script="Beng" typeface="Vrinda"/>
+        <a:font script="Gujr" typeface="Shruti"/>
+        <a:font script="Khmr" typeface="MoolBoran"/>
+        <a:font script="Knda" typeface="Tunga"/>
+        <a:font script="Guru" typeface="Raavi"/>
+        <a:font script="Cans" typeface="Euphemia"/>
+        <a:font script="Cher" typeface="Plantagenet Cherokee"/>
+        <a:font script="Yiii" typeface="Microsoft Yi Baiti"/>
+        <a:font script="Tibt" typeface="Microsoft Himalaya"/>
+        <a:font script="Thaa" typeface="MV Boli"/>
+        <a:font script="Deva" typeface="Mangal"/>
+        <a:font script="Telu" typeface="Gautami"/>
+        <a:font script="Taml" typeface="Latha"/>
+        <a:font script="Syrc" typeface="Estrangelo Edessa"/>
+        <a:font script="Orya" typeface="Kalinga"/>
+        <a:font script="Mlym" typeface="Kartika"/>
+        <a:font script="Laoo" typeface="DokChampa"/>
+        <a:font script="Sinh" typeface="Iskoola Pota"/>
+        <a:font script="Mong" typeface="Mongolian Baiti"/>
+        <a:font script="Viet" typeface="Times New Roman"/>
+        <a:font script="Uigh" typeface="Microsoft Uighur"/>
+        <a:font script="Geor" typeface="Sylfaen"/>
+        <a:font script="Armn" typeface="Arial"/>
+        <a:font script="Bugi" typeface="Leelawadee UI"/>
+        <a:font script="Bopo" typeface="Microsoft JhengHei"/>
+        <a:font script="Java" typeface="Javanese Text"/>
+        <a:font script="Lisu" typeface="Segoe UI"/>
+        <a:font script="Mymr" typeface="Myanmar Text"/>
+        <a:font script="Nkoo" typeface="Ebrima"/>
+        <a:font script="Olck" typeface="Nirmala UI"/>
+        <a:font script="Osma" typeface="Ebrima"/>
+        <a:font script="Phag" typeface="Phagspa"/>
+        <a:font script="Syrn" typeface="Estrangelo Edessa"/>
+        <a:font script="Syrj" typeface="Estrangelo Edessa"/>
+        <a:font script="Syre" typeface="Estrangelo Edessa"/>
+        <a:font script="Sora" typeface="Nirmala UI"/>
+        <a:font script="Tale" typeface="Microsoft Tai Le"/>
+        <a:font script="Talu" typeface="Microsoft New Tai Lue"/>
+        <a:font script="Tfng" typeface="Ebrima"/>
+      </a:majorFont>
+      <a:minorFont>
+        <a:latin typeface="Aptos" panose="02110004020202020204"/>
+        <a:ea typeface=""/>
+        <a:cs typeface=""/>
+        <a:font script="Jpan" typeface="游ゴシック"/>
+        <a:font script="Hang" typeface="맑은 고딕"/>
+        <a:font script="Hans" typeface="等线"/>
+        <a:font script="Hant" typeface="新細明體"/>
+        <a:font script="Arab" typeface="Arial"/>
+        <a:font script="Hebr" typeface="Arial"/>
+        <a:font script="Thai" typeface="Cordia New"/>
+        <a:font script="Ethi" typeface="Nyala"/>
+        <a:font script="Beng" typeface="Vrinda"/>
+        <a:font script="Gujr" typeface="Shruti"/>
+        <a:font script="Khmr" typeface="DaunPenh"/>
+        <a:font script="Knda" typeface="Tunga"/>
+        <a:font script="Guru" typeface="Raavi"/>
+        <a:font script="Cans" typeface="Euphemia"/>
+        <a:font script="Cher" typeface="Plantagenet Cherokee"/>
+        <a:font script="Yiii" typeface="Microsoft Yi Baiti"/>
+        <a:font script="Tibt" typeface="Microsoft Himalaya"/>
+        <a:font script="Thaa" typeface="MV Boli"/>
+        <a:font script="Deva" typeface="Mangal"/>
+        <a:font script="Telu" typeface="Gautami"/>
+        <a:font script="Taml" typeface="Latha"/>
+        <a:font script="Syrc" typeface="Estrangelo Edessa"/>
+        <a:font script="Orya" typeface="Kalinga"/>
+        <a:font script="Mlym" typeface="Kartika"/>
+        <a:font script="Laoo" typeface="DokChampa"/>
+        <a:font script="Sinh" typeface="Iskoola Pota"/>
+        <a:font script="Mong" typeface="Mongolian Baiti"/>
+        <a:font script="Viet" typeface="Arial"/>
+        <a:font script="Uigh" typeface="Microsoft Uighur"/>
+        <a:font script="Geor" typeface="Sylfaen"/>
+        <a:font script="Armn" typeface="Arial"/>
+        <a:font script="Bugi" typeface="Leelawadee UI"/>
+        <a:font script="Bopo" typeface="Microsoft JhengHei"/>
+        <a:font script="Java" typeface="Javanese Text"/>
+        <a:font script="Lisu" typeface="Segoe UI"/>
+        <a:font script="Mymr" typeface="Myanmar Text"/>
+        <a:font script="Nkoo" typeface="Ebrima"/>
+        <a:font script="Olck" typeface="Nirmala UI"/>
+        <a:font script="Osma" typeface="Ebrima"/>
+        <a:font script="Phag" typeface="Phagspa"/>
+        <a:font script="Syrn" typeface="Estrangelo Edessa"/>
+        <a:font script="Syrj" typeface="Estrangelo Edessa"/>
+        <a:font script="Syre" typeface="Estrangelo Edessa"/>
+        <a:font script="Sora" typeface="Nirmala UI"/>
+        <a:font script="Tale" typeface="Microsoft Tai Le"/>
+        <a:font script="Talu" typeface="Microsoft New Tai Lue"/>
+        <a:font script="Tfng" typeface="Ebrima"/>
+      </a:minorFont>
+    </a:fontScheme>
+    <a:fmtScheme name="Office">
+      <a:fillStyleLst>
+        <a:solidFill>
+          <a:schemeClr val="phClr"/>
+        </a:solidFill>
+        <a:gradFill rotWithShape="1">
+          <a:gsLst>
+            <a:gs pos="0">
+              <a:schemeClr val="phClr">
+                <a:lumMod val="110000"/>
+                <a:satMod val="105000"/>
+                <a:tint val="67000"/>
+              </a:schemeClr>
+            </a:gs>
+            <a:gs pos="50000">
+              <a:schemeClr val="phClr">
+                <a:lumMod val="105000"/>
+                <a:satMod val="103000"/>
+                <a:tint val="73000"/>
+              </a:schemeClr>
+            </a:gs>
+            <a:gs pos="100000">
+              <a:schemeClr val="phClr">
+                <a:lumMod val="105000"/>
+                <a:satMod val="109000"/>
+                <a:tint val="81000"/>
+              </a:schemeClr>
+            </a:gs>
+          </a:gsLst>
+          <a:lin ang="5400000" scaled="0"/>
+        </a:gradFill>
+        <a:gradFill rotWithShape="1">
+          <a:gsLst>
+            <a:gs pos="0">
+              <a:schemeClr val="phClr">
+                <a:satMod val="103000"/>
+                <a:lumMod val="102000"/>
+                <a:tint val="94000"/>
+              </a:schemeClr>
+            </a:gs>
+            <a:gs pos="50000">
+              <a:schemeClr val="phClr">
+                <a:satMod val="110000"/>
+                <a:lumMod val="100000"/>
+                <a:shade val="100000"/>
+              </a:schemeClr>
+            </a:gs>
+            <a:gs pos="100000">
+              <a:schemeClr val="phClr">
+                <a:lumMod val="99000"/>
+                <a:satMod val="120000"/>
+                <a:shade val="78000"/>
+              </a:schemeClr>
+            </a:gs>
+          </a:gsLst>
+          <a:lin ang="5400000" scaled="0"/>
+        </a:gradFill>
+      </a:fillStyleLst>
+      <a:lnStyleLst>
+        <a:ln w="12700" cap="flat" cmpd="sng" algn="ctr">
+          <a:solidFill>
+            <a:schemeClr val="phClr"/>
+          </a:solidFill>
+          <a:prstDash val="solid"/>
+          <a:miter lim="800000"/>
+        </a:ln>
+        <a:ln w="19050" cap="flat" cmpd="sng" algn="ctr">
+          <a:solidFill>
+            <a:schemeClr val="phClr"/>
+          </a:solidFill>
+          <a:prstDash val="solid"/>
+          <a:miter lim="800000"/>
+        </a:ln>
+        <a:ln w="25400" cap="flat" cmpd="sng" algn="ctr">
+          <a:solidFill>
+            <a:schemeClr val="phClr"/>
+          </a:solidFill>
+          <a:prstDash val="solid"/>
+          <a:miter lim="800000"/>
+        </a:ln>
+      </a:lnStyleLst>
+      <a:effectStyleLst>
+        <a:effectStyle>
+          <a:effectLst/>
+        </a:effectStyle>
+        <a:effectStyle>
+          <a:effectLst/>
+        </a:effectStyle>
+        <a:effectStyle>
+          <a:effectLst>
+            <a:outerShdw blurRad="57150" dist="19050" dir="5400000" algn="ctr" rotWithShape="0">
+              <a:srgbClr val="000000">
+                <a:alpha val="63000"/>
+              </a:srgbClr>
+            </a:outerShdw>
+          </a:effectLst>
+        </a:effectStyle>
+      </a:effectStyleLst>
+      <a:bgFillStyleLst>
+        <a:solidFill>
+          <a:schemeClr val="phClr"/>
+        </a:solidFill>
+        <a:solidFill>
+          <a:schemeClr val="phClr">
+            <a:tint val="95000"/>
+            <a:satMod val="170000"/>
+          </a:schemeClr>
+        </a:solidFill>
+        <a:gradFill rotWithShape="1">
+          <a:gsLst>
+            <a:gs pos="0">
+              <a:schemeClr val="phClr">
+                <a:tint val="93000"/>
+                <a:satMod val="150000"/>
+                <a:shade val="98000"/>
+                <a:lumMod val="102000"/>
+              </a:schemeClr>
+            </a:gs>
+            <a:gs pos="50000">
+              <a:schemeClr val="phClr">
+                <a:tint val="98000"/>
+                <a:satMod val="130000"/>
+                <a:shade val="90000"/>
+                <a:lumMod val="103000"/>
+              </a:schemeClr>
+            </a:gs>
+            <a:gs pos="100000">
+              <a:schemeClr val="phClr">
+                <a:shade val="63000"/>
+                <a:satMod val="120000"/>
+              </a:schemeClr>
+            </a:gs>
+          </a:gsLst>
+          <a:lin ang="5400000" scaled="0"/>
+        </a:gradFill>
+      </a:bgFillStyleLst>
+    </a:fmtScheme>
+  </a:themeElements>
+  <a:objectDefaults>
+    <a:lnDef>
+      <a:spPr/>
+      <a:bodyPr/>
+      <a:lstStyle/>
+      <a:style>
+        <a:lnRef idx="2">
+          <a:schemeClr val="accent1"/>
+        </a:lnRef>
+        <a:fillRef idx="0">
+          <a:schemeClr val="accent1"/>
+        </a:fillRef>
+        <a:effectRef idx="1">
+          <a:schemeClr val="accent1"/>
+        </a:effectRef>
+        <a:fontRef idx="minor">
+          <a:schemeClr val="tx1"/>
+        </a:fontRef>
+      </a:style>
+    </a:lnDef>
+  </a:objectDefaults>
+  <a:extraClrSchemeLst/>
+  <a:extLst>
+    <a:ext uri="{05A4C25C-085E-4340-85A3-A5531E510DB2}">
+      <thm15:themeFamily xmlns:thm15="http://schemas.microsoft.com/office/thememl/2012/main" name="Office Theme" id="{2E142A2C-CD16-42D6-873A-C26D2A0506FA}" vid="{1BDDFF52-6CD6-40A5-AB3C-68EB2F1E4D0A}"/>
+    </a:ext>
+  </a:extLst>
+</a:theme>
 </file>